--- a/2.1 Decomposition model.pptx
+++ b/2.1 Decomposition model.pptx
@@ -272,7 +272,7 @@
       <p15:notesGuideLst xmlns:p15="http://schemas.microsoft.com/office/powerpoint/2012/main"/>
     </p:ext>
     <p:ext uri="http://customooxmlschemas.google.com/">
-      <go:slidesCustomData xmlns:mc="http://schemas.openxmlformats.org/markup-compatibility/2006" xmlns:mv="urn:schemas-microsoft-com:mac:vml" xmlns:c="http://schemas.openxmlformats.org/drawingml/2006/chart" xmlns:dgm="http://schemas.openxmlformats.org/drawingml/2006/diagram" xmlns:o="urn:schemas-microsoft-com:office:office" xmlns:v="urn:schemas-microsoft-com:vml" xmlns:pvml="urn:schemas-microsoft-com:office:powerpoint" xmlns:com="http://schemas.openxmlformats.org/drawingml/2006/compatibility" xmlns:p14="http://schemas.microsoft.com/office/powerpoint/2010/main" xmlns:p15="http://schemas.microsoft.com/office/powerpoint/2012/main" xmlns:ahyp="http://schemas.microsoft.com/office/drawing/2018/hyperlinkcolor" xmlns:go="http://customooxmlschemas.google.com/" xmlns="" r:id="rId59" roundtripDataSignature="AMtx7mh3YP3xexYcFoahXa2ehi0H5V4Zaw=="/>
+      <go:slidesCustomData xmlns="" xmlns:go="http://customooxmlschemas.google.com/" xmlns:ahyp="http://schemas.microsoft.com/office/drawing/2018/hyperlinkcolor" xmlns:p15="http://schemas.microsoft.com/office/powerpoint/2012/main" xmlns:p14="http://schemas.microsoft.com/office/powerpoint/2010/main" xmlns:com="http://schemas.openxmlformats.org/drawingml/2006/compatibility" xmlns:pvml="urn:schemas-microsoft-com:office:powerpoint" xmlns:v="urn:schemas-microsoft-com:vml" xmlns:o="urn:schemas-microsoft-com:office:office" xmlns:dgm="http://schemas.openxmlformats.org/drawingml/2006/diagram" xmlns:c="http://schemas.openxmlformats.org/drawingml/2006/chart" xmlns:mv="urn:schemas-microsoft-com:mac:vml" xmlns:mc="http://schemas.openxmlformats.org/markup-compatibility/2006" r:id="rId59" roundtripDataSignature="AMtx7mh3YP3xexYcFoahXa2ehi0H5V4Zaw=="/>
     </p:ext>
   </p:extLst>
 </p:presentation>
@@ -380,7 +380,7 @@
           <a:p>
             <a:fld id="{0CBFB8CE-488C-4A7E-87F2-3AF6127C51C1}" type="datetimeFigureOut">
               <a:rPr lang="en-IE" smtClean="0"/>
-              <a:t>28/08/2026</a:t>
+              <a:t>30/09/2026</a:t>
             </a:fld>
             <a:endParaRPr lang="en-IE"/>
           </a:p>
@@ -2485,8 +2485,8 @@
         </p:nvSpPr>
         <p:spPr>
           <a:xfrm>
-            <a:off x="970722" y="1901951"/>
-            <a:ext cx="10515597" cy="4194176"/>
+            <a:off x="970722" y="1388854"/>
+            <a:ext cx="10515597" cy="4707273"/>
           </a:xfrm>
         </p:spPr>
         <p:txBody>
@@ -5532,7 +5532,7 @@
     <p:sldLayoutId id="2147483728" r:id="rId6"/>
     <p:sldLayoutId id="2147483729" r:id="rId7"/>
   </p:sldLayoutIdLst>
-  <p:hf sldNum="0" hdr="0" dt="0"/>
+  <p:hf hdr="0" dt="0"/>
   <p:txStyles>
     <p:titleStyle>
       <a:defPPr marR="0" lvl="0" algn="l" rtl="0">
@@ -6386,6 +6386,35 @@
           </a:p>
         </p:txBody>
       </p:sp>
+      <p:sp>
+        <p:nvSpPr>
+          <p:cNvPr id="4" name="Espace réservé du numéro de diapositive 3">
+            <a:extLst>
+              <a:ext uri="{FF2B5EF4-FFF2-40B4-BE49-F238E27FC236}">
+                <a16:creationId xmlns:a16="http://schemas.microsoft.com/office/drawing/2014/main" id="{397E3325-CA6D-D4C7-2841-D3CEAFF46B17}"/>
+              </a:ext>
+            </a:extLst>
+          </p:cNvPr>
+          <p:cNvSpPr>
+            <a:spLocks noGrp="1"/>
+          </p:cNvSpPr>
+          <p:nvPr>
+            <p:ph type="sldNum" idx="12"/>
+          </p:nvPr>
+        </p:nvSpPr>
+        <p:spPr/>
+        <p:txBody>
+          <a:bodyPr/>
+          <a:lstStyle/>
+          <a:p>
+            <a:fld id="{627CDA0C-01AE-4E2F-8829-AAF8EAAF9DB3}" type="slidenum">
+              <a:rPr lang="en-US" smtClean="0"/>
+              <a:t>2</a:t>
+            </a:fld>
+            <a:endParaRPr lang="en-US" dirty="0"/>
+          </a:p>
+        </p:txBody>
+      </p:sp>
       <mc:AlternateContent xmlns:mc="http://schemas.openxmlformats.org/markup-compatibility/2006">
         <mc:Choice xmlns:a14="http://schemas.microsoft.com/office/drawing/2010/main" Requires="a14">
           <p:sp>
@@ -6395,13 +6424,13 @@
                 <a:spLocks noGrp="1"/>
               </p:cNvSpPr>
               <p:nvPr>
-                <p:ph idx="1"/>
+                <p:ph sz="half" idx="2"/>
               </p:nvPr>
             </p:nvSpPr>
             <p:spPr/>
             <p:txBody>
               <a:bodyPr>
-                <a:normAutofit fontScale="92500" lnSpcReduction="20000"/>
+                <a:normAutofit fontScale="92500" lnSpcReduction="10000"/>
               </a:bodyPr>
               <a:lstStyle/>
               <a:p>
@@ -6446,7 +6475,7 @@
                         <a:rPr lang="fr-BE" b="0" i="1" smtClean="0">
                           <a:latin typeface="Cambria Math" panose="02040503050406030204" pitchFamily="18" charset="0"/>
                         </a:rPr>
-                        <m:t>=</m:t>
+                        <m:t>≡</m:t>
                       </m:r>
                       <m:r>
                         <a:rPr lang="fr-BE" b="0" i="1" smtClean="0">
@@ -6680,7 +6709,7 @@
                         <a:rPr lang="fr-BE" b="0" i="1" smtClean="0">
                           <a:latin typeface="Cambria Math" panose="02040503050406030204" pitchFamily="18" charset="0"/>
                         </a:rPr>
-                        <m:t>=</m:t>
+                        <m:t>≡</m:t>
                       </m:r>
                       <m:func>
                         <m:funcPr>
@@ -7486,14 +7515,14 @@
                 <a:spLocks noGrp="1" noRot="1" noChangeAspect="1" noMove="1" noResize="1" noEditPoints="1" noAdjustHandles="1" noChangeArrowheads="1" noChangeShapeType="1" noTextEdit="1"/>
               </p:cNvSpPr>
               <p:nvPr>
-                <p:ph idx="1"/>
+                <p:ph sz="half" idx="2"/>
               </p:nvPr>
             </p:nvSpPr>
             <p:spPr>
               <a:blipFill>
                 <a:blip r:embed="rId2"/>
                 <a:stretch>
-                  <a:fillRect l="-58" t="-2826" b="-2983"/>
+                  <a:fillRect l="-754" t="-2979"/>
                 </a:stretch>
               </a:blipFill>
             </p:spPr>
@@ -7519,10 +7548,15 @@
             <a:spLocks noGrp="1"/>
           </p:cNvSpPr>
           <p:nvPr>
-            <p:ph type="ftr" sz="quarter" idx="11"/>
+            <p:ph type="ftr" sz="quarter" idx="4294967295"/>
           </p:nvPr>
         </p:nvSpPr>
-        <p:spPr/>
+        <p:spPr>
+          <a:xfrm>
+            <a:off x="0" y="0"/>
+            <a:ext cx="0" cy="0"/>
+          </a:xfrm>
+        </p:spPr>
         <p:txBody>
           <a:bodyPr/>
           <a:lstStyle/>
@@ -7574,15 +7608,10 @@
             <p:ph type="title"/>
           </p:nvPr>
         </p:nvSpPr>
-        <p:spPr>
-          <a:xfrm>
-            <a:off x="1991544" y="188640"/>
-            <a:ext cx="8229600" cy="778098"/>
-          </a:xfrm>
-        </p:spPr>
+        <p:spPr/>
         <p:txBody>
           <a:bodyPr>
-            <a:normAutofit fontScale="90000"/>
+            <a:normAutofit/>
           </a:bodyPr>
           <a:lstStyle/>
           <a:p>
@@ -7602,6 +7631,36 @@
           </a:p>
         </p:txBody>
       </p:sp>
+      <p:sp>
+        <p:nvSpPr>
+          <p:cNvPr id="5" name="Espace réservé du numéro de diapositive 4">
+            <a:extLst>
+              <a:ext uri="{FF2B5EF4-FFF2-40B4-BE49-F238E27FC236}">
+                <a16:creationId xmlns:a16="http://schemas.microsoft.com/office/drawing/2014/main" id="{47EC902F-173B-84FB-0061-ED5D71A0FDA1}"/>
+              </a:ext>
+            </a:extLst>
+          </p:cNvPr>
+          <p:cNvSpPr>
+            <a:spLocks noGrp="1"/>
+          </p:cNvSpPr>
+          <p:nvPr>
+            <p:ph type="sldNum" idx="12"/>
+          </p:nvPr>
+        </p:nvSpPr>
+        <p:spPr/>
+        <p:txBody>
+          <a:bodyPr/>
+          <a:lstStyle/>
+          <a:p>
+            <a:fld id="{00000000-1234-1234-1234-123412341234}" type="slidenum">
+              <a:rPr lang="en-GB" smtClean="0"/>
+              <a:pPr/>
+              <a:t>3</a:t>
+            </a:fld>
+            <a:endParaRPr lang="en-GB"/>
+          </a:p>
+        </p:txBody>
+      </p:sp>
       <p:graphicFrame>
         <p:nvGraphicFramePr>
           <p:cNvPr id="4" name="Content Placeholder 3"/>
@@ -7609,12 +7668,17 @@
             <a:graphicFrameLocks noGrp="1"/>
           </p:cNvGraphicFramePr>
           <p:nvPr>
-            <p:ph idx="1"/>
+            <p:ph sz="half" idx="2"/>
+            <p:extLst>
+              <p:ext uri="{D42A27DB-BD31-4B8C-83A1-F6EECF244321}">
+                <p14:modId xmlns:p14="http://schemas.microsoft.com/office/powerpoint/2010/main" val="3636678214"/>
+              </p:ext>
+            </p:extLst>
           </p:nvPr>
         </p:nvGraphicFramePr>
         <p:xfrm>
-          <a:off x="2207569" y="984191"/>
-          <a:ext cx="7288035" cy="5092493"/>
+          <a:off x="969963" y="1389063"/>
+          <a:ext cx="10515598" cy="5009009"/>
         </p:xfrm>
         <a:graphic>
           <a:graphicData uri="http://schemas.openxmlformats.org/drawingml/2006/table">
@@ -7623,42 +7687,42 @@
                 <a:tableStyleId>{5C22544A-7EE6-4342-B048-85BDC9FD1C3A}</a:tableStyleId>
               </a:tblPr>
               <a:tblGrid>
-                <a:gridCol w="1042317">
+                <a:gridCol w="1503915">
                   <a:extLst>
                     <a:ext uri="{9D8B030D-6E8A-4147-A177-3AD203B41FA5}">
                       <a16:colId xmlns:a16="http://schemas.microsoft.com/office/drawing/2014/main" val="20000"/>
                     </a:ext>
                   </a:extLst>
                 </a:gridCol>
-                <a:gridCol w="4457199">
+                <a:gridCol w="6431106">
                   <a:extLst>
                     <a:ext uri="{9D8B030D-6E8A-4147-A177-3AD203B41FA5}">
                       <a16:colId xmlns:a16="http://schemas.microsoft.com/office/drawing/2014/main" val="20001"/>
                     </a:ext>
                   </a:extLst>
                 </a:gridCol>
-                <a:gridCol w="459424">
+                <a:gridCol w="662883">
                   <a:extLst>
                     <a:ext uri="{9D8B030D-6E8A-4147-A177-3AD203B41FA5}">
                       <a16:colId xmlns:a16="http://schemas.microsoft.com/office/drawing/2014/main" val="20003"/>
                     </a:ext>
                   </a:extLst>
                 </a:gridCol>
-                <a:gridCol w="415773">
+                <a:gridCol w="599901">
                   <a:extLst>
                     <a:ext uri="{9D8B030D-6E8A-4147-A177-3AD203B41FA5}">
                       <a16:colId xmlns:a16="http://schemas.microsoft.com/office/drawing/2014/main" val="20004"/>
                     </a:ext>
                   </a:extLst>
                 </a:gridCol>
-                <a:gridCol w="416926">
+                <a:gridCol w="601565">
                   <a:extLst>
                     <a:ext uri="{9D8B030D-6E8A-4147-A177-3AD203B41FA5}">
                       <a16:colId xmlns:a16="http://schemas.microsoft.com/office/drawing/2014/main" val="20005"/>
                     </a:ext>
                   </a:extLst>
                 </a:gridCol>
-                <a:gridCol w="496396">
+                <a:gridCol w="716228">
                   <a:extLst>
                     <a:ext uri="{9D8B030D-6E8A-4147-A177-3AD203B41FA5}">
                       <a16:colId xmlns:a16="http://schemas.microsoft.com/office/drawing/2014/main" val="20006"/>
@@ -7666,7 +7730,7 @@
                   </a:extLst>
                 </a:gridCol>
               </a:tblGrid>
-              <a:tr h="157322">
+              <a:tr h="255912">
                 <a:tc>
                   <a:txBody>
                     <a:bodyPr/>
@@ -7761,7 +7825,7 @@
                   </a:ext>
                 </a:extLst>
               </a:tr>
-              <a:tr h="301338">
+              <a:tr h="255912">
                 <a:tc>
                   <a:txBody>
                     <a:bodyPr/>
@@ -7872,7 +7936,7 @@
                   </a:ext>
                 </a:extLst>
               </a:tr>
-              <a:tr h="301338">
+              <a:tr h="255912">
                 <a:tc>
                   <a:txBody>
                     <a:bodyPr/>
@@ -7955,7 +8019,7 @@
                   </a:ext>
                 </a:extLst>
               </a:tr>
-              <a:tr h="301338">
+              <a:tr h="255912">
                 <a:tc>
                   <a:txBody>
                     <a:bodyPr/>
@@ -8058,7 +8122,7 @@
                   </a:ext>
                 </a:extLst>
               </a:tr>
-              <a:tr h="301338">
+              <a:tr h="255912">
                 <a:tc>
                   <a:txBody>
                     <a:bodyPr/>
@@ -8129,7 +8193,7 @@
                   </a:ext>
                 </a:extLst>
               </a:tr>
-              <a:tr h="301338">
+              <a:tr h="255912">
                 <a:tc>
                   <a:txBody>
                     <a:bodyPr/>
@@ -8220,7 +8284,7 @@
                   </a:ext>
                 </a:extLst>
               </a:tr>
-              <a:tr h="301338">
+              <a:tr h="255912">
                 <a:tc>
                   <a:txBody>
                     <a:bodyPr/>
@@ -8311,7 +8375,7 @@
                   </a:ext>
                 </a:extLst>
               </a:tr>
-              <a:tr h="301338">
+              <a:tr h="255912">
                 <a:tc>
                   <a:txBody>
                     <a:bodyPr/>
@@ -8402,7 +8466,7 @@
                   </a:ext>
                 </a:extLst>
               </a:tr>
-              <a:tr h="301338">
+              <a:tr h="255912">
                 <a:tc>
                   <a:txBody>
                     <a:bodyPr/>
@@ -8509,7 +8573,7 @@
                   </a:ext>
                 </a:extLst>
               </a:tr>
-              <a:tr h="301338">
+              <a:tr h="255912">
                 <a:tc>
                   <a:txBody>
                     <a:bodyPr/>
@@ -8580,7 +8644,7 @@
                   </a:ext>
                 </a:extLst>
               </a:tr>
-              <a:tr h="301338">
+              <a:tr h="255912">
                 <a:tc>
                   <a:txBody>
                     <a:bodyPr/>
@@ -8704,7 +8768,7 @@
                   </a:ext>
                 </a:extLst>
               </a:tr>
-              <a:tr h="520493">
+              <a:tr h="437009">
                 <a:tc>
                   <a:txBody>
                     <a:bodyPr/>
@@ -8828,7 +8892,7 @@
                   </a:ext>
                 </a:extLst>
               </a:tr>
-              <a:tr h="301338">
+              <a:tr h="255912">
                 <a:tc>
                   <a:txBody>
                     <a:bodyPr/>
@@ -8944,7 +9008,7 @@
                   </a:ext>
                 </a:extLst>
               </a:tr>
-              <a:tr h="301338">
+              <a:tr h="255912">
                 <a:tc>
                   <a:txBody>
                     <a:bodyPr/>
@@ -9068,7 +9132,7 @@
                   </a:ext>
                 </a:extLst>
               </a:tr>
-              <a:tr h="301338">
+              <a:tr h="255912">
                 <a:tc>
                   <a:txBody>
                     <a:bodyPr/>
@@ -9188,7 +9252,7 @@
                   </a:ext>
                 </a:extLst>
               </a:tr>
-              <a:tr h="301338">
+              <a:tr h="255912">
                 <a:tc>
                   <a:txBody>
                     <a:bodyPr/>
@@ -9310,6 +9374,34 @@
       </p:graphicFrame>
       <p:sp>
         <p:nvSpPr>
+          <p:cNvPr id="6" name="Footer Placeholder 5"/>
+          <p:cNvSpPr>
+            <a:spLocks noGrp="1"/>
+          </p:cNvSpPr>
+          <p:nvPr>
+            <p:ph type="ftr" sz="quarter" idx="4294967295"/>
+          </p:nvPr>
+        </p:nvSpPr>
+        <p:spPr>
+          <a:xfrm>
+            <a:off x="0" y="0"/>
+            <a:ext cx="0" cy="0"/>
+          </a:xfrm>
+        </p:spPr>
+        <p:txBody>
+          <a:bodyPr/>
+          <a:lstStyle/>
+          <a:p>
+            <a:r>
+              <a:rPr lang="en-US"/>
+              <a:t>Decomposition model</a:t>
+            </a:r>
+            <a:endParaRPr lang="en-US" dirty="0"/>
+          </a:p>
+        </p:txBody>
+      </p:sp>
+      <p:sp>
+        <p:nvSpPr>
           <p:cNvPr id="3" name="Rectangle 2"/>
           <p:cNvSpPr/>
           <p:nvPr/>
@@ -9336,29 +9428,6 @@
             <a:r>
               <a:rPr lang="fr-BE" dirty="0" err="1"/>
               <a:t>partially</a:t>
-            </a:r>
-            <a:endParaRPr lang="en-US" dirty="0"/>
-          </a:p>
-        </p:txBody>
-      </p:sp>
-      <p:sp>
-        <p:nvSpPr>
-          <p:cNvPr id="6" name="Footer Placeholder 5"/>
-          <p:cNvSpPr>
-            <a:spLocks noGrp="1"/>
-          </p:cNvSpPr>
-          <p:nvPr>
-            <p:ph type="ftr" sz="quarter" idx="11"/>
-          </p:nvPr>
-        </p:nvSpPr>
-        <p:spPr/>
-        <p:txBody>
-          <a:bodyPr/>
-          <a:lstStyle/>
-          <a:p>
-            <a:r>
-              <a:rPr lang="en-US"/>
-              <a:t>Decomposition model</a:t>
             </a:r>
             <a:endParaRPr lang="en-US" dirty="0"/>
           </a:p>
@@ -9417,8 +9486,37 @@
           </a:p>
         </p:txBody>
       </p:sp>
-      <mc:AlternateContent xmlns:mc="http://schemas.openxmlformats.org/markup-compatibility/2006" xmlns:a14="http://schemas.microsoft.com/office/drawing/2010/main">
-        <mc:Choice Requires="a14">
+      <p:sp>
+        <p:nvSpPr>
+          <p:cNvPr id="4" name="Espace réservé du numéro de diapositive 3">
+            <a:extLst>
+              <a:ext uri="{FF2B5EF4-FFF2-40B4-BE49-F238E27FC236}">
+                <a16:creationId xmlns:a16="http://schemas.microsoft.com/office/drawing/2014/main" id="{8BF15B58-F279-AFB1-58A0-43CFF5F27257}"/>
+              </a:ext>
+            </a:extLst>
+          </p:cNvPr>
+          <p:cNvSpPr>
+            <a:spLocks noGrp="1"/>
+          </p:cNvSpPr>
+          <p:nvPr>
+            <p:ph type="sldNum" idx="12"/>
+          </p:nvPr>
+        </p:nvSpPr>
+        <p:spPr/>
+        <p:txBody>
+          <a:bodyPr/>
+          <a:lstStyle/>
+          <a:p>
+            <a:fld id="{627CDA0C-01AE-4E2F-8829-AAF8EAAF9DB3}" type="slidenum">
+              <a:rPr lang="en-US" smtClean="0"/>
+              <a:t>4</a:t>
+            </a:fld>
+            <a:endParaRPr lang="en-US" dirty="0"/>
+          </a:p>
+        </p:txBody>
+      </p:sp>
+      <mc:AlternateContent xmlns:mc="http://schemas.openxmlformats.org/markup-compatibility/2006">
+        <mc:Choice xmlns:a14="http://schemas.microsoft.com/office/drawing/2010/main" Requires="a14">
           <p:sp>
             <p:nvSpPr>
               <p:cNvPr id="3" name="Content Placeholder 2"/>
@@ -9426,7 +9524,7 @@
                 <a:spLocks noGrp="1"/>
               </p:cNvSpPr>
               <p:nvPr>
-                <p:ph idx="1"/>
+                <p:ph sz="half" idx="2"/>
               </p:nvPr>
             </p:nvSpPr>
             <p:spPr/>
@@ -9435,7 +9533,7 @@
               <a:lstStyle/>
               <a:p>
                 <a:r>
-                  <a:rPr lang="en-US" dirty="0"/>
+                  <a:rPr lang="en-US" sz="2800" dirty="0"/>
                   <a:t>Additive case:</a:t>
                 </a:r>
               </a:p>
@@ -9449,14 +9547,14 @@
                       <m:sSub>
                         <m:sSubPr>
                           <m:ctrlPr>
-                            <a:rPr lang="en-US" i="1">
+                            <a:rPr lang="en-US" sz="2800" i="1">
                               <a:latin typeface="Cambria Math"/>
                             </a:rPr>
                           </m:ctrlPr>
                         </m:sSubPr>
                         <m:e>
                           <m:r>
-                            <a:rPr lang="en-US" i="1">
+                            <a:rPr lang="en-US" sz="2800" i="1">
                               <a:latin typeface="Cambria Math"/>
                             </a:rPr>
                             <m:t>𝛾</m:t>
@@ -9464,7 +9562,7 @@
                         </m:e>
                         <m:sub>
                           <m:r>
-                            <a:rPr lang="en-US" i="1">
+                            <a:rPr lang="en-US" sz="2800" i="1">
                               <a:latin typeface="Cambria Math"/>
                             </a:rPr>
                             <m:t>𝑢</m:t>
@@ -9472,13 +9570,13 @@
                         </m:sub>
                       </m:sSub>
                       <m:r>
-                        <a:rPr lang="en-US" i="1">
+                        <a:rPr lang="en-US" sz="2800" i="1">
                           <a:latin typeface="Cambria Math"/>
                         </a:rPr>
                         <m:t>∙</m:t>
                       </m:r>
                       <m:r>
-                        <a:rPr lang="en-US" i="1">
+                        <a:rPr lang="en-US" sz="2800" i="1">
                           <a:latin typeface="Cambria Math"/>
                         </a:rPr>
                         <m:t>𝑟𝑒</m:t>
@@ -9486,14 +9584,14 @@
                       <m:sSub>
                         <m:sSubPr>
                           <m:ctrlPr>
-                            <a:rPr lang="en-US" i="1">
+                            <a:rPr lang="en-US" sz="2800" i="1">
                               <a:latin typeface="Cambria Math"/>
                             </a:rPr>
                           </m:ctrlPr>
                         </m:sSubPr>
                         <m:e>
                           <m:r>
-                            <a:rPr lang="en-US" i="1">
+                            <a:rPr lang="en-US" sz="2800" i="1">
                               <a:latin typeface="Cambria Math"/>
                             </a:rPr>
                             <m:t>𝑔</m:t>
@@ -9501,7 +9599,7 @@
                         </m:e>
                         <m:sub>
                           <m:r>
-                            <a:rPr lang="en-US" i="1">
+                            <a:rPr lang="en-US" sz="2800" i="1">
                               <a:latin typeface="Cambria Math"/>
                             </a:rPr>
                             <m:t>𝑢</m:t>
@@ -9509,19 +9607,19 @@
                         </m:sub>
                       </m:sSub>
                       <m:r>
-                        <a:rPr lang="en-US" i="1">
+                        <a:rPr lang="en-US" sz="2800" i="1">
                           <a:latin typeface="Cambria Math"/>
                         </a:rPr>
                         <m:t>+</m:t>
                       </m:r>
                       <m:r>
-                        <a:rPr lang="en-US" i="1">
+                        <a:rPr lang="en-US" sz="2800" i="1">
                           <a:latin typeface="Cambria Math"/>
                         </a:rPr>
                         <m:t>𝜇</m:t>
                       </m:r>
                       <m:r>
-                        <a:rPr lang="en-US" i="1">
+                        <a:rPr lang="en-US" sz="2800" i="1">
                           <a:latin typeface="Cambria Math"/>
                         </a:rPr>
                         <m:t>=</m:t>
@@ -9529,14 +9627,14 @@
                       <m:sSub>
                         <m:sSubPr>
                           <m:ctrlPr>
-                            <a:rPr lang="en-US" i="1">
+                            <a:rPr lang="en-US" sz="2800" i="1">
                               <a:latin typeface="Cambria Math"/>
                             </a:rPr>
                           </m:ctrlPr>
                         </m:sSubPr>
                         <m:e>
                           <m:r>
-                            <a:rPr lang="en-US" i="1">
+                            <a:rPr lang="en-US" sz="2800" i="1">
                               <a:latin typeface="Cambria Math"/>
                             </a:rPr>
                             <m:t>𝑦</m:t>
@@ -9544,7 +9642,7 @@
                         </m:e>
                         <m:sub>
                           <m:r>
-                            <a:rPr lang="en-US" i="1">
+                            <a:rPr lang="en-US" sz="2800" i="1">
                               <a:latin typeface="Cambria Math"/>
                             </a:rPr>
                             <m:t>𝑐𝑚𝑝</m:t>
@@ -9552,7 +9650,7 @@
                         </m:sub>
                       </m:sSub>
                       <m:r>
-                        <a:rPr lang="en-US" i="1">
+                        <a:rPr lang="en-US" sz="2800" i="1">
                           <a:latin typeface="Cambria Math"/>
                         </a:rPr>
                         <m:t>=</m:t>
@@ -9560,14 +9658,14 @@
                       <m:sSub>
                         <m:sSubPr>
                           <m:ctrlPr>
-                            <a:rPr lang="en-US" i="1">
+                            <a:rPr lang="en-US" sz="2800" i="1">
                               <a:latin typeface="Cambria Math"/>
                             </a:rPr>
                           </m:ctrlPr>
                         </m:sSubPr>
                         <m:e>
                           <m:r>
-                            <a:rPr lang="en-US" i="1">
+                            <a:rPr lang="en-US" sz="2800" i="1">
                               <a:latin typeface="Cambria Math"/>
                             </a:rPr>
                             <m:t>𝑡</m:t>
@@ -9575,7 +9673,7 @@
                         </m:e>
                         <m:sub>
                           <m:r>
-                            <a:rPr lang="en-US" i="1">
+                            <a:rPr lang="en-US" sz="2800" i="1">
                               <a:latin typeface="Cambria Math"/>
                             </a:rPr>
                             <m:t>𝑐𝑚𝑝</m:t>
@@ -9583,7 +9681,7 @@
                         </m:sub>
                       </m:sSub>
                       <m:r>
-                        <a:rPr lang="en-US" i="1">
+                        <a:rPr lang="en-US" sz="2800" i="1">
                           <a:latin typeface="Cambria Math"/>
                         </a:rPr>
                         <m:t>+</m:t>
@@ -9591,14 +9689,14 @@
                       <m:sSub>
                         <m:sSubPr>
                           <m:ctrlPr>
-                            <a:rPr lang="en-US" i="1">
+                            <a:rPr lang="en-US" sz="2800" i="1">
                               <a:latin typeface="Cambria Math"/>
                             </a:rPr>
                           </m:ctrlPr>
                         </m:sSubPr>
                         <m:e>
                           <m:r>
-                            <a:rPr lang="en-US" i="1">
+                            <a:rPr lang="en-US" sz="2800" i="1">
                               <a:latin typeface="Cambria Math"/>
                             </a:rPr>
                             <m:t>𝑠</m:t>
@@ -9606,7 +9704,7 @@
                         </m:e>
                         <m:sub>
                           <m:r>
-                            <a:rPr lang="en-US" i="1">
+                            <a:rPr lang="en-US" sz="2800" i="1">
                               <a:latin typeface="Cambria Math"/>
                             </a:rPr>
                             <m:t>𝑐𝑚𝑝</m:t>
@@ -9614,7 +9712,7 @@
                         </m:sub>
                       </m:sSub>
                       <m:r>
-                        <a:rPr lang="en-US" i="1">
+                        <a:rPr lang="en-US" sz="2800" i="1">
                           <a:latin typeface="Cambria Math"/>
                         </a:rPr>
                         <m:t>+</m:t>
@@ -9622,14 +9720,14 @@
                       <m:sSub>
                         <m:sSubPr>
                           <m:ctrlPr>
-                            <a:rPr lang="en-US" i="1">
+                            <a:rPr lang="en-US" sz="2800" i="1">
                               <a:latin typeface="Cambria Math"/>
                             </a:rPr>
                           </m:ctrlPr>
                         </m:sSubPr>
                         <m:e>
                           <m:r>
-                            <a:rPr lang="en-US" i="1">
+                            <a:rPr lang="en-US" sz="2800" i="1">
                               <a:latin typeface="Cambria Math"/>
                             </a:rPr>
                             <m:t>𝑖</m:t>
@@ -9637,7 +9735,7 @@
                         </m:e>
                         <m:sub>
                           <m:r>
-                            <a:rPr lang="en-US" i="1">
+                            <a:rPr lang="en-US" sz="2800" i="1">
                               <a:latin typeface="Cambria Math"/>
                             </a:rPr>
                             <m:t>𝑐𝑚𝑝</m:t>
@@ -9647,14 +9745,14 @@
                     </m:oMath>
                   </m:oMathPara>
                 </a14:m>
-                <a:endParaRPr lang="en-US" dirty="0"/>
+                <a:endParaRPr lang="en-US" sz="2800" dirty="0"/>
               </a:p>
               <a:p>
-                <a:endParaRPr lang="en-US" dirty="0"/>
+                <a:endParaRPr lang="en-US" sz="2800" dirty="0"/>
               </a:p>
               <a:p>
                 <a:r>
-                  <a:rPr lang="en-US" dirty="0"/>
+                  <a:rPr lang="en-US" sz="2800" dirty="0"/>
                   <a:t>Multiplicative case:</a:t>
                 </a:r>
               </a:p>
@@ -9668,14 +9766,14 @@
                       <m:sSub>
                         <m:sSubPr>
                           <m:ctrlPr>
-                            <a:rPr lang="en-US" i="1">
+                            <a:rPr lang="en-US" sz="2800" i="1">
                               <a:latin typeface="Cambria Math"/>
                             </a:rPr>
                           </m:ctrlPr>
                         </m:sSubPr>
                         <m:e>
                           <m:r>
-                            <a:rPr lang="en-US" i="1">
+                            <a:rPr lang="en-US" sz="2800" i="1">
                               <a:latin typeface="Cambria Math"/>
                             </a:rPr>
                             <m:t>𝛾</m:t>
@@ -9683,7 +9781,7 @@
                         </m:e>
                         <m:sub>
                           <m:r>
-                            <a:rPr lang="en-US" i="1">
+                            <a:rPr lang="en-US" sz="2800" i="1">
                               <a:latin typeface="Cambria Math"/>
                             </a:rPr>
                             <m:t>𝑢</m:t>
@@ -9691,13 +9789,13 @@
                         </m:sub>
                       </m:sSub>
                       <m:r>
-                        <a:rPr lang="en-US" i="1">
+                        <a:rPr lang="en-US" sz="2800" i="1">
                           <a:latin typeface="Cambria Math"/>
                         </a:rPr>
                         <m:t>∙</m:t>
                       </m:r>
                       <m:r>
-                        <a:rPr lang="en-US" i="1">
+                        <a:rPr lang="en-US" sz="2800" i="1">
                           <a:latin typeface="Cambria Math"/>
                         </a:rPr>
                         <m:t>𝑟𝑒</m:t>
@@ -9705,14 +9803,14 @@
                       <m:sSub>
                         <m:sSubPr>
                           <m:ctrlPr>
-                            <a:rPr lang="en-US" i="1">
+                            <a:rPr lang="en-US" sz="2800" i="1">
                               <a:latin typeface="Cambria Math"/>
                             </a:rPr>
                           </m:ctrlPr>
                         </m:sSubPr>
                         <m:e>
                           <m:r>
-                            <a:rPr lang="en-US" i="1">
+                            <a:rPr lang="en-US" sz="2800" i="1">
                               <a:latin typeface="Cambria Math"/>
                             </a:rPr>
                             <m:t>𝑔</m:t>
@@ -9720,7 +9818,7 @@
                         </m:e>
                         <m:sub>
                           <m:r>
-                            <a:rPr lang="en-US" i="1">
+                            <a:rPr lang="en-US" sz="2800" i="1">
                               <a:latin typeface="Cambria Math"/>
                             </a:rPr>
                             <m:t>𝑢</m:t>
@@ -9728,19 +9826,19 @@
                         </m:sub>
                       </m:sSub>
                       <m:r>
-                        <a:rPr lang="en-US" i="1">
+                        <a:rPr lang="en-US" sz="2800" i="1">
                           <a:latin typeface="Cambria Math"/>
                         </a:rPr>
                         <m:t>+</m:t>
                       </m:r>
                       <m:r>
-                        <a:rPr lang="en-US" i="1">
+                        <a:rPr lang="en-US" sz="2800" i="1">
                           <a:latin typeface="Cambria Math"/>
                         </a:rPr>
                         <m:t>𝜇</m:t>
                       </m:r>
                       <m:r>
-                        <a:rPr lang="en-US" i="1">
+                        <a:rPr lang="en-US" sz="2800" i="1">
                           <a:latin typeface="Cambria Math"/>
                         </a:rPr>
                         <m:t>=</m:t>
@@ -9748,14 +9846,14 @@
                       <m:sSub>
                         <m:sSubPr>
                           <m:ctrlPr>
-                            <a:rPr lang="en-US" i="1">
+                            <a:rPr lang="en-US" sz="2800" i="1">
                               <a:latin typeface="Cambria Math"/>
                             </a:rPr>
                           </m:ctrlPr>
                         </m:sSubPr>
                         <m:e>
                           <m:r>
-                            <a:rPr lang="en-US" i="1">
+                            <a:rPr lang="en-US" sz="2800" i="1">
                               <a:latin typeface="Cambria Math"/>
                             </a:rPr>
                             <m:t>𝑦</m:t>
@@ -9763,7 +9861,7 @@
                         </m:e>
                         <m:sub>
                           <m:r>
-                            <a:rPr lang="en-US" i="1">
+                            <a:rPr lang="en-US" sz="2800" i="1">
                               <a:latin typeface="Cambria Math"/>
                             </a:rPr>
                             <m:t>𝑙𝑖𝑛</m:t>
@@ -9771,7 +9869,7 @@
                         </m:sub>
                       </m:sSub>
                       <m:r>
-                        <a:rPr lang="en-US" i="1">
+                        <a:rPr lang="en-US" sz="2800" i="1">
                           <a:latin typeface="Cambria Math"/>
                         </a:rPr>
                         <m:t>=</m:t>
@@ -9779,14 +9877,14 @@
                       <m:sSub>
                         <m:sSubPr>
                           <m:ctrlPr>
-                            <a:rPr lang="en-US" i="1">
+                            <a:rPr lang="en-US" sz="2800" i="1">
                               <a:latin typeface="Cambria Math"/>
                             </a:rPr>
                           </m:ctrlPr>
                         </m:sSubPr>
                         <m:e>
                           <m:r>
-                            <a:rPr lang="en-US" i="1">
+                            <a:rPr lang="en-US" sz="2800" i="1">
                               <a:latin typeface="Cambria Math"/>
                             </a:rPr>
                             <m:t>𝑡</m:t>
@@ -9794,7 +9892,7 @@
                         </m:e>
                         <m:sub>
                           <m:r>
-                            <a:rPr lang="en-US" i="1">
+                            <a:rPr lang="en-US" sz="2800" i="1">
                               <a:latin typeface="Cambria Math"/>
                             </a:rPr>
                             <m:t>𝑙𝑖𝑛</m:t>
@@ -9802,7 +9900,7 @@
                         </m:sub>
                       </m:sSub>
                       <m:r>
-                        <a:rPr lang="en-US" i="1">
+                        <a:rPr lang="en-US" sz="2800" i="1">
                           <a:latin typeface="Cambria Math"/>
                         </a:rPr>
                         <m:t>+</m:t>
@@ -9810,14 +9908,14 @@
                       <m:sSub>
                         <m:sSubPr>
                           <m:ctrlPr>
-                            <a:rPr lang="en-US" i="1">
+                            <a:rPr lang="en-US" sz="2800" i="1">
                               <a:latin typeface="Cambria Math"/>
                             </a:rPr>
                           </m:ctrlPr>
                         </m:sSubPr>
                         <m:e>
                           <m:r>
-                            <a:rPr lang="en-US" i="1">
+                            <a:rPr lang="en-US" sz="2800" i="1">
                               <a:latin typeface="Cambria Math"/>
                             </a:rPr>
                             <m:t>𝑠</m:t>
@@ -9825,7 +9923,7 @@
                         </m:e>
                         <m:sub>
                           <m:r>
-                            <a:rPr lang="en-US" i="1">
+                            <a:rPr lang="en-US" sz="2800" i="1">
                               <a:latin typeface="Cambria Math"/>
                             </a:rPr>
                             <m:t>𝑙𝑖𝑛</m:t>
@@ -9833,7 +9931,7 @@
                         </m:sub>
                       </m:sSub>
                       <m:r>
-                        <a:rPr lang="en-US" i="1">
+                        <a:rPr lang="en-US" sz="2800" i="1">
                           <a:latin typeface="Cambria Math"/>
                         </a:rPr>
                         <m:t>+</m:t>
@@ -9841,14 +9939,14 @@
                       <m:sSub>
                         <m:sSubPr>
                           <m:ctrlPr>
-                            <a:rPr lang="en-US" i="1">
+                            <a:rPr lang="en-US" sz="2800" i="1">
                               <a:latin typeface="Cambria Math"/>
                             </a:rPr>
                           </m:ctrlPr>
                         </m:sSubPr>
                         <m:e>
                           <m:r>
-                            <a:rPr lang="en-US" i="1">
+                            <a:rPr lang="en-US" sz="2800" i="1">
                               <a:latin typeface="Cambria Math"/>
                             </a:rPr>
                             <m:t>𝑖</m:t>
@@ -9856,7 +9954,7 @@
                         </m:e>
                         <m:sub>
                           <m:r>
-                            <a:rPr lang="en-US" i="1">
+                            <a:rPr lang="en-US" sz="2800" i="1">
                               <a:latin typeface="Cambria Math"/>
                             </a:rPr>
                             <m:t>𝑙𝑖𝑛</m:t>
@@ -9866,7 +9964,7 @@
                     </m:oMath>
                   </m:oMathPara>
                 </a14:m>
-                <a:endParaRPr lang="en-US" dirty="0"/>
+                <a:endParaRPr lang="en-US" sz="2800" dirty="0"/>
               </a:p>
               <a:p>
                 <a:pPr marL="0" indent="0">
@@ -9876,7 +9974,7 @@
                   <m:oMathPara xmlns:m="http://schemas.openxmlformats.org/officeDocument/2006/math">
                     <m:oMath>
                       <m:r>
-                        <a:rPr lang="en-US" i="1">
+                        <a:rPr lang="en-US" sz="2800" i="1">
                           <a:latin typeface="Cambria Math"/>
                         </a:rPr>
                         <m:t>𝑒𝑥𝑝</m:t>
@@ -9884,7 +9982,7 @@
                       <m:d>
                         <m:dPr>
                           <m:ctrlPr>
-                            <a:rPr lang="en-US" i="1">
+                            <a:rPr lang="en-US" sz="2800" i="1">
                               <a:latin typeface="Cambria Math" panose="02040503050406030204" pitchFamily="18" charset="0"/>
                             </a:rPr>
                           </m:ctrlPr>
@@ -9893,14 +9991,14 @@
                           <m:sSub>
                             <m:sSubPr>
                               <m:ctrlPr>
-                                <a:rPr lang="en-US" i="1">
+                                <a:rPr lang="en-US" sz="2800" i="1">
                                   <a:latin typeface="Cambria Math"/>
                                 </a:rPr>
                               </m:ctrlPr>
                             </m:sSubPr>
                             <m:e>
                               <m:r>
-                                <a:rPr lang="en-US" i="1">
+                                <a:rPr lang="en-US" sz="2800" i="1">
                                   <a:latin typeface="Cambria Math"/>
                                 </a:rPr>
                                 <m:t>𝛾</m:t>
@@ -9908,7 +10006,7 @@
                             </m:e>
                             <m:sub>
                               <m:r>
-                                <a:rPr lang="en-US" i="1">
+                                <a:rPr lang="en-US" sz="2800" i="1">
                                   <a:latin typeface="Cambria Math"/>
                                 </a:rPr>
                                 <m:t>𝑢</m:t>
@@ -9916,13 +10014,13 @@
                             </m:sub>
                           </m:sSub>
                           <m:r>
-                            <a:rPr lang="en-US" i="1">
+                            <a:rPr lang="en-US" sz="2800" i="1">
                               <a:latin typeface="Cambria Math"/>
                             </a:rPr>
                             <m:t>∙</m:t>
                           </m:r>
                           <m:r>
-                            <a:rPr lang="en-US" i="1">
+                            <a:rPr lang="en-US" sz="2800" i="1">
                               <a:latin typeface="Cambria Math"/>
                             </a:rPr>
                             <m:t>𝑟𝑒</m:t>
@@ -9930,14 +10028,14 @@
                           <m:sSub>
                             <m:sSubPr>
                               <m:ctrlPr>
-                                <a:rPr lang="en-US" i="1">
+                                <a:rPr lang="en-US" sz="2800" i="1">
                                   <a:latin typeface="Cambria Math"/>
                                 </a:rPr>
                               </m:ctrlPr>
                             </m:sSubPr>
                             <m:e>
                               <m:r>
-                                <a:rPr lang="en-US" i="1">
+                                <a:rPr lang="en-US" sz="2800" i="1">
                                   <a:latin typeface="Cambria Math"/>
                                 </a:rPr>
                                 <m:t>𝑔</m:t>
@@ -9945,7 +10043,7 @@
                             </m:e>
                             <m:sub>
                               <m:r>
-                                <a:rPr lang="en-US" i="1">
+                                <a:rPr lang="en-US" sz="2800" i="1">
                                   <a:latin typeface="Cambria Math"/>
                                 </a:rPr>
                                 <m:t>𝑢</m:t>
@@ -9953,13 +10051,13 @@
                             </m:sub>
                           </m:sSub>
                           <m:r>
-                            <a:rPr lang="en-US" i="1">
+                            <a:rPr lang="en-US" sz="2800" i="1">
                               <a:latin typeface="Cambria Math"/>
                             </a:rPr>
                             <m:t>+</m:t>
                           </m:r>
                           <m:r>
-                            <a:rPr lang="en-US" i="1">
+                            <a:rPr lang="en-US" sz="2800" i="1">
                               <a:latin typeface="Cambria Math"/>
                             </a:rPr>
                             <m:t>𝜇</m:t>
@@ -9967,7 +10065,7 @@
                         </m:e>
                       </m:d>
                       <m:r>
-                        <a:rPr lang="en-US" i="1">
+                        <a:rPr lang="en-US" sz="2800" i="1">
                           <a:latin typeface="Cambria Math"/>
                         </a:rPr>
                         <m:t>=</m:t>
@@ -9975,14 +10073,14 @@
                       <m:sSub>
                         <m:sSubPr>
                           <m:ctrlPr>
-                            <a:rPr lang="en-US" i="1">
+                            <a:rPr lang="en-US" sz="2800" i="1">
                               <a:latin typeface="Cambria Math"/>
                             </a:rPr>
                           </m:ctrlPr>
                         </m:sSubPr>
                         <m:e>
                           <m:r>
-                            <a:rPr lang="en-US" i="1">
+                            <a:rPr lang="en-US" sz="2800" i="1">
                               <a:latin typeface="Cambria Math"/>
                             </a:rPr>
                             <m:t>𝑦</m:t>
@@ -9990,7 +10088,7 @@
                         </m:e>
                         <m:sub>
                           <m:r>
-                            <a:rPr lang="en-US" i="1">
+                            <a:rPr lang="en-US" sz="2800" i="1">
                               <a:latin typeface="Cambria Math"/>
                             </a:rPr>
                             <m:t>𝑐𝑚𝑝</m:t>
@@ -9998,7 +10096,7 @@
                         </m:sub>
                       </m:sSub>
                       <m:r>
-                        <a:rPr lang="en-US" i="1">
+                        <a:rPr lang="en-US" sz="2800" i="1">
                           <a:latin typeface="Cambria Math"/>
                         </a:rPr>
                         <m:t>=</m:t>
@@ -10006,14 +10104,14 @@
                       <m:sSub>
                         <m:sSubPr>
                           <m:ctrlPr>
-                            <a:rPr lang="en-US" i="1">
+                            <a:rPr lang="en-US" sz="2800" i="1">
                               <a:latin typeface="Cambria Math"/>
                             </a:rPr>
                           </m:ctrlPr>
                         </m:sSubPr>
                         <m:e>
                           <m:r>
-                            <a:rPr lang="en-US" i="1">
+                            <a:rPr lang="en-US" sz="2800" i="1">
                               <a:latin typeface="Cambria Math"/>
                             </a:rPr>
                             <m:t>𝑡</m:t>
@@ -10021,7 +10119,7 @@
                         </m:e>
                         <m:sub>
                           <m:r>
-                            <a:rPr lang="en-US" i="1">
+                            <a:rPr lang="en-US" sz="2800" i="1">
                               <a:latin typeface="Cambria Math"/>
                             </a:rPr>
                             <m:t>𝑐𝑚𝑝</m:t>
@@ -10029,7 +10127,7 @@
                         </m:sub>
                       </m:sSub>
                       <m:r>
-                        <a:rPr lang="en-US" i="1">
+                        <a:rPr lang="en-US" sz="2800" i="1">
                           <a:latin typeface="Cambria Math"/>
                         </a:rPr>
                         <m:t>∙</m:t>
@@ -10037,14 +10135,14 @@
                       <m:sSub>
                         <m:sSubPr>
                           <m:ctrlPr>
-                            <a:rPr lang="en-US" i="1">
+                            <a:rPr lang="en-US" sz="2800" i="1">
                               <a:latin typeface="Cambria Math"/>
                             </a:rPr>
                           </m:ctrlPr>
                         </m:sSubPr>
                         <m:e>
                           <m:r>
-                            <a:rPr lang="en-US" i="1">
+                            <a:rPr lang="en-US" sz="2800" i="1">
                               <a:latin typeface="Cambria Math"/>
                             </a:rPr>
                             <m:t>𝑠</m:t>
@@ -10052,7 +10150,7 @@
                         </m:e>
                         <m:sub>
                           <m:r>
-                            <a:rPr lang="en-US" i="1">
+                            <a:rPr lang="en-US" sz="2800" i="1">
                               <a:latin typeface="Cambria Math"/>
                             </a:rPr>
                             <m:t>𝑐𝑚𝑝</m:t>
@@ -10060,7 +10158,7 @@
                         </m:sub>
                       </m:sSub>
                       <m:r>
-                        <a:rPr lang="en-US" i="1">
+                        <a:rPr lang="en-US" sz="2800" i="1">
                           <a:latin typeface="Cambria Math"/>
                         </a:rPr>
                         <m:t>∙</m:t>
@@ -10068,14 +10166,14 @@
                       <m:sSub>
                         <m:sSubPr>
                           <m:ctrlPr>
-                            <a:rPr lang="en-US" i="1">
+                            <a:rPr lang="en-US" sz="2800" i="1">
                               <a:latin typeface="Cambria Math"/>
                             </a:rPr>
                           </m:ctrlPr>
                         </m:sSubPr>
                         <m:e>
                           <m:r>
-                            <a:rPr lang="en-US" i="1">
+                            <a:rPr lang="en-US" sz="2800" i="1">
                               <a:latin typeface="Cambria Math"/>
                             </a:rPr>
                             <m:t>𝑖</m:t>
@@ -10083,7 +10181,7 @@
                         </m:e>
                         <m:sub>
                           <m:r>
-                            <a:rPr lang="en-US" i="1">
+                            <a:rPr lang="en-US" sz="2800" i="1">
                               <a:latin typeface="Cambria Math"/>
                             </a:rPr>
                             <m:t>𝑐𝑚𝑝</m:t>
@@ -10093,7 +10191,7 @@
                     </m:oMath>
                   </m:oMathPara>
                 </a14:m>
-                <a:endParaRPr lang="en-US" dirty="0"/>
+                <a:endParaRPr lang="en-US" sz="2800" dirty="0"/>
               </a:p>
               <a:p>
                 <a:pPr marL="0" indent="0">
@@ -10104,7 +10202,7 @@
             </p:txBody>
           </p:sp>
         </mc:Choice>
-        <mc:Fallback xmlns="">
+        <mc:Fallback>
           <p:sp>
             <p:nvSpPr>
               <p:cNvPr id="3" name="Content Placeholder 2"/>
@@ -10112,14 +10210,14 @@
                 <a:spLocks noGrp="1" noRot="1" noChangeAspect="1" noMove="1" noResize="1" noEditPoints="1" noAdjustHandles="1" noChangeArrowheads="1" noChangeShapeType="1" noTextEdit="1"/>
               </p:cNvSpPr>
               <p:nvPr>
-                <p:ph idx="1"/>
+                <p:ph sz="half" idx="2"/>
               </p:nvPr>
             </p:nvSpPr>
             <p:spPr>
-              <a:blipFill rotWithShape="1">
+              <a:blipFill>
                 <a:blip r:embed="rId2"/>
                 <a:stretch>
-                  <a:fillRect l="-1630" t="-1752"/>
+                  <a:fillRect l="-754" t="-2332"/>
                 </a:stretch>
               </a:blipFill>
             </p:spPr>
@@ -10128,7 +10226,7 @@
               <a:lstStyle/>
               <a:p>
                 <a:r>
-                  <a:rPr lang="en-US">
+                  <a:rPr lang="en-GB">
                     <a:noFill/>
                   </a:rPr>
                   <a:t> </a:t>
@@ -10145,10 +10243,15 @@
             <a:spLocks noGrp="1"/>
           </p:cNvSpPr>
           <p:nvPr>
-            <p:ph type="ftr" sz="quarter" idx="11"/>
+            <p:ph type="ftr" sz="quarter" idx="4294967295"/>
           </p:nvPr>
         </p:nvSpPr>
-        <p:spPr/>
+        <p:spPr>
+          <a:xfrm>
+            <a:off x="0" y="0"/>
+            <a:ext cx="0" cy="0"/>
+          </a:xfrm>
+        </p:spPr>
         <p:txBody>
           <a:bodyPr/>
           <a:lstStyle/>
@@ -10200,12 +10303,7 @@
             <p:ph type="title"/>
           </p:nvPr>
         </p:nvSpPr>
-        <p:spPr>
-          <a:xfrm>
-            <a:off x="1981200" y="274638"/>
-            <a:ext cx="8229600" cy="706090"/>
-          </a:xfrm>
-        </p:spPr>
+        <p:spPr/>
         <p:txBody>
           <a:bodyPr>
             <a:normAutofit/>
@@ -10224,6 +10322,35 @@
           </a:p>
         </p:txBody>
       </p:sp>
+      <p:sp>
+        <p:nvSpPr>
+          <p:cNvPr id="4" name="Espace réservé du numéro de diapositive 3">
+            <a:extLst>
+              <a:ext uri="{FF2B5EF4-FFF2-40B4-BE49-F238E27FC236}">
+                <a16:creationId xmlns:a16="http://schemas.microsoft.com/office/drawing/2014/main" id="{3C1BBC5E-ECDB-9D35-4EA1-1E6E9E7EECB5}"/>
+              </a:ext>
+            </a:extLst>
+          </p:cNvPr>
+          <p:cNvSpPr>
+            <a:spLocks noGrp="1"/>
+          </p:cNvSpPr>
+          <p:nvPr>
+            <p:ph type="sldNum" idx="12"/>
+          </p:nvPr>
+        </p:nvSpPr>
+        <p:spPr/>
+        <p:txBody>
+          <a:bodyPr/>
+          <a:lstStyle/>
+          <a:p>
+            <a:fld id="{627CDA0C-01AE-4E2F-8829-AAF8EAAF9DB3}" type="slidenum">
+              <a:rPr lang="en-US" smtClean="0"/>
+              <a:t>5</a:t>
+            </a:fld>
+            <a:endParaRPr lang="en-US" dirty="0"/>
+          </a:p>
+        </p:txBody>
+      </p:sp>
       <mc:AlternateContent xmlns:mc="http://schemas.openxmlformats.org/markup-compatibility/2006">
         <mc:Choice xmlns:a14="http://schemas.microsoft.com/office/drawing/2010/main" Requires="a14">
           <p:sp>
@@ -10233,18 +10360,13 @@
                 <a:spLocks noGrp="1"/>
               </p:cNvSpPr>
               <p:nvPr>
-                <p:ph idx="1"/>
+                <p:ph sz="half" idx="2"/>
               </p:nvPr>
             </p:nvSpPr>
-            <p:spPr>
-              <a:xfrm>
-                <a:off x="1631504" y="1196752"/>
-                <a:ext cx="8856984" cy="5256584"/>
-              </a:xfrm>
-            </p:spPr>
+            <p:spPr/>
             <p:txBody>
               <a:bodyPr>
-                <a:normAutofit fontScale="55000" lnSpcReduction="20000"/>
+                <a:normAutofit fontScale="70000" lnSpcReduction="20000"/>
               </a:bodyPr>
               <a:lstStyle/>
               <a:p>
@@ -10938,7 +11060,7 @@
                     <m:d>
                       <m:dPr>
                         <m:ctrlPr>
-                          <a:rPr lang="en-US" sz="2200" i="1">
+                          <a:rPr lang="fr-BE" sz="2200" i="1">
                             <a:latin typeface="Cambria Math" panose="02040503050406030204" pitchFamily="18" charset="0"/>
                           </a:rPr>
                         </m:ctrlPr>
@@ -11229,7 +11351,7 @@
                     <m:d>
                       <m:dPr>
                         <m:ctrlPr>
-                          <a:rPr lang="en-US" sz="2200" i="1">
+                          <a:rPr lang="fr-BE" sz="2200" i="1">
                             <a:latin typeface="Cambria Math" panose="02040503050406030204" pitchFamily="18" charset="0"/>
                           </a:rPr>
                         </m:ctrlPr>
@@ -11398,7 +11520,7 @@
                     <m:d>
                       <m:dPr>
                         <m:ctrlPr>
-                          <a:rPr lang="en-US" sz="2200" i="1">
+                          <a:rPr lang="fr-BE" sz="2200" i="1">
                             <a:latin typeface="Cambria Math" panose="02040503050406030204" pitchFamily="18" charset="0"/>
                           </a:rPr>
                         </m:ctrlPr>
@@ -11567,7 +11689,7 @@
                     <m:d>
                       <m:dPr>
                         <m:ctrlPr>
-                          <a:rPr lang="en-US" sz="2200" i="1">
+                          <a:rPr lang="fr-BE" sz="2200" i="1">
                             <a:latin typeface="Cambria Math" panose="02040503050406030204" pitchFamily="18" charset="0"/>
                           </a:rPr>
                         </m:ctrlPr>
@@ -11661,7 +11783,7 @@
                         <m:d>
                           <m:dPr>
                             <m:ctrlPr>
-                              <a:rPr lang="en-US" sz="2200" i="1">
+                              <a:rPr lang="fr-BE" sz="2200" i="1">
                                 <a:latin typeface="Cambria Math" panose="02040503050406030204" pitchFamily="18" charset="0"/>
                               </a:rPr>
                             </m:ctrlPr>
@@ -11765,7 +11887,7 @@
                     <m:d>
                       <m:dPr>
                         <m:ctrlPr>
-                          <a:rPr lang="en-US" sz="2200" i="1">
+                          <a:rPr lang="fr-BE" sz="2200" i="1">
                             <a:latin typeface="Cambria Math" panose="02040503050406030204" pitchFamily="18" charset="0"/>
                           </a:rPr>
                         </m:ctrlPr>
@@ -11962,6 +12084,7 @@
                               <m:ctrlPr>
                                 <a:rPr lang="en-US" sz="2200" i="1">
                                   <a:latin typeface="Cambria Math" panose="02040503050406030204" pitchFamily="18" charset="0"/>
+                                  <a:ea typeface="Cambria Math" panose="02040503050406030204" pitchFamily="18" charset="0"/>
                                 </a:rPr>
                               </m:ctrlPr>
                             </m:accPr>
@@ -12007,13 +12130,7 @@
                             <a:rPr lang="fr-BE" sz="2200" i="1">
                               <a:latin typeface="Cambria Math" panose="02040503050406030204" pitchFamily="18" charset="0"/>
                             </a:rPr>
-                            <m:t>𝑥</m:t>
-                          </m:r>
-                          <m:r>
-                            <a:rPr lang="fr-BE" sz="2200" i="1">
-                              <a:latin typeface="Cambria Math" panose="02040503050406030204" pitchFamily="18" charset="0"/>
-                            </a:rPr>
-                            <m:t>𝑓𝑖𝑥𝑒𝑑</m:t>
+                            <m:t>𝑥𝑓𝑖𝑥𝑒𝑑</m:t>
                           </m:r>
                         </m:sub>
                       </m:sSub>
@@ -12142,18 +12259,14 @@
                 <a:spLocks noGrp="1" noRot="1" noChangeAspect="1" noMove="1" noResize="1" noEditPoints="1" noAdjustHandles="1" noChangeArrowheads="1" noChangeShapeType="1" noTextEdit="1"/>
               </p:cNvSpPr>
               <p:nvPr>
-                <p:ph idx="1"/>
+                <p:ph sz="half" idx="2"/>
               </p:nvPr>
             </p:nvSpPr>
             <p:spPr>
-              <a:xfrm>
-                <a:off x="1631504" y="1196752"/>
-                <a:ext cx="8856984" cy="5256584"/>
-              </a:xfrm>
               <a:blipFill>
                 <a:blip r:embed="rId2"/>
                 <a:stretch>
-                  <a:fillRect l="-69" t="-3013"/>
+                  <a:fillRect l="-754" t="-3109"/>
                 </a:stretch>
               </a:blipFill>
             </p:spPr>
@@ -12179,10 +12292,15 @@
             <a:spLocks noGrp="1"/>
           </p:cNvSpPr>
           <p:nvPr>
-            <p:ph type="ftr" sz="quarter" idx="11"/>
+            <p:ph type="ftr" sz="quarter" idx="4294967295"/>
           </p:nvPr>
         </p:nvSpPr>
-        <p:spPr/>
+        <p:spPr>
+          <a:xfrm>
+            <a:off x="0" y="0"/>
+            <a:ext cx="0" cy="0"/>
+          </a:xfrm>
+        </p:spPr>
         <p:txBody>
           <a:bodyPr/>
           <a:lstStyle/>
@@ -13124,15 +13242,74 @@
       </p:cxnSp>
       <p:sp>
         <p:nvSpPr>
+          <p:cNvPr id="15" name="Titre 14">
+            <a:extLst>
+              <a:ext uri="{FF2B5EF4-FFF2-40B4-BE49-F238E27FC236}">
+                <a16:creationId xmlns:a16="http://schemas.microsoft.com/office/drawing/2014/main" id="{06014D69-5B0E-7D21-1694-C41BE2EE2805}"/>
+              </a:ext>
+            </a:extLst>
+          </p:cNvPr>
+          <p:cNvSpPr>
+            <a:spLocks noGrp="1"/>
+          </p:cNvSpPr>
+          <p:nvPr>
+            <p:ph type="title"/>
+          </p:nvPr>
+        </p:nvSpPr>
+        <p:spPr/>
+        <p:txBody>
+          <a:bodyPr/>
+          <a:lstStyle/>
+          <a:p>
+            <a:endParaRPr lang="en-GB"/>
+          </a:p>
+        </p:txBody>
+      </p:sp>
+      <p:sp>
+        <p:nvSpPr>
+          <p:cNvPr id="5" name="Espace réservé du numéro de diapositive 4">
+            <a:extLst>
+              <a:ext uri="{FF2B5EF4-FFF2-40B4-BE49-F238E27FC236}">
+                <a16:creationId xmlns:a16="http://schemas.microsoft.com/office/drawing/2014/main" id="{6C91D182-3198-315D-F8E0-8EB1AFE55706}"/>
+              </a:ext>
+            </a:extLst>
+          </p:cNvPr>
+          <p:cNvSpPr>
+            <a:spLocks noGrp="1"/>
+          </p:cNvSpPr>
+          <p:nvPr>
+            <p:ph type="sldNum" idx="12"/>
+          </p:nvPr>
+        </p:nvSpPr>
+        <p:spPr/>
+        <p:txBody>
+          <a:bodyPr/>
+          <a:lstStyle/>
+          <a:p>
+            <a:fld id="{627CDA0C-01AE-4E2F-8829-AAF8EAAF9DB3}" type="slidenum">
+              <a:rPr lang="en-US" smtClean="0"/>
+              <a:t>6</a:t>
+            </a:fld>
+            <a:endParaRPr lang="en-US"/>
+          </a:p>
+        </p:txBody>
+      </p:sp>
+      <p:sp>
+        <p:nvSpPr>
           <p:cNvPr id="9" name="Footer Placeholder 8"/>
           <p:cNvSpPr>
             <a:spLocks noGrp="1"/>
           </p:cNvSpPr>
           <p:nvPr>
-            <p:ph type="ftr" sz="quarter" idx="11"/>
+            <p:ph type="ftr" sz="quarter" idx="4294967295"/>
           </p:nvPr>
         </p:nvSpPr>
-        <p:spPr/>
+        <p:spPr>
+          <a:xfrm>
+            <a:off x="0" y="0"/>
+            <a:ext cx="0" cy="0"/>
+          </a:xfrm>
+        </p:spPr>
         <p:txBody>
           <a:bodyPr/>
           <a:lstStyle/>
@@ -13221,6 +13398,36 @@
           <a:lstStyle/>
           <a:p>
             <a:endParaRPr lang="en-IE"/>
+          </a:p>
+        </p:txBody>
+      </p:sp>
+      <p:sp>
+        <p:nvSpPr>
+          <p:cNvPr id="4" name="Espace réservé du numéro de diapositive 3">
+            <a:extLst>
+              <a:ext uri="{FF2B5EF4-FFF2-40B4-BE49-F238E27FC236}">
+                <a16:creationId xmlns:a16="http://schemas.microsoft.com/office/drawing/2014/main" id="{637D8F2C-7E10-AE24-00F5-419C72437153}"/>
+              </a:ext>
+            </a:extLst>
+          </p:cNvPr>
+          <p:cNvSpPr>
+            <a:spLocks noGrp="1"/>
+          </p:cNvSpPr>
+          <p:nvPr>
+            <p:ph type="sldNum" idx="12"/>
+          </p:nvPr>
+        </p:nvSpPr>
+        <p:spPr/>
+        <p:txBody>
+          <a:bodyPr/>
+          <a:lstStyle/>
+          <a:p>
+            <a:fld id="{00000000-1234-1234-1234-123412341234}" type="slidenum">
+              <a:rPr lang="en-GB" smtClean="0"/>
+              <a:pPr/>
+              <a:t>7</a:t>
+            </a:fld>
+            <a:endParaRPr lang="en-GB"/>
           </a:p>
         </p:txBody>
       </p:sp>
@@ -14109,6 +14316,15 @@
 </file>
 
 <file path=customXml/item1.xml><?xml version="1.0" encoding="utf-8"?>
+<?mso-contentType ?>
+<FormTemplates xmlns="http://schemas.microsoft.com/sharepoint/v3/contenttype/forms">
+  <Display>DocumentLibraryForm</Display>
+  <Edit>DocumentLibraryForm</Edit>
+  <New>DocumentLibraryForm</New>
+</FormTemplates>
+</file>
+
+<file path=customXml/item2.xml><?xml version="1.0" encoding="utf-8"?>
 <ct:contentTypeSchema xmlns:ct="http://schemas.microsoft.com/office/2006/metadata/contentType" xmlns:ma="http://schemas.microsoft.com/office/2006/metadata/properties/metaAttributes" ct:_="" ma:_="" ma:contentTypeName="Document" ma:contentTypeID="0x010100E6AA5C57F8EADE4E9CD6BB064C0C3195" ma:contentTypeVersion="16" ma:contentTypeDescription="Create a new document." ma:contentTypeScope="" ma:versionID="bb51c19a58f458ddcddd050a07659236">
   <xsd:schema xmlns:xsd="http://www.w3.org/2001/XMLSchema" xmlns:xs="http://www.w3.org/2001/XMLSchema" xmlns:p="http://schemas.microsoft.com/office/2006/metadata/properties" xmlns:ns2="0e422b70-e85d-4377-8ee0-b6227433d381" xmlns:ns3="199f642e-5af9-486c-ac06-f366742ef41a" targetNamespace="http://schemas.microsoft.com/office/2006/metadata/properties" ma:root="true" ma:fieldsID="0ee7a3bac0352a48a43420936abd968a" ns2:_="" ns3:_="">
     <xsd:import namespace="0e422b70-e85d-4377-8ee0-b6227433d381"/>
@@ -14349,15 +14565,6 @@
 </ct:contentTypeSchema>
 </file>
 
-<file path=customXml/item2.xml><?xml version="1.0" encoding="utf-8"?>
-<?mso-contentType ?>
-<FormTemplates xmlns="http://schemas.microsoft.com/sharepoint/v3/contenttype/forms">
-  <Display>DocumentLibraryForm</Display>
-  <Edit>DocumentLibraryForm</Edit>
-  <New>DocumentLibraryForm</New>
-</FormTemplates>
-</file>
-
 <file path=customXml/item3.xml><?xml version="1.0" encoding="utf-8"?>
 <p:properties xmlns:p="http://schemas.microsoft.com/office/2006/metadata/properties" xmlns:xsi="http://www.w3.org/2001/XMLSchema-instance" xmlns:pc="http://schemas.microsoft.com/office/infopath/2007/PartnerControls">
   <documentManagement>
@@ -14370,6 +14577,14 @@
 </file>
 
 <file path=customXml/itemProps1.xml><?xml version="1.0" encoding="utf-8"?>
+<ds:datastoreItem xmlns:ds="http://schemas.openxmlformats.org/officeDocument/2006/customXml" ds:itemID="{67DD9E9F-9EEB-4105-B29B-819486C2855A}">
+  <ds:schemaRefs>
+    <ds:schemaRef ds:uri="http://schemas.microsoft.com/sharepoint/v3/contenttype/forms"/>
+  </ds:schemaRefs>
+</ds:datastoreItem>
+</file>
+
+<file path=customXml/itemProps2.xml><?xml version="1.0" encoding="utf-8"?>
 <ds:datastoreItem xmlns:ds="http://schemas.openxmlformats.org/officeDocument/2006/customXml" ds:itemID="{04B464EA-1576-49DD-9675-1E3399D4D196}">
   <ds:schemaRefs>
     <ds:schemaRef ds:uri="http://schemas.microsoft.com/office/2006/metadata/contentType"/>
@@ -14384,14 +14599,6 @@
     <ds:schemaRef ds:uri="http://purl.org/dc/elements/1.1/"/>
     <ds:schemaRef ds:uri="http://purl.org/dc/terms/"/>
     <ds:schemaRef ds:uri="http://schemas.microsoft.com/internal/obd"/>
-  </ds:schemaRefs>
-</ds:datastoreItem>
-</file>
-
-<file path=customXml/itemProps2.xml><?xml version="1.0" encoding="utf-8"?>
-<ds:datastoreItem xmlns:ds="http://schemas.openxmlformats.org/officeDocument/2006/customXml" ds:itemID="{67DD9E9F-9EEB-4105-B29B-819486C2855A}">
-  <ds:schemaRefs>
-    <ds:schemaRef ds:uri="http://schemas.microsoft.com/sharepoint/v3/contenttype/forms"/>
   </ds:schemaRefs>
 </ds:datastoreItem>
 </file>

--- a/2.1 Decomposition model.pptx
+++ b/2.1 Decomposition model.pptx
@@ -272,7 +272,7 @@
       <p15:notesGuideLst xmlns:p15="http://schemas.microsoft.com/office/powerpoint/2012/main"/>
     </p:ext>
     <p:ext uri="http://customooxmlschemas.google.com/">
-      <go:slidesCustomData xmlns="" xmlns:go="http://customooxmlschemas.google.com/" xmlns:ahyp="http://schemas.microsoft.com/office/drawing/2018/hyperlinkcolor" xmlns:p15="http://schemas.microsoft.com/office/powerpoint/2012/main" xmlns:p14="http://schemas.microsoft.com/office/powerpoint/2010/main" xmlns:com="http://schemas.openxmlformats.org/drawingml/2006/compatibility" xmlns:pvml="urn:schemas-microsoft-com:office:powerpoint" xmlns:v="urn:schemas-microsoft-com:vml" xmlns:o="urn:schemas-microsoft-com:office:office" xmlns:dgm="http://schemas.openxmlformats.org/drawingml/2006/diagram" xmlns:c="http://schemas.openxmlformats.org/drawingml/2006/chart" xmlns:mv="urn:schemas-microsoft-com:mac:vml" xmlns:mc="http://schemas.openxmlformats.org/markup-compatibility/2006" r:id="rId59" roundtripDataSignature="AMtx7mh3YP3xexYcFoahXa2ehi0H5V4Zaw=="/>
+      <go:slidesCustomData xmlns:mc="http://schemas.openxmlformats.org/markup-compatibility/2006" xmlns:mv="urn:schemas-microsoft-com:mac:vml" xmlns:c="http://schemas.openxmlformats.org/drawingml/2006/chart" xmlns:dgm="http://schemas.openxmlformats.org/drawingml/2006/diagram" xmlns:o="urn:schemas-microsoft-com:office:office" xmlns:v="urn:schemas-microsoft-com:vml" xmlns:pvml="urn:schemas-microsoft-com:office:powerpoint" xmlns:com="http://schemas.openxmlformats.org/drawingml/2006/compatibility" xmlns:p14="http://schemas.microsoft.com/office/powerpoint/2010/main" xmlns:p15="http://schemas.microsoft.com/office/powerpoint/2012/main" xmlns:ahyp="http://schemas.microsoft.com/office/drawing/2018/hyperlinkcolor" xmlns:go="http://customooxmlschemas.google.com/" xmlns="" r:id="rId59" roundtripDataSignature="AMtx7mh3YP3xexYcFoahXa2ehi0H5V4Zaw=="/>
     </p:ext>
   </p:extLst>
 </p:presentation>
@@ -380,7 +380,7 @@
           <a:p>
             <a:fld id="{0CBFB8CE-488C-4A7E-87F2-3AF6127C51C1}" type="datetimeFigureOut">
               <a:rPr lang="en-IE" smtClean="0"/>
-              <a:t>30/09/2026</a:t>
+              <a:t>01/10/2026</a:t>
             </a:fld>
             <a:endParaRPr lang="en-IE"/>
           </a:p>
@@ -6298,8 +6298,8 @@
           <a:lstStyle/>
           <a:p>
             <a:r>
-              <a:rPr lang="en-IE"/>
-              <a:t>Decomposition model</a:t>
+              <a:rPr lang="en-IE" dirty="0"/>
+              <a:t>2.1 Decomposition model</a:t>
             </a:r>
           </a:p>
         </p:txBody>
@@ -6415,8 +6415,8 @@
           </a:p>
         </p:txBody>
       </p:sp>
-      <mc:AlternateContent xmlns:mc="http://schemas.openxmlformats.org/markup-compatibility/2006">
-        <mc:Choice xmlns:a14="http://schemas.microsoft.com/office/drawing/2010/main" Requires="a14">
+      <mc:AlternateContent xmlns:mc="http://schemas.openxmlformats.org/markup-compatibility/2006" xmlns:a14="http://schemas.microsoft.com/office/drawing/2010/main">
+        <mc:Choice Requires="a14">
           <p:sp>
             <p:nvSpPr>
               <p:cNvPr id="3" name="Content Placeholder 2"/>
@@ -7507,7 +7507,7 @@
             </p:txBody>
           </p:sp>
         </mc:Choice>
-        <mc:Fallback>
+        <mc:Fallback xmlns="">
           <p:sp>
             <p:nvSpPr>
               <p:cNvPr id="3" name="Content Placeholder 2"/>
@@ -9515,8 +9515,8 @@
           </a:p>
         </p:txBody>
       </p:sp>
-      <mc:AlternateContent xmlns:mc="http://schemas.openxmlformats.org/markup-compatibility/2006">
-        <mc:Choice xmlns:a14="http://schemas.microsoft.com/office/drawing/2010/main" Requires="a14">
+      <mc:AlternateContent xmlns:mc="http://schemas.openxmlformats.org/markup-compatibility/2006" xmlns:a14="http://schemas.microsoft.com/office/drawing/2010/main">
+        <mc:Choice Requires="a14">
           <p:sp>
             <p:nvSpPr>
               <p:cNvPr id="3" name="Content Placeholder 2"/>
@@ -10202,7 +10202,7 @@
             </p:txBody>
           </p:sp>
         </mc:Choice>
-        <mc:Fallback>
+        <mc:Fallback xmlns="">
           <p:sp>
             <p:nvSpPr>
               <p:cNvPr id="3" name="Content Placeholder 2"/>
@@ -10351,8 +10351,8 @@
           </a:p>
         </p:txBody>
       </p:sp>
-      <mc:AlternateContent xmlns:mc="http://schemas.openxmlformats.org/markup-compatibility/2006">
-        <mc:Choice xmlns:a14="http://schemas.microsoft.com/office/drawing/2010/main" Requires="a14">
+      <mc:AlternateContent xmlns:mc="http://schemas.openxmlformats.org/markup-compatibility/2006" xmlns:a14="http://schemas.microsoft.com/office/drawing/2010/main">
+        <mc:Choice Requires="a14">
           <p:sp>
             <p:nvSpPr>
               <p:cNvPr id="3" name="Content Placeholder 2"/>
@@ -12074,6 +12074,7 @@
                           <m:ctrlPr>
                             <a:rPr lang="en-US" sz="2200" i="1">
                               <a:latin typeface="Cambria Math" panose="02040503050406030204" pitchFamily="18" charset="0"/>
+                              <a:ea typeface="Cambria Math" panose="02040503050406030204" pitchFamily="18" charset="0"/>
                             </a:rPr>
                           </m:ctrlPr>
                         </m:sSubPr>
@@ -12251,7 +12252,7 @@
             </p:txBody>
           </p:sp>
         </mc:Choice>
-        <mc:Fallback>
+        <mc:Fallback xmlns="">
           <p:sp>
             <p:nvSpPr>
               <p:cNvPr id="3" name="Content Placeholder 2"/>
@@ -14316,15 +14317,6 @@
 </file>
 
 <file path=customXml/item1.xml><?xml version="1.0" encoding="utf-8"?>
-<?mso-contentType ?>
-<FormTemplates xmlns="http://schemas.microsoft.com/sharepoint/v3/contenttype/forms">
-  <Display>DocumentLibraryForm</Display>
-  <Edit>DocumentLibraryForm</Edit>
-  <New>DocumentLibraryForm</New>
-</FormTemplates>
-</file>
-
-<file path=customXml/item2.xml><?xml version="1.0" encoding="utf-8"?>
 <ct:contentTypeSchema xmlns:ct="http://schemas.microsoft.com/office/2006/metadata/contentType" xmlns:ma="http://schemas.microsoft.com/office/2006/metadata/properties/metaAttributes" ct:_="" ma:_="" ma:contentTypeName="Document" ma:contentTypeID="0x010100E6AA5C57F8EADE4E9CD6BB064C0C3195" ma:contentTypeVersion="16" ma:contentTypeDescription="Create a new document." ma:contentTypeScope="" ma:versionID="bb51c19a58f458ddcddd050a07659236">
   <xsd:schema xmlns:xsd="http://www.w3.org/2001/XMLSchema" xmlns:xs="http://www.w3.org/2001/XMLSchema" xmlns:p="http://schemas.microsoft.com/office/2006/metadata/properties" xmlns:ns2="0e422b70-e85d-4377-8ee0-b6227433d381" xmlns:ns3="199f642e-5af9-486c-ac06-f366742ef41a" targetNamespace="http://schemas.microsoft.com/office/2006/metadata/properties" ma:root="true" ma:fieldsID="0ee7a3bac0352a48a43420936abd968a" ns2:_="" ns3:_="">
     <xsd:import namespace="0e422b70-e85d-4377-8ee0-b6227433d381"/>
@@ -14565,6 +14557,15 @@
 </ct:contentTypeSchema>
 </file>
 
+<file path=customXml/item2.xml><?xml version="1.0" encoding="utf-8"?>
+<?mso-contentType ?>
+<FormTemplates xmlns="http://schemas.microsoft.com/sharepoint/v3/contenttype/forms">
+  <Display>DocumentLibraryForm</Display>
+  <Edit>DocumentLibraryForm</Edit>
+  <New>DocumentLibraryForm</New>
+</FormTemplates>
+</file>
+
 <file path=customXml/item3.xml><?xml version="1.0" encoding="utf-8"?>
 <p:properties xmlns:p="http://schemas.microsoft.com/office/2006/metadata/properties" xmlns:xsi="http://www.w3.org/2001/XMLSchema-instance" xmlns:pc="http://schemas.microsoft.com/office/infopath/2007/PartnerControls">
   <documentManagement>
@@ -14577,14 +14578,6 @@
 </file>
 
 <file path=customXml/itemProps1.xml><?xml version="1.0" encoding="utf-8"?>
-<ds:datastoreItem xmlns:ds="http://schemas.openxmlformats.org/officeDocument/2006/customXml" ds:itemID="{67DD9E9F-9EEB-4105-B29B-819486C2855A}">
-  <ds:schemaRefs>
-    <ds:schemaRef ds:uri="http://schemas.microsoft.com/sharepoint/v3/contenttype/forms"/>
-  </ds:schemaRefs>
-</ds:datastoreItem>
-</file>
-
-<file path=customXml/itemProps2.xml><?xml version="1.0" encoding="utf-8"?>
 <ds:datastoreItem xmlns:ds="http://schemas.openxmlformats.org/officeDocument/2006/customXml" ds:itemID="{04B464EA-1576-49DD-9675-1E3399D4D196}">
   <ds:schemaRefs>
     <ds:schemaRef ds:uri="http://schemas.microsoft.com/office/2006/metadata/contentType"/>
@@ -14599,6 +14592,14 @@
     <ds:schemaRef ds:uri="http://purl.org/dc/elements/1.1/"/>
     <ds:schemaRef ds:uri="http://purl.org/dc/terms/"/>
     <ds:schemaRef ds:uri="http://schemas.microsoft.com/internal/obd"/>
+  </ds:schemaRefs>
+</ds:datastoreItem>
+</file>
+
+<file path=customXml/itemProps2.xml><?xml version="1.0" encoding="utf-8"?>
+<ds:datastoreItem xmlns:ds="http://schemas.openxmlformats.org/officeDocument/2006/customXml" ds:itemID="{67DD9E9F-9EEB-4105-B29B-819486C2855A}">
+  <ds:schemaRefs>
+    <ds:schemaRef ds:uri="http://schemas.microsoft.com/sharepoint/v3/contenttype/forms"/>
   </ds:schemaRefs>
 </ds:datastoreItem>
 </file>

--- a/2.1 Decomposition model.pptx
+++ b/2.1 Decomposition model.pptx
@@ -5,24 +5,23 @@
     <p:sldMasterId id="2147483648" r:id="rId4"/>
   </p:sldMasterIdLst>
   <p:notesMasterIdLst>
-    <p:notesMasterId r:id="rId12"/>
+    <p:notesMasterId r:id="rId11"/>
   </p:notesMasterIdLst>
   <p:handoutMasterIdLst>
-    <p:handoutMasterId r:id="rId13"/>
+    <p:handoutMasterId r:id="rId12"/>
   </p:handoutMasterIdLst>
   <p:sldIdLst>
     <p:sldId id="256" r:id="rId5"/>
-    <p:sldId id="262" r:id="rId6"/>
-    <p:sldId id="260" r:id="rId7"/>
-    <p:sldId id="263" r:id="rId8"/>
-    <p:sldId id="264" r:id="rId9"/>
-    <p:sldId id="266" r:id="rId10"/>
-    <p:sldId id="261" r:id="rId11"/>
+    <p:sldId id="269" r:id="rId6"/>
+    <p:sldId id="268" r:id="rId7"/>
+    <p:sldId id="264" r:id="rId8"/>
+    <p:sldId id="266" r:id="rId9"/>
+    <p:sldId id="261" r:id="rId10"/>
   </p:sldIdLst>
   <p:sldSz cx="12192000" cy="6858000"/>
   <p:notesSz cx="6858000" cy="9144000"/>
   <p:custDataLst>
-    <p:tags r:id="rId14"/>
+    <p:tags r:id="rId13"/>
   </p:custDataLst>
   <p:defaultTextStyle>
     <a:defPPr marR="0" lvl="0" algn="l" rtl="0">
@@ -380,7 +379,7 @@
           <a:p>
             <a:fld id="{0CBFB8CE-488C-4A7E-87F2-3AF6127C51C1}" type="datetimeFigureOut">
               <a:rPr lang="en-IE" smtClean="0"/>
-              <a:t>01/10/2026</a:t>
+              <a:t>05/10/2026</a:t>
             </a:fld>
             <a:endParaRPr lang="en-IE"/>
           </a:p>
@@ -6361,7 +6360,13 @@
       </p:grpSpPr>
       <p:sp>
         <p:nvSpPr>
-          <p:cNvPr id="2" name="Title 1"/>
+          <p:cNvPr id="2" name="Titre 1">
+            <a:extLst>
+              <a:ext uri="{FF2B5EF4-FFF2-40B4-BE49-F238E27FC236}">
+                <a16:creationId xmlns:a16="http://schemas.microsoft.com/office/drawing/2014/main" id="{80F3913A-0FCE-85CF-0156-DFFC6DEB80FF}"/>
+              </a:ext>
+            </a:extLst>
+          </p:cNvPr>
           <p:cNvSpPr>
             <a:spLocks noGrp="1"/>
           </p:cNvSpPr>
@@ -6375,23 +6380,18 @@
           <a:lstStyle/>
           <a:p>
             <a:r>
-              <a:rPr lang="fr-BE" dirty="0" err="1"/>
-              <a:t>Regression</a:t>
+              <a:rPr lang="en-GB" dirty="0"/>
+              <a:t>1 Two-steps models (Tramo-Seats, X12)</a:t>
             </a:r>
-            <a:r>
-              <a:rPr lang="fr-BE" dirty="0"/>
-              <a:t> model </a:t>
-            </a:r>
-            <a:endParaRPr lang="en-US" dirty="0"/>
           </a:p>
         </p:txBody>
       </p:sp>
       <p:sp>
         <p:nvSpPr>
-          <p:cNvPr id="4" name="Espace réservé du numéro de diapositive 3">
+          <p:cNvPr id="3" name="Espace réservé du numéro de diapositive 2">
             <a:extLst>
               <a:ext uri="{FF2B5EF4-FFF2-40B4-BE49-F238E27FC236}">
-                <a16:creationId xmlns:a16="http://schemas.microsoft.com/office/drawing/2014/main" id="{397E3325-CA6D-D4C7-2841-D3CEAFF46B17}"/>
+                <a16:creationId xmlns:a16="http://schemas.microsoft.com/office/drawing/2014/main" id="{0315251D-465E-08C9-D5B6-5C1BA423BA86}"/>
               </a:ext>
             </a:extLst>
           </p:cNvPr>
@@ -6407,19 +6407,26 @@
           <a:bodyPr/>
           <a:lstStyle/>
           <a:p>
-            <a:fld id="{627CDA0C-01AE-4E2F-8829-AAF8EAAF9DB3}" type="slidenum">
-              <a:rPr lang="en-US" smtClean="0"/>
+            <a:fld id="{00000000-1234-1234-1234-123412341234}" type="slidenum">
+              <a:rPr lang="en-GB" smtClean="0"/>
+              <a:pPr/>
               <a:t>2</a:t>
             </a:fld>
-            <a:endParaRPr lang="en-US" dirty="0"/>
+            <a:endParaRPr lang="en-GB"/>
           </a:p>
         </p:txBody>
       </p:sp>
-      <mc:AlternateContent xmlns:mc="http://schemas.openxmlformats.org/markup-compatibility/2006" xmlns:a14="http://schemas.microsoft.com/office/drawing/2010/main">
-        <mc:Choice Requires="a14">
+      <mc:AlternateContent xmlns:mc="http://schemas.openxmlformats.org/markup-compatibility/2006">
+        <mc:Choice xmlns:a14="http://schemas.microsoft.com/office/drawing/2010/main" Requires="a14">
           <p:sp>
             <p:nvSpPr>
-              <p:cNvPr id="3" name="Content Placeholder 2"/>
+              <p:cNvPr id="4" name="Espace réservé du contenu 3">
+                <a:extLst>
+                  <a:ext uri="{FF2B5EF4-FFF2-40B4-BE49-F238E27FC236}">
+                    <a16:creationId xmlns:a16="http://schemas.microsoft.com/office/drawing/2014/main" id="{341D43BD-D4E0-C71E-1D18-7A04FF8D8FAB}"/>
+                  </a:ext>
+                </a:extLst>
+              </p:cNvPr>
               <p:cNvSpPr>
                 <a:spLocks noGrp="1"/>
               </p:cNvSpPr>
@@ -6429,1088 +6436,713 @@
             </p:nvSpPr>
             <p:spPr/>
             <p:txBody>
-              <a:bodyPr>
-                <a:normAutofit fontScale="92500" lnSpcReduction="10000"/>
-              </a:bodyPr>
+              <a:bodyPr/>
               <a:lstStyle/>
               <a:p>
                 <a:r>
-                  <a:rPr lang="fr-BE" i="1" dirty="0"/>
-                  <a:t>Additive case:</a:t>
+                  <a:rPr lang="en-GB" sz="3200" dirty="0"/>
+                  <a:t>1 Regression</a:t>
+                </a:r>
+                <a:r>
+                  <a:rPr lang="en-GB" sz="2400" dirty="0"/>
+                  <a:t> model</a:t>
                 </a:r>
               </a:p>
               <a:p>
-                <a:pPr marL="0" indent="0">
-                  <a:buNone/>
-                </a:pPr>
-                <a14:m>
-                  <m:oMathPara xmlns:m="http://schemas.openxmlformats.org/officeDocument/2006/math">
-                    <m:oMath>
-                      <m:sSub>
-                        <m:sSubPr>
-                          <m:ctrlPr>
-                            <a:rPr lang="fr-BE" b="0" i="1" smtClean="0">
-                              <a:latin typeface="Cambria Math" panose="02040503050406030204" pitchFamily="18" charset="0"/>
-                            </a:rPr>
-                          </m:ctrlPr>
-                        </m:sSubPr>
-                        <m:e>
-                          <m:r>
-                            <a:rPr lang="fr-BE" b="0" i="1" smtClean="0">
-                              <a:latin typeface="Cambria Math" panose="02040503050406030204" pitchFamily="18" charset="0"/>
-                            </a:rPr>
-                            <m:t>𝑦</m:t>
-                          </m:r>
-                        </m:e>
-                        <m:sub>
-                          <m:r>
-                            <a:rPr lang="fr-BE" b="0" i="1" smtClean="0">
-                              <a:latin typeface="Cambria Math" panose="02040503050406030204" pitchFamily="18" charset="0"/>
-                            </a:rPr>
-                            <m:t>𝑐</m:t>
-                          </m:r>
-                        </m:sub>
-                      </m:sSub>
-                      <m:r>
-                        <a:rPr lang="fr-BE" b="0" i="1" smtClean="0">
-                          <a:latin typeface="Cambria Math" panose="02040503050406030204" pitchFamily="18" charset="0"/>
-                        </a:rPr>
-                        <m:t>≡</m:t>
-                      </m:r>
-                      <m:r>
-                        <a:rPr lang="fr-BE" b="0" i="1" smtClean="0">
-                          <a:latin typeface="Cambria Math" panose="02040503050406030204" pitchFamily="18" charset="0"/>
-                        </a:rPr>
-                        <m:t>𝑦</m:t>
-                      </m:r>
-                      <m:r>
-                        <a:rPr lang="fr-BE" b="0" i="1" smtClean="0">
-                          <a:latin typeface="Cambria Math" panose="02040503050406030204" pitchFamily="18" charset="0"/>
-                        </a:rPr>
-                        <m:t>−</m:t>
-                      </m:r>
-                      <m:acc>
-                        <m:accPr>
-                          <m:chr m:val="̅"/>
-                          <m:ctrlPr>
-                            <a:rPr lang="fr-BE" b="0" i="1" smtClean="0">
-                              <a:latin typeface="Cambria Math" panose="02040503050406030204" pitchFamily="18" charset="0"/>
-                              <a:ea typeface="Cambria Math" panose="02040503050406030204" pitchFamily="18" charset="0"/>
-                            </a:rPr>
-                          </m:ctrlPr>
-                        </m:accPr>
-                        <m:e>
-                          <m:r>
-                            <a:rPr lang="fr-BE" b="0" i="1" smtClean="0">
-                              <a:latin typeface="Cambria Math" panose="02040503050406030204" pitchFamily="18" charset="0"/>
-                              <a:ea typeface="Cambria Math" panose="02040503050406030204" pitchFamily="18" charset="0"/>
-                            </a:rPr>
-                            <m:t>𝛿</m:t>
-                          </m:r>
-                        </m:e>
-                      </m:acc>
-                      <m:r>
-                        <a:rPr lang="fr-BE" b="0" i="1" smtClean="0">
-                          <a:latin typeface="Cambria Math" panose="02040503050406030204" pitchFamily="18" charset="0"/>
-                          <a:ea typeface="Cambria Math" panose="02040503050406030204" pitchFamily="18" charset="0"/>
-                        </a:rPr>
-                        <m:t>∙</m:t>
-                      </m:r>
-                      <m:sSub>
-                        <m:sSubPr>
-                          <m:ctrlPr>
-                            <a:rPr lang="fr-BE" b="0" i="1" smtClean="0">
-                              <a:latin typeface="Cambria Math" panose="02040503050406030204" pitchFamily="18" charset="0"/>
-                            </a:rPr>
-                          </m:ctrlPr>
-                        </m:sSubPr>
-                        <m:e>
-                          <m:r>
-                            <a:rPr lang="fr-BE" b="0" i="1" smtClean="0">
-                              <a:latin typeface="Cambria Math" panose="02040503050406030204" pitchFamily="18" charset="0"/>
-                            </a:rPr>
-                            <m:t>𝑟𝑒𝑔</m:t>
-                          </m:r>
-                        </m:e>
-                        <m:sub>
-                          <m:r>
-                            <a:rPr lang="fr-BE" b="0" i="1" smtClean="0">
-                              <a:latin typeface="Cambria Math" panose="02040503050406030204" pitchFamily="18" charset="0"/>
-                            </a:rPr>
-                            <m:t>𝑓𝑖𝑥𝑒𝑑</m:t>
-                          </m:r>
-                        </m:sub>
-                      </m:sSub>
-                    </m:oMath>
-                  </m:oMathPara>
-                </a14:m>
-                <a:endParaRPr lang="en-US" i="1" dirty="0"/>
-              </a:p>
-              <a:p>
-                <a:pPr marL="0" indent="0">
-                  <a:buNone/>
-                </a:pPr>
-                <a14:m>
-                  <m:oMathPara xmlns:m="http://schemas.openxmlformats.org/officeDocument/2006/math">
-                    <m:oMath>
-                      <m:sSub>
-                        <m:sSubPr>
-                          <m:ctrlPr>
-                            <a:rPr lang="en-US" i="1">
-                              <a:latin typeface="Cambria Math"/>
-                            </a:rPr>
-                          </m:ctrlPr>
-                        </m:sSubPr>
-                        <m:e>
-                          <m:r>
-                            <a:rPr lang="en-US" i="1">
-                              <a:latin typeface="Cambria Math"/>
-                            </a:rPr>
-                            <m:t>𝑦</m:t>
-                          </m:r>
-                        </m:e>
-                        <m:sub>
-                          <m:r>
-                            <a:rPr lang="en-US" i="1">
-                              <a:latin typeface="Cambria Math"/>
-                            </a:rPr>
-                            <m:t>𝑐</m:t>
-                          </m:r>
-                        </m:sub>
-                      </m:sSub>
-                      <m:r>
-                        <a:rPr lang="en-US" i="1">
-                          <a:latin typeface="Cambria Math"/>
-                        </a:rPr>
-                        <m:t>=</m:t>
-                      </m:r>
-                      <m:r>
-                        <a:rPr lang="en-US" i="1">
-                          <a:latin typeface="Cambria Math"/>
-                        </a:rPr>
-                        <m:t>𝛼</m:t>
-                      </m:r>
-                      <m:r>
-                        <a:rPr lang="en-US" i="1">
-                          <a:latin typeface="Cambria Math"/>
-                        </a:rPr>
-                        <m:t>∙</m:t>
-                      </m:r>
-                      <m:r>
-                        <a:rPr lang="en-US" i="1">
-                          <a:latin typeface="Cambria Math"/>
-                        </a:rPr>
-                        <m:t>𝑐𝑎𝑙</m:t>
-                      </m:r>
-                      <m:r>
-                        <a:rPr lang="en-US" i="1">
-                          <a:latin typeface="Cambria Math"/>
-                        </a:rPr>
-                        <m:t>+</m:t>
-                      </m:r>
-                      <m:r>
-                        <a:rPr lang="en-US" i="1">
-                          <a:latin typeface="Cambria Math"/>
-                        </a:rPr>
-                        <m:t>𝛽</m:t>
-                      </m:r>
-                      <m:r>
-                        <a:rPr lang="en-US" i="1">
-                          <a:latin typeface="Cambria Math"/>
-                        </a:rPr>
-                        <m:t>∙</m:t>
-                      </m:r>
-                      <m:r>
-                        <a:rPr lang="en-US" i="1">
-                          <a:latin typeface="Cambria Math"/>
-                        </a:rPr>
-                        <m:t>𝑜𝑢𝑡</m:t>
-                      </m:r>
-                      <m:r>
-                        <a:rPr lang="en-US" i="1">
-                          <a:latin typeface="Cambria Math"/>
-                        </a:rPr>
-                        <m:t>+ </m:t>
-                      </m:r>
-                      <m:r>
-                        <a:rPr lang="en-US" i="1">
-                          <a:latin typeface="Cambria Math"/>
-                        </a:rPr>
-                        <m:t>𝛾</m:t>
-                      </m:r>
-                      <m:r>
-                        <a:rPr lang="en-US" i="1">
-                          <a:latin typeface="Cambria Math"/>
-                        </a:rPr>
-                        <m:t>∙</m:t>
-                      </m:r>
-                      <m:r>
-                        <a:rPr lang="en-US" i="1">
-                          <a:latin typeface="Cambria Math"/>
-                        </a:rPr>
-                        <m:t>𝑟𝑒𝑔</m:t>
-                      </m:r>
-                      <m:r>
-                        <a:rPr lang="en-US" i="1">
-                          <a:latin typeface="Cambria Math"/>
-                        </a:rPr>
-                        <m:t>+</m:t>
-                      </m:r>
-                      <m:r>
-                        <a:rPr lang="en-US" i="1">
-                          <a:latin typeface="Cambria Math"/>
-                        </a:rPr>
-                        <m:t>𝜇</m:t>
-                      </m:r>
-                    </m:oMath>
-                  </m:oMathPara>
-                </a14:m>
-                <a:endParaRPr lang="en-US" dirty="0"/>
-              </a:p>
-              <a:p>
-                <a:r>
-                  <a:rPr lang="fr-BE" i="1" dirty="0"/>
-                  <a:t>Multiplicative case:</a:t>
-                </a:r>
-              </a:p>
-              <a:p>
-                <a:pPr marL="0" indent="0">
-                  <a:buNone/>
-                </a:pPr>
-                <a14:m>
-                  <m:oMathPara xmlns:m="http://schemas.openxmlformats.org/officeDocument/2006/math">
-                    <m:oMath>
-                      <m:sSub>
-                        <m:sSubPr>
-                          <m:ctrlPr>
-                            <a:rPr lang="fr-BE" b="0" i="1" smtClean="0">
-                              <a:latin typeface="Cambria Math" panose="02040503050406030204" pitchFamily="18" charset="0"/>
-                            </a:rPr>
-                          </m:ctrlPr>
-                        </m:sSubPr>
-                        <m:e>
-                          <m:r>
-                            <a:rPr lang="fr-BE" b="0" i="1" smtClean="0">
-                              <a:latin typeface="Cambria Math" panose="02040503050406030204" pitchFamily="18" charset="0"/>
-                            </a:rPr>
-                            <m:t>𝑦</m:t>
-                          </m:r>
-                        </m:e>
-                        <m:sub>
-                          <m:r>
-                            <a:rPr lang="fr-BE" b="0" i="1" smtClean="0">
-                              <a:latin typeface="Cambria Math" panose="02040503050406030204" pitchFamily="18" charset="0"/>
-                            </a:rPr>
-                            <m:t>𝑐</m:t>
-                          </m:r>
-                        </m:sub>
-                      </m:sSub>
-                      <m:r>
-                        <a:rPr lang="fr-BE" b="0" i="1" smtClean="0">
-                          <a:latin typeface="Cambria Math" panose="02040503050406030204" pitchFamily="18" charset="0"/>
-                        </a:rPr>
-                        <m:t>≡</m:t>
-                      </m:r>
-                      <m:func>
-                        <m:funcPr>
-                          <m:ctrlPr>
-                            <a:rPr lang="fr-BE" b="0" i="0" smtClean="0">
-                              <a:latin typeface="Cambria Math" panose="02040503050406030204" pitchFamily="18" charset="0"/>
-                            </a:rPr>
-                          </m:ctrlPr>
-                        </m:funcPr>
-                        <m:fName>
-                          <m:r>
-                            <m:rPr>
-                              <m:sty m:val="p"/>
-                            </m:rPr>
-                            <a:rPr lang="fr-BE" b="0" i="0" smtClean="0">
-                              <a:latin typeface="Cambria Math" panose="02040503050406030204" pitchFamily="18" charset="0"/>
-                            </a:rPr>
-                            <m:t>ln</m:t>
-                          </m:r>
-                        </m:fName>
-                        <m:e>
-                          <m:d>
-                            <m:dPr>
-                              <m:ctrlPr>
-                                <a:rPr lang="fr-BE" b="0" i="1" smtClean="0">
-                                  <a:latin typeface="Cambria Math" panose="02040503050406030204" pitchFamily="18" charset="0"/>
-                                </a:rPr>
-                              </m:ctrlPr>
-                            </m:dPr>
-                            <m:e>
-                              <m:r>
-                                <a:rPr lang="fr-BE" b="0" i="1" smtClean="0">
-                                  <a:latin typeface="Cambria Math" panose="02040503050406030204" pitchFamily="18" charset="0"/>
-                                </a:rPr>
-                                <m:t>𝑦</m:t>
-                              </m:r>
-                            </m:e>
-                          </m:d>
-                        </m:e>
-                      </m:func>
-                      <m:r>
-                        <a:rPr lang="fr-BE" b="0" i="1" smtClean="0">
-                          <a:latin typeface="Cambria Math" panose="02040503050406030204" pitchFamily="18" charset="0"/>
-                        </a:rPr>
-                        <m:t>−</m:t>
-                      </m:r>
-                      <m:acc>
-                        <m:accPr>
-                          <m:chr m:val="̅"/>
-                          <m:ctrlPr>
-                            <a:rPr lang="fr-BE" b="0" i="1" smtClean="0">
-                              <a:latin typeface="Cambria Math" panose="02040503050406030204" pitchFamily="18" charset="0"/>
-                              <a:ea typeface="Cambria Math" panose="02040503050406030204" pitchFamily="18" charset="0"/>
-                            </a:rPr>
-                          </m:ctrlPr>
-                        </m:accPr>
-                        <m:e>
-                          <m:r>
-                            <a:rPr lang="fr-BE" b="0" i="1" smtClean="0">
-                              <a:latin typeface="Cambria Math" panose="02040503050406030204" pitchFamily="18" charset="0"/>
-                              <a:ea typeface="Cambria Math" panose="02040503050406030204" pitchFamily="18" charset="0"/>
-                            </a:rPr>
-                            <m:t>𝛿</m:t>
-                          </m:r>
-                        </m:e>
-                      </m:acc>
-                      <m:r>
-                        <a:rPr lang="fr-BE" b="0" i="1" smtClean="0">
-                          <a:latin typeface="Cambria Math" panose="02040503050406030204" pitchFamily="18" charset="0"/>
-                          <a:ea typeface="Cambria Math" panose="02040503050406030204" pitchFamily="18" charset="0"/>
-                        </a:rPr>
-                        <m:t>∙</m:t>
-                      </m:r>
-                      <m:sSub>
-                        <m:sSubPr>
-                          <m:ctrlPr>
-                            <a:rPr lang="fr-BE" b="0" i="1" smtClean="0">
-                              <a:latin typeface="Cambria Math" panose="02040503050406030204" pitchFamily="18" charset="0"/>
-                            </a:rPr>
-                          </m:ctrlPr>
-                        </m:sSubPr>
-                        <m:e>
-                          <m:r>
-                            <a:rPr lang="fr-BE" b="0" i="1" smtClean="0">
-                              <a:latin typeface="Cambria Math" panose="02040503050406030204" pitchFamily="18" charset="0"/>
-                            </a:rPr>
-                            <m:t>𝑟𝑒𝑔</m:t>
-                          </m:r>
-                        </m:e>
-                        <m:sub>
-                          <m:r>
-                            <a:rPr lang="fr-BE" b="0" i="1" smtClean="0">
-                              <a:latin typeface="Cambria Math" panose="02040503050406030204" pitchFamily="18" charset="0"/>
-                            </a:rPr>
-                            <m:t>𝑓𝑖𝑥𝑒𝑑</m:t>
-                          </m:r>
-                        </m:sub>
-                      </m:sSub>
-                      <m:r>
-                        <a:rPr lang="fr-BE" b="0" i="1" smtClean="0">
-                          <a:latin typeface="Cambria Math" panose="02040503050406030204" pitchFamily="18" charset="0"/>
-                        </a:rPr>
-                        <m:t>[−</m:t>
-                      </m:r>
-                      <m:r>
-                        <a:rPr lang="fr-BE" b="0" i="1" smtClean="0">
-                          <a:latin typeface="Cambria Math" panose="02040503050406030204" pitchFamily="18" charset="0"/>
-                        </a:rPr>
-                        <m:t>𝑙𝑝</m:t>
-                      </m:r>
-                      <m:r>
-                        <a:rPr lang="fr-BE" b="0" i="1" smtClean="0">
-                          <a:latin typeface="Cambria Math" panose="02040503050406030204" pitchFamily="18" charset="0"/>
-                        </a:rPr>
-                        <m:t>]</m:t>
-                      </m:r>
-                    </m:oMath>
-                  </m:oMathPara>
-                </a14:m>
-                <a:endParaRPr lang="en-US" i="1" dirty="0"/>
-              </a:p>
-              <a:p>
-                <a:pPr marL="0" indent="0">
-                  <a:buNone/>
-                </a:pPr>
-                <a14:m>
-                  <m:oMathPara xmlns:m="http://schemas.openxmlformats.org/officeDocument/2006/math">
-                    <m:oMath>
-                      <m:func>
-                        <m:funcPr>
-                          <m:ctrlPr>
-                            <a:rPr lang="en-US" i="1">
-                              <a:latin typeface="Cambria Math"/>
-                            </a:rPr>
-                          </m:ctrlPr>
-                        </m:funcPr>
-                        <m:fName>
-                          <m:r>
-                            <a:rPr lang="en-US" i="1">
-                              <a:latin typeface="Cambria Math"/>
-                            </a:rPr>
-                            <m:t>𝑙𝑛</m:t>
-                          </m:r>
-                        </m:fName>
-                        <m:e>
-                          <m:d>
-                            <m:dPr>
-                              <m:ctrlPr>
-                                <a:rPr lang="en-US" i="1">
-                                  <a:latin typeface="Cambria Math" panose="02040503050406030204" pitchFamily="18" charset="0"/>
-                                </a:rPr>
-                              </m:ctrlPr>
-                            </m:dPr>
-                            <m:e>
-                              <m:sSub>
-                                <m:sSubPr>
-                                  <m:ctrlPr>
-                                    <a:rPr lang="en-US" i="1">
-                                      <a:latin typeface="Cambria Math"/>
-                                    </a:rPr>
-                                  </m:ctrlPr>
-                                </m:sSubPr>
-                                <m:e>
-                                  <m:r>
-                                    <a:rPr lang="en-US" i="1">
-                                      <a:latin typeface="Cambria Math"/>
-                                    </a:rPr>
-                                    <m:t>𝑦</m:t>
-                                  </m:r>
-                                </m:e>
-                                <m:sub>
-                                  <m:r>
-                                    <a:rPr lang="en-US" i="1">
-                                      <a:latin typeface="Cambria Math"/>
-                                    </a:rPr>
-                                    <m:t>𝑐</m:t>
-                                  </m:r>
-                                </m:sub>
-                              </m:sSub>
-                            </m:e>
-                          </m:d>
-                        </m:e>
-                      </m:func>
-                      <m:r>
-                        <a:rPr lang="en-US" i="1">
-                          <a:latin typeface="Cambria Math"/>
-                        </a:rPr>
-                        <m:t>=</m:t>
-                      </m:r>
-                      <m:r>
-                        <a:rPr lang="en-US" i="1">
-                          <a:latin typeface="Cambria Math"/>
-                        </a:rPr>
-                        <m:t>𝛼</m:t>
-                      </m:r>
-                      <m:r>
-                        <a:rPr lang="en-US" i="1">
-                          <a:latin typeface="Cambria Math"/>
-                        </a:rPr>
-                        <m:t>∙</m:t>
-                      </m:r>
-                      <m:r>
-                        <a:rPr lang="en-US" i="1">
-                          <a:latin typeface="Cambria Math"/>
-                        </a:rPr>
-                        <m:t>𝑐𝑎𝑙</m:t>
-                      </m:r>
-                      <m:r>
-                        <a:rPr lang="en-US" i="1">
-                          <a:latin typeface="Cambria Math"/>
-                        </a:rPr>
-                        <m:t>+</m:t>
-                      </m:r>
-                      <m:r>
-                        <a:rPr lang="en-US" i="1">
-                          <a:latin typeface="Cambria Math"/>
-                        </a:rPr>
-                        <m:t>𝛽</m:t>
-                      </m:r>
-                      <m:r>
-                        <a:rPr lang="en-US" i="1">
-                          <a:latin typeface="Cambria Math"/>
-                        </a:rPr>
-                        <m:t>∙</m:t>
-                      </m:r>
-                      <m:r>
-                        <a:rPr lang="en-US" i="1">
-                          <a:latin typeface="Cambria Math"/>
-                        </a:rPr>
-                        <m:t>𝑜𝑢𝑡</m:t>
-                      </m:r>
-                      <m:r>
-                        <a:rPr lang="en-US" i="1">
-                          <a:latin typeface="Cambria Math"/>
-                        </a:rPr>
-                        <m:t>+ </m:t>
-                      </m:r>
-                      <m:r>
-                        <a:rPr lang="en-US" i="1">
-                          <a:latin typeface="Cambria Math"/>
-                        </a:rPr>
-                        <m:t>𝛾</m:t>
-                      </m:r>
-                      <m:r>
-                        <a:rPr lang="en-US" i="1">
-                          <a:latin typeface="Cambria Math"/>
-                        </a:rPr>
-                        <m:t>∙</m:t>
-                      </m:r>
-                      <m:r>
-                        <a:rPr lang="en-US" i="1">
-                          <a:latin typeface="Cambria Math"/>
-                        </a:rPr>
-                        <m:t>𝑟𝑒𝑔</m:t>
-                      </m:r>
-                      <m:r>
-                        <a:rPr lang="en-US" i="1">
-                          <a:latin typeface="Cambria Math"/>
-                        </a:rPr>
-                        <m:t>+</m:t>
-                      </m:r>
-                      <m:r>
-                        <a:rPr lang="en-US" i="1">
-                          <a:latin typeface="Cambria Math"/>
-                        </a:rPr>
-                        <m:t>𝜇</m:t>
-                      </m:r>
-                    </m:oMath>
-                  </m:oMathPara>
-                </a14:m>
-                <a:endParaRPr lang="en-US" dirty="0"/>
-              </a:p>
-              <a:p>
-                <a:endParaRPr lang="fr-BE" dirty="0"/>
-              </a:p>
-              <a:p>
-                <a:endParaRPr lang="fr-BE" i="1" dirty="0">
-                  <a:latin typeface="Cambria Math"/>
-                </a:endParaRPr>
-              </a:p>
-              <a:p>
+                <a:pPr lvl="1"/>
                 <a14:m>
                   <m:oMath xmlns:m="http://schemas.openxmlformats.org/officeDocument/2006/math">
+                    <m:sSub>
+                      <m:sSubPr>
+                        <m:ctrlPr>
+                          <a:rPr lang="en-US" sz="2800" i="1">
+                            <a:latin typeface="Cambria Math"/>
+                          </a:rPr>
+                        </m:ctrlPr>
+                      </m:sSubPr>
+                      <m:e>
+                        <m:r>
+                          <a:rPr lang="en-US" sz="2800" i="1">
+                            <a:latin typeface="Cambria Math"/>
+                          </a:rPr>
+                          <m:t>𝑦</m:t>
+                        </m:r>
+                      </m:e>
+                      <m:sub>
+                        <m:r>
+                          <a:rPr lang="en-US" sz="2800" i="1">
+                            <a:latin typeface="Cambria Math"/>
+                          </a:rPr>
+                          <m:t>𝑐</m:t>
+                        </m:r>
+                      </m:sub>
+                    </m:sSub>
                     <m:r>
-                      <a:rPr lang="en-US" i="1">
-                        <a:latin typeface="Cambria Math"/>
-                      </a:rPr>
-                      <m:t>𝑐𝑎𝑙</m:t>
-                    </m:r>
-                    <m:r>
-                      <a:rPr lang="en-US" i="1">
+                      <a:rPr lang="en-US" sz="2800" i="1">
                         <a:latin typeface="Cambria Math"/>
                       </a:rPr>
                       <m:t>=</m:t>
                     </m:r>
-                    <m:d>
-                      <m:dPr>
-                        <m:begChr m:val="["/>
-                        <m:endChr m:val="]"/>
-                        <m:ctrlPr>
-                          <a:rPr lang="en-US" i="1">
-                            <a:latin typeface="Cambria Math" panose="02040503050406030204" pitchFamily="18" charset="0"/>
-                          </a:rPr>
-                        </m:ctrlPr>
-                      </m:dPr>
-                      <m:e>
-                        <m:m>
-                          <m:mPr>
-                            <m:mcs>
-                              <m:mc>
-                                <m:mcPr>
-                                  <m:count m:val="3"/>
-                                  <m:mcJc m:val="center"/>
-                                </m:mcPr>
-                              </m:mc>
-                            </m:mcs>
-                            <m:ctrlPr>
-                              <a:rPr lang="en-US" i="1">
-                                <a:latin typeface="Cambria Math" panose="02040503050406030204" pitchFamily="18" charset="0"/>
-                              </a:rPr>
-                            </m:ctrlPr>
-                          </m:mPr>
-                          <m:mr>
-                            <m:e>
-                              <m:r>
-                                <a:rPr lang="en-US" i="1">
-                                  <a:latin typeface="Cambria Math"/>
-                                </a:rPr>
-                                <m:t>𝑡𝑑𝑒</m:t>
-                              </m:r>
-                            </m:e>
-                            <m:e>
-                              <m:r>
-                                <a:rPr lang="en-US" i="1">
-                                  <a:latin typeface="Cambria Math"/>
-                                </a:rPr>
-                                <m:t>𝑒𝑒</m:t>
-                              </m:r>
-                            </m:e>
-                            <m:e>
-                              <m:r>
-                                <a:rPr lang="en-US" i="1">
-                                  <a:latin typeface="Cambria Math"/>
-                                </a:rPr>
-                                <m:t>𝑜𝑚ℎ𝑒</m:t>
-                              </m:r>
-                            </m:e>
-                          </m:mr>
-                        </m:m>
-                      </m:e>
-                    </m:d>
-                  </m:oMath>
-                </a14:m>
-                <a:r>
-                  <a:rPr lang="en-US" dirty="0"/>
-                  <a:t>  </a:t>
-                </a:r>
-              </a:p>
-              <a:p>
-                <a14:m>
-                  <m:oMath xmlns:m="http://schemas.openxmlformats.org/officeDocument/2006/math">
                     <m:r>
-                      <a:rPr lang="en-US" i="1">
-                        <a:latin typeface="Cambria Math"/>
+                      <a:rPr lang="fr-BE" sz="2800" i="1">
+                        <a:latin typeface="Cambria Math" panose="02040503050406030204" pitchFamily="18" charset="0"/>
                       </a:rPr>
-                      <m:t>𝑜𝑢𝑡</m:t>
+                      <m:t>𝑋</m:t>
                     </m:r>
                     <m:r>
-                      <a:rPr lang="en-US" i="1">
-                        <a:latin typeface="Cambria Math"/>
+                      <a:rPr lang="fr-BE" sz="2800" i="1">
+                        <a:latin typeface="Cambria Math" panose="02040503050406030204" pitchFamily="18" charset="0"/>
+                        <a:ea typeface="Cambria Math" panose="02040503050406030204" pitchFamily="18" charset="0"/>
                       </a:rPr>
-                      <m:t>=</m:t>
-                    </m:r>
-                    <m:d>
-                      <m:dPr>
-                        <m:begChr m:val="["/>
-                        <m:endChr m:val="]"/>
-                        <m:ctrlPr>
-                          <a:rPr lang="en-US" i="1">
-                            <a:latin typeface="Cambria Math" panose="02040503050406030204" pitchFamily="18" charset="0"/>
-                          </a:rPr>
-                        </m:ctrlPr>
-                      </m:dPr>
-                      <m:e>
-                        <m:m>
-                          <m:mPr>
-                            <m:mcs>
-                              <m:mc>
-                                <m:mcPr>
-                                  <m:count m:val="3"/>
-                                  <m:mcJc m:val="center"/>
-                                </m:mcPr>
-                              </m:mc>
-                            </m:mcs>
-                            <m:ctrlPr>
-                              <a:rPr lang="en-US" i="1">
-                                <a:latin typeface="Cambria Math" panose="02040503050406030204" pitchFamily="18" charset="0"/>
-                              </a:rPr>
-                            </m:ctrlPr>
-                          </m:mPr>
-                          <m:mr>
-                            <m:e>
-                              <m:r>
-                                <a:rPr lang="en-US" i="1">
-                                  <a:latin typeface="Cambria Math"/>
-                                </a:rPr>
-                                <m:t>𝑜𝑢</m:t>
-                              </m:r>
-                              <m:sSub>
-                                <m:sSubPr>
-                                  <m:ctrlPr>
-                                    <a:rPr lang="en-US" i="1">
-                                      <a:latin typeface="Cambria Math"/>
-                                    </a:rPr>
-                                  </m:ctrlPr>
-                                </m:sSubPr>
-                                <m:e>
-                                  <m:r>
-                                    <a:rPr lang="en-US" i="1">
-                                      <a:latin typeface="Cambria Math"/>
-                                    </a:rPr>
-                                    <m:t>𝑡</m:t>
-                                  </m:r>
-                                </m:e>
-                                <m:sub>
-                                  <m:r>
-                                    <a:rPr lang="en-US" i="1">
-                                      <a:latin typeface="Cambria Math"/>
-                                    </a:rPr>
-                                    <m:t>𝑡</m:t>
-                                  </m:r>
-                                </m:sub>
-                              </m:sSub>
-                            </m:e>
-                            <m:e>
-                              <m:r>
-                                <a:rPr lang="en-US" i="1">
-                                  <a:latin typeface="Cambria Math"/>
-                                </a:rPr>
-                                <m:t>𝑜𝑢</m:t>
-                              </m:r>
-                              <m:sSub>
-                                <m:sSubPr>
-                                  <m:ctrlPr>
-                                    <a:rPr lang="en-US" i="1">
-                                      <a:latin typeface="Cambria Math"/>
-                                    </a:rPr>
-                                  </m:ctrlPr>
-                                </m:sSubPr>
-                                <m:e>
-                                  <m:r>
-                                    <a:rPr lang="en-US" i="1">
-                                      <a:latin typeface="Cambria Math"/>
-                                    </a:rPr>
-                                    <m:t>𝑡</m:t>
-                                  </m:r>
-                                </m:e>
-                                <m:sub>
-                                  <m:r>
-                                    <a:rPr lang="en-US" i="1">
-                                      <a:latin typeface="Cambria Math"/>
-                                    </a:rPr>
-                                    <m:t>𝑠</m:t>
-                                  </m:r>
-                                </m:sub>
-                              </m:sSub>
-                            </m:e>
-                            <m:e>
-                              <m:r>
-                                <a:rPr lang="en-US" i="1">
-                                  <a:latin typeface="Cambria Math"/>
-                                </a:rPr>
-                                <m:t>𝑜𝑢</m:t>
-                              </m:r>
-                              <m:sSub>
-                                <m:sSubPr>
-                                  <m:ctrlPr>
-                                    <a:rPr lang="en-US" i="1">
-                                      <a:latin typeface="Cambria Math"/>
-                                    </a:rPr>
-                                  </m:ctrlPr>
-                                </m:sSubPr>
-                                <m:e>
-                                  <m:r>
-                                    <a:rPr lang="en-US" i="1">
-                                      <a:latin typeface="Cambria Math"/>
-                                    </a:rPr>
-                                    <m:t>𝑡</m:t>
-                                  </m:r>
-                                </m:e>
-                                <m:sub>
-                                  <m:r>
-                                    <a:rPr lang="en-US" i="1">
-                                      <a:latin typeface="Cambria Math"/>
-                                    </a:rPr>
-                                    <m:t>𝑖</m:t>
-                                  </m:r>
-                                </m:sub>
-                              </m:sSub>
-                            </m:e>
-                          </m:mr>
-                        </m:m>
-                      </m:e>
-                    </m:d>
-                  </m:oMath>
-                </a14:m>
-                <a:endParaRPr lang="en-US" dirty="0"/>
-              </a:p>
-              <a:p>
-                <a14:m>
-                  <m:oMath xmlns:m="http://schemas.openxmlformats.org/officeDocument/2006/math">
-                    <m:r>
-                      <a:rPr lang="en-US" i="1">
-                        <a:latin typeface="Cambria Math"/>
-                      </a:rPr>
-                      <m:t>𝑟𝑒𝑔</m:t>
+                      <m:t>𝛽</m:t>
                     </m:r>
                     <m:r>
-                      <a:rPr lang="en-US" i="1">
-                        <a:latin typeface="Cambria Math"/>
+                      <a:rPr lang="fr-BE" sz="2800" i="1">
+                        <a:latin typeface="Cambria Math" panose="02040503050406030204" pitchFamily="18" charset="0"/>
+                        <a:ea typeface="Cambria Math" panose="02040503050406030204" pitchFamily="18" charset="0"/>
                       </a:rPr>
-                      <m:t>=</m:t>
+                      <m:t>+</m:t>
                     </m:r>
-                    <m:d>
-                      <m:dPr>
-                        <m:begChr m:val="["/>
-                        <m:endChr m:val="]"/>
-                        <m:ctrlPr>
-                          <a:rPr lang="en-US" i="1">
-                            <a:latin typeface="Cambria Math" panose="02040503050406030204" pitchFamily="18" charset="0"/>
-                          </a:rPr>
-                        </m:ctrlPr>
-                      </m:dPr>
-                      <m:e>
-                        <m:m>
-                          <m:mPr>
-                            <m:mcs>
-                              <m:mc>
-                                <m:mcPr>
-                                  <m:count m:val="6"/>
-                                  <m:mcJc m:val="center"/>
-                                </m:mcPr>
-                              </m:mc>
-                            </m:mcs>
-                            <m:ctrlPr>
-                              <a:rPr lang="en-US" i="1">
-                                <a:latin typeface="Cambria Math" panose="02040503050406030204" pitchFamily="18" charset="0"/>
-                              </a:rPr>
-                            </m:ctrlPr>
-                          </m:mPr>
-                          <m:mr>
-                            <m:e>
-                              <m:r>
-                                <a:rPr lang="en-US" i="1">
-                                  <a:latin typeface="Cambria Math"/>
-                                </a:rPr>
-                                <m:t>𝑟𝑒</m:t>
-                              </m:r>
-                              <m:sSub>
-                                <m:sSubPr>
-                                  <m:ctrlPr>
-                                    <a:rPr lang="en-US" i="1">
-                                      <a:latin typeface="Cambria Math"/>
-                                    </a:rPr>
-                                  </m:ctrlPr>
-                                </m:sSubPr>
-                                <m:e>
-                                  <m:r>
-                                    <a:rPr lang="en-US" i="1">
-                                      <a:latin typeface="Cambria Math"/>
-                                    </a:rPr>
-                                    <m:t>𝑔</m:t>
-                                  </m:r>
-                                </m:e>
-                                <m:sub>
-                                  <m:r>
-                                    <a:rPr lang="en-US" i="1">
-                                      <a:latin typeface="Cambria Math"/>
-                                    </a:rPr>
-                                    <m:t>𝑡</m:t>
-                                  </m:r>
-                                </m:sub>
-                              </m:sSub>
-                            </m:e>
-                            <m:e>
-                              <m:r>
-                                <a:rPr lang="en-US" i="1">
-                                  <a:latin typeface="Cambria Math"/>
-                                </a:rPr>
-                                <m:t>𝑟𝑒</m:t>
-                              </m:r>
-                              <m:sSub>
-                                <m:sSubPr>
-                                  <m:ctrlPr>
-                                    <a:rPr lang="en-US" i="1">
-                                      <a:latin typeface="Cambria Math"/>
-                                    </a:rPr>
-                                  </m:ctrlPr>
-                                </m:sSubPr>
-                                <m:e>
-                                  <m:r>
-                                    <a:rPr lang="en-US" i="1">
-                                      <a:latin typeface="Cambria Math"/>
-                                    </a:rPr>
-                                    <m:t>𝑔</m:t>
-                                  </m:r>
-                                </m:e>
-                                <m:sub>
-                                  <m:r>
-                                    <a:rPr lang="en-US" i="1">
-                                      <a:latin typeface="Cambria Math"/>
-                                    </a:rPr>
-                                    <m:t>𝑠</m:t>
-                                  </m:r>
-                                </m:sub>
-                              </m:sSub>
-                            </m:e>
-                            <m:e>
-                              <m:r>
-                                <a:rPr lang="en-US" i="1">
-                                  <a:latin typeface="Cambria Math"/>
-                                </a:rPr>
-                                <m:t>𝑟𝑒</m:t>
-                              </m:r>
-                              <m:sSub>
-                                <m:sSubPr>
-                                  <m:ctrlPr>
-                                    <a:rPr lang="en-US" i="1">
-                                      <a:latin typeface="Cambria Math"/>
-                                    </a:rPr>
-                                  </m:ctrlPr>
-                                </m:sSubPr>
-                                <m:e>
-                                  <m:r>
-                                    <a:rPr lang="en-US" i="1">
-                                      <a:latin typeface="Cambria Math"/>
-                                    </a:rPr>
-                                    <m:t>𝑔</m:t>
-                                  </m:r>
-                                </m:e>
-                                <m:sub>
-                                  <m:r>
-                                    <a:rPr lang="en-US" i="1">
-                                      <a:latin typeface="Cambria Math"/>
-                                    </a:rPr>
-                                    <m:t>𝑖</m:t>
-                                  </m:r>
-                                </m:sub>
-                              </m:sSub>
-                            </m:e>
-                            <m:e>
-                              <m:r>
-                                <a:rPr lang="en-US" i="1">
-                                  <a:latin typeface="Cambria Math"/>
-                                </a:rPr>
-                                <m:t>𝑟𝑒</m:t>
-                              </m:r>
-                              <m:sSub>
-                                <m:sSubPr>
-                                  <m:ctrlPr>
-                                    <a:rPr lang="en-US" i="1">
-                                      <a:latin typeface="Cambria Math"/>
-                                    </a:rPr>
-                                  </m:ctrlPr>
-                                </m:sSubPr>
-                                <m:e>
-                                  <m:r>
-                                    <a:rPr lang="en-US" i="1">
-                                      <a:latin typeface="Cambria Math"/>
-                                    </a:rPr>
-                                    <m:t>𝑔</m:t>
-                                  </m:r>
-                                </m:e>
-                                <m:sub>
-                                  <m:r>
-                                    <a:rPr lang="en-US" i="1">
-                                      <a:latin typeface="Cambria Math"/>
-                                    </a:rPr>
-                                    <m:t>𝑠𝑎</m:t>
-                                  </m:r>
-                                </m:sub>
-                              </m:sSub>
-                            </m:e>
-                            <m:e>
-                              <m:r>
-                                <a:rPr lang="en-US" i="1">
-                                  <a:latin typeface="Cambria Math"/>
-                                </a:rPr>
-                                <m:t>𝑟𝑒</m:t>
-                              </m:r>
-                              <m:sSub>
-                                <m:sSubPr>
-                                  <m:ctrlPr>
-                                    <a:rPr lang="en-US" i="1">
-                                      <a:latin typeface="Cambria Math"/>
-                                    </a:rPr>
-                                  </m:ctrlPr>
-                                </m:sSubPr>
-                                <m:e>
-                                  <m:r>
-                                    <a:rPr lang="en-US" i="1">
-                                      <a:latin typeface="Cambria Math"/>
-                                    </a:rPr>
-                                    <m:t>𝑔</m:t>
-                                  </m:r>
-                                </m:e>
-                                <m:sub>
-                                  <m:r>
-                                    <a:rPr lang="en-US" i="1">
-                                      <a:latin typeface="Cambria Math"/>
-                                    </a:rPr>
-                                    <m:t>𝑦</m:t>
-                                  </m:r>
-                                </m:sub>
-                              </m:sSub>
-                            </m:e>
-                            <m:e>
-                              <m:r>
-                                <a:rPr lang="en-US" i="1">
-                                  <a:latin typeface="Cambria Math"/>
-                                </a:rPr>
-                                <m:t>𝑟𝑒</m:t>
-                              </m:r>
-                              <m:sSub>
-                                <m:sSubPr>
-                                  <m:ctrlPr>
-                                    <a:rPr lang="en-US" i="1">
-                                      <a:latin typeface="Cambria Math"/>
-                                    </a:rPr>
-                                  </m:ctrlPr>
-                                </m:sSubPr>
-                                <m:e>
-                                  <m:r>
-                                    <a:rPr lang="en-US" i="1">
-                                      <a:latin typeface="Cambria Math"/>
-                                    </a:rPr>
-                                    <m:t>𝑔</m:t>
-                                  </m:r>
-                                </m:e>
-                                <m:sub>
-                                  <m:r>
-                                    <a:rPr lang="en-US" i="1">
-                                      <a:latin typeface="Cambria Math"/>
-                                    </a:rPr>
-                                    <m:t>𝑢</m:t>
-                                  </m:r>
-                                </m:sub>
-                              </m:sSub>
-                            </m:e>
-                          </m:mr>
-                        </m:m>
-                      </m:e>
-                    </m:d>
-                  </m:oMath>
-                </a14:m>
-                <a:endParaRPr lang="en-US" dirty="0"/>
-              </a:p>
-              <a:p>
-                <a14:m>
-                  <m:oMath xmlns:m="http://schemas.openxmlformats.org/officeDocument/2006/math">
                     <m:r>
-                      <a:rPr lang="en-US" i="1" smtClean="0">
+                      <a:rPr lang="en-US" sz="2800" i="1">
                         <a:latin typeface="Cambria Math"/>
                       </a:rPr>
                       <m:t>𝜇</m:t>
                     </m:r>
                     <m:r>
-                      <a:rPr lang="fr-BE" b="0" i="1" smtClean="0">
-                        <a:latin typeface="Cambria Math"/>
+                      <a:rPr lang="fr-BE" sz="2800" i="1">
+                        <a:latin typeface="Cambria Math" panose="02040503050406030204" pitchFamily="18" charset="0"/>
                       </a:rPr>
                       <m:t>=</m:t>
                     </m:r>
                     <m:r>
-                      <a:rPr lang="fr-BE" b="0" i="1" smtClean="0">
+                      <a:rPr lang="fr-BE" sz="2800" i="1">
                         <a:latin typeface="Cambria Math" panose="02040503050406030204" pitchFamily="18" charset="0"/>
+                      </a:rPr>
+                      <m:t>𝐶𝑎</m:t>
+                    </m:r>
+                    <m:r>
+                      <a:rPr lang="fr-BE" sz="2800" b="0" i="1" smtClean="0">
+                        <a:latin typeface="Cambria Math" panose="02040503050406030204" pitchFamily="18" charset="0"/>
+                      </a:rPr>
+                      <m:t>𝑙</m:t>
+                    </m:r>
+                    <m:r>
+                      <a:rPr lang="fr-BE" sz="2800" i="1">
+                        <a:latin typeface="Cambria Math" panose="02040503050406030204" pitchFamily="18" charset="0"/>
+                      </a:rPr>
+                      <m:t> </m:t>
+                    </m:r>
+                    <m:sSub>
+                      <m:sSubPr>
+                        <m:ctrlPr>
+                          <a:rPr lang="en-US" sz="2800" i="1">
+                            <a:latin typeface="Cambria Math" panose="02040503050406030204" pitchFamily="18" charset="0"/>
+                            <a:ea typeface="Cambria Math" panose="02040503050406030204" pitchFamily="18" charset="0"/>
+                          </a:rPr>
+                        </m:ctrlPr>
+                      </m:sSubPr>
+                      <m:e>
+                        <m:r>
+                          <a:rPr lang="en-US" sz="2800" i="1">
+                            <a:latin typeface="Cambria Math" panose="02040503050406030204" pitchFamily="18" charset="0"/>
+                            <a:ea typeface="Cambria Math" panose="02040503050406030204" pitchFamily="18" charset="0"/>
+                          </a:rPr>
+                          <m:t>𝛽</m:t>
+                        </m:r>
+                      </m:e>
+                      <m:sub>
+                        <m:r>
+                          <a:rPr lang="fr-BE" sz="2800" i="1">
+                            <a:latin typeface="Cambria Math" panose="02040503050406030204" pitchFamily="18" charset="0"/>
+                          </a:rPr>
+                          <m:t>𝑐𝑎𝑙</m:t>
+                        </m:r>
+                      </m:sub>
+                    </m:sSub>
+                    <m:r>
+                      <a:rPr lang="en-US" sz="2800" i="1">
+                        <a:latin typeface="Cambria Math"/>
+                      </a:rPr>
+                      <m:t>+</m:t>
+                    </m:r>
+                    <m:r>
+                      <a:rPr lang="fr-BE" sz="2800" i="1">
+                        <a:latin typeface="Cambria Math" panose="02040503050406030204" pitchFamily="18" charset="0"/>
+                      </a:rPr>
+                      <m:t>𝑂</m:t>
+                    </m:r>
+                    <m:sSub>
+                      <m:sSubPr>
+                        <m:ctrlPr>
+                          <a:rPr lang="fr-BE" sz="2800" b="0" i="1" smtClean="0">
+                            <a:latin typeface="Cambria Math" panose="02040503050406030204" pitchFamily="18" charset="0"/>
+                            <a:ea typeface="Cambria Math" panose="02040503050406030204" pitchFamily="18" charset="0"/>
+                          </a:rPr>
+                        </m:ctrlPr>
+                      </m:sSubPr>
+                      <m:e>
+                        <m:r>
+                          <a:rPr lang="fr-BE" sz="2800" b="0" i="1" smtClean="0">
+                            <a:latin typeface="Cambria Math" panose="02040503050406030204" pitchFamily="18" charset="0"/>
+                            <a:ea typeface="Cambria Math" panose="02040503050406030204" pitchFamily="18" charset="0"/>
+                          </a:rPr>
+                          <m:t>𝑢𝑡</m:t>
+                        </m:r>
+                        <m:r>
+                          <a:rPr lang="en-US" sz="2800" i="1">
+                            <a:latin typeface="Cambria Math" panose="02040503050406030204" pitchFamily="18" charset="0"/>
+                            <a:ea typeface="Cambria Math" panose="02040503050406030204" pitchFamily="18" charset="0"/>
+                          </a:rPr>
+                          <m:t>𝛽</m:t>
+                        </m:r>
+                      </m:e>
+                      <m:sub>
+                        <m:r>
+                          <a:rPr lang="fr-BE" sz="2800" i="1">
+                            <a:latin typeface="Cambria Math" panose="02040503050406030204" pitchFamily="18" charset="0"/>
+                          </a:rPr>
+                          <m:t>𝑜</m:t>
+                        </m:r>
+                        <m:r>
+                          <a:rPr lang="fr-BE" sz="2800" b="0" i="1" smtClean="0">
+                            <a:latin typeface="Cambria Math" panose="02040503050406030204" pitchFamily="18" charset="0"/>
+                          </a:rPr>
+                          <m:t>𝑢𝑡</m:t>
+                        </m:r>
+                      </m:sub>
+                    </m:sSub>
+                    <m:r>
+                      <a:rPr lang="en-US" sz="2800" i="1">
+                        <a:latin typeface="Cambria Math"/>
+                      </a:rPr>
+                      <m:t>+</m:t>
+                    </m:r>
+                    <m:r>
+                      <a:rPr lang="fr-BE" sz="2800" i="1">
+                        <a:latin typeface="Cambria Math" panose="02040503050406030204" pitchFamily="18" charset="0"/>
+                      </a:rPr>
+                      <m:t>𝑅</m:t>
+                    </m:r>
+                    <m:r>
+                      <a:rPr lang="fr-BE" sz="2800" b="0" i="1" smtClean="0">
+                        <a:latin typeface="Cambria Math" panose="02040503050406030204" pitchFamily="18" charset="0"/>
+                      </a:rPr>
+                      <m:t>𝑒𝑔</m:t>
+                    </m:r>
+                    <m:sSub>
+                      <m:sSubPr>
+                        <m:ctrlPr>
+                          <a:rPr lang="en-US" sz="2800" i="1">
+                            <a:latin typeface="Cambria Math" panose="02040503050406030204" pitchFamily="18" charset="0"/>
+                            <a:ea typeface="Cambria Math" panose="02040503050406030204" pitchFamily="18" charset="0"/>
+                          </a:rPr>
+                        </m:ctrlPr>
+                      </m:sSubPr>
+                      <m:e>
+                        <m:r>
+                          <a:rPr lang="en-US" sz="2800" i="1">
+                            <a:latin typeface="Cambria Math" panose="02040503050406030204" pitchFamily="18" charset="0"/>
+                            <a:ea typeface="Cambria Math" panose="02040503050406030204" pitchFamily="18" charset="0"/>
+                          </a:rPr>
+                          <m:t>𝛽</m:t>
+                        </m:r>
+                      </m:e>
+                      <m:sub>
+                        <m:r>
+                          <a:rPr lang="fr-BE" sz="2800" i="1">
+                            <a:latin typeface="Cambria Math" panose="02040503050406030204" pitchFamily="18" charset="0"/>
+                            <a:ea typeface="Cambria Math" panose="02040503050406030204" pitchFamily="18" charset="0"/>
+                          </a:rPr>
+                          <m:t>𝑟</m:t>
+                        </m:r>
+                        <m:r>
+                          <a:rPr lang="fr-BE" sz="2800" b="0" i="1" smtClean="0">
+                            <a:latin typeface="Cambria Math" panose="02040503050406030204" pitchFamily="18" charset="0"/>
+                            <a:ea typeface="Cambria Math" panose="02040503050406030204" pitchFamily="18" charset="0"/>
+                          </a:rPr>
+                          <m:t>𝑒𝑔</m:t>
+                        </m:r>
+                      </m:sub>
+                    </m:sSub>
+                    <m:r>
+                      <a:rPr lang="en-US" sz="2800" i="1">
+                        <a:latin typeface="Cambria Math"/>
+                      </a:rPr>
+                      <m:t>+</m:t>
+                    </m:r>
+                    <m:r>
+                      <a:rPr lang="en-US" sz="2800" i="1">
+                        <a:latin typeface="Cambria Math"/>
+                      </a:rPr>
+                      <m:t>𝜇</m:t>
+                    </m:r>
+                  </m:oMath>
+                </a14:m>
+                <a:endParaRPr lang="fr-BE" sz="2800" i="1" dirty="0">
+                  <a:latin typeface="Cambria Math"/>
+                </a:endParaRPr>
+              </a:p>
+              <a:p>
+                <a:pPr lvl="2"/>
+                <a14:m>
+                  <m:oMath xmlns:m="http://schemas.openxmlformats.org/officeDocument/2006/math">
+                    <m:r>
+                      <a:rPr lang="fr-BE" sz="2400" b="0" i="1" smtClean="0">
+                        <a:latin typeface="Cambria Math" panose="02040503050406030204" pitchFamily="18" charset="0"/>
+                        <a:ea typeface="Cambria Math" panose="02040503050406030204" pitchFamily="18" charset="0"/>
+                      </a:rPr>
+                      <m:t>𝜇</m:t>
+                    </m:r>
+                    <m:r>
+                      <a:rPr lang="fr-BE" sz="2400" b="0" i="1" smtClean="0">
+                        <a:latin typeface="Cambria Math" panose="02040503050406030204" pitchFamily="18" charset="0"/>
+                        <a:ea typeface="Cambria Math" panose="02040503050406030204" pitchFamily="18" charset="0"/>
+                      </a:rPr>
+                      <m:t>~</m:t>
+                    </m:r>
+                    <m:r>
+                      <a:rPr lang="fr-BE" sz="2400" b="0" i="1" smtClean="0">
+                        <a:latin typeface="Cambria Math" panose="02040503050406030204" pitchFamily="18" charset="0"/>
+                        <a:ea typeface="Cambria Math" panose="02040503050406030204" pitchFamily="18" charset="0"/>
+                      </a:rPr>
+                      <m:t>𝐴𝑅𝐼𝑀𝐴</m:t>
+                    </m:r>
+                    <m:r>
+                      <a:rPr lang="fr-BE" sz="2400" b="0" i="1" smtClean="0">
+                        <a:latin typeface="Cambria Math" panose="02040503050406030204" pitchFamily="18" charset="0"/>
+                        <a:ea typeface="Cambria Math" panose="02040503050406030204" pitchFamily="18" charset="0"/>
+                      </a:rPr>
+                      <m:t> (</m:t>
+                    </m:r>
+                    <m:r>
+                      <a:rPr lang="fr-BE" sz="2400" b="0" i="1" smtClean="0">
+                        <a:latin typeface="Cambria Math" panose="02040503050406030204" pitchFamily="18" charset="0"/>
+                        <a:ea typeface="Cambria Math" panose="02040503050406030204" pitchFamily="18" charset="0"/>
+                      </a:rPr>
+                      <m:t>𝑜𝑟</m:t>
+                    </m:r>
+                    <m:r>
+                      <a:rPr lang="fr-BE" sz="2400" b="0" i="1" smtClean="0">
+                        <a:latin typeface="Cambria Math" panose="02040503050406030204" pitchFamily="18" charset="0"/>
+                        <a:ea typeface="Cambria Math" panose="02040503050406030204" pitchFamily="18" charset="0"/>
+                      </a:rPr>
+                      <m:t> </m:t>
+                    </m:r>
+                    <m:r>
+                      <a:rPr lang="fr-BE" sz="2400" b="0" i="1" smtClean="0">
+                        <a:latin typeface="Cambria Math" panose="02040503050406030204" pitchFamily="18" charset="0"/>
+                        <a:ea typeface="Cambria Math" panose="02040503050406030204" pitchFamily="18" charset="0"/>
+                      </a:rPr>
+                      <m:t>𝑎𝑛𝑜𝑡ℎ𝑒𝑟</m:t>
+                    </m:r>
+                    <m:r>
+                      <a:rPr lang="fr-BE" sz="2400" b="0" i="1" smtClean="0">
+                        <a:latin typeface="Cambria Math" panose="02040503050406030204" pitchFamily="18" charset="0"/>
+                        <a:ea typeface="Cambria Math" panose="02040503050406030204" pitchFamily="18" charset="0"/>
+                      </a:rPr>
+                      <m:t> </m:t>
+                    </m:r>
+                    <m:r>
+                      <a:rPr lang="fr-BE" sz="2400" b="0" i="1" smtClean="0">
+                        <a:latin typeface="Cambria Math" panose="02040503050406030204" pitchFamily="18" charset="0"/>
+                        <a:ea typeface="Cambria Math" panose="02040503050406030204" pitchFamily="18" charset="0"/>
                       </a:rPr>
                       <m:t>𝑠𝑡𝑜𝑐ℎ𝑎𝑠𝑡𝑖𝑐</m:t>
                     </m:r>
                     <m:r>
-                      <a:rPr lang="fr-BE" b="0" i="1" smtClean="0">
+                      <a:rPr lang="fr-BE" sz="2400" b="0" i="1" smtClean="0">
                         <a:latin typeface="Cambria Math" panose="02040503050406030204" pitchFamily="18" charset="0"/>
+                        <a:ea typeface="Cambria Math" panose="02040503050406030204" pitchFamily="18" charset="0"/>
                       </a:rPr>
                       <m:t> </m:t>
                     </m:r>
                     <m:r>
-                      <a:rPr lang="fr-BE" b="0" i="1" smtClean="0">
+                      <a:rPr lang="fr-BE" sz="2400" b="0" i="1" smtClean="0">
                         <a:latin typeface="Cambria Math" panose="02040503050406030204" pitchFamily="18" charset="0"/>
+                        <a:ea typeface="Cambria Math" panose="02040503050406030204" pitchFamily="18" charset="0"/>
                       </a:rPr>
                       <m:t>𝑐𝑜𝑚𝑝𝑜𝑛𝑒𝑛𝑡</m:t>
                     </m:r>
+                    <m:r>
+                      <a:rPr lang="fr-BE" sz="2400" b="0" i="1" smtClean="0">
+                        <a:latin typeface="Cambria Math" panose="02040503050406030204" pitchFamily="18" charset="0"/>
+                        <a:ea typeface="Cambria Math" panose="02040503050406030204" pitchFamily="18" charset="0"/>
+                      </a:rPr>
+                      <m:t>)      </m:t>
+                    </m:r>
                   </m:oMath>
                 </a14:m>
-                <a:endParaRPr lang="en-US" dirty="0"/>
+                <a:endParaRPr lang="en-US" sz="2400" dirty="0"/>
+              </a:p>
+              <a:p>
+                <a:pPr lvl="2"/>
+                <a:r>
+                  <a:rPr lang="en-US" sz="2000" dirty="0"/>
+                  <a:t>Additive case: </a:t>
+                </a:r>
+                <a14:m>
+                  <m:oMath xmlns:m="http://schemas.openxmlformats.org/officeDocument/2006/math">
+                    <m:sSub>
+                      <m:sSubPr>
+                        <m:ctrlPr>
+                          <a:rPr lang="fr-BE" sz="1800" i="1">
+                            <a:latin typeface="Cambria Math" panose="02040503050406030204" pitchFamily="18" charset="0"/>
+                          </a:rPr>
+                        </m:ctrlPr>
+                      </m:sSubPr>
+                      <m:e>
+                        <m:r>
+                          <a:rPr lang="fr-BE" sz="1800" i="1">
+                            <a:latin typeface="Cambria Math" panose="02040503050406030204" pitchFamily="18" charset="0"/>
+                          </a:rPr>
+                          <m:t>𝑦</m:t>
+                        </m:r>
+                      </m:e>
+                      <m:sub>
+                        <m:r>
+                          <a:rPr lang="fr-BE" sz="1800" i="1">
+                            <a:latin typeface="Cambria Math" panose="02040503050406030204" pitchFamily="18" charset="0"/>
+                          </a:rPr>
+                          <m:t>𝑐</m:t>
+                        </m:r>
+                      </m:sub>
+                    </m:sSub>
+                    <m:r>
+                      <a:rPr lang="fr-BE" sz="1800" i="1">
+                        <a:latin typeface="Cambria Math" panose="02040503050406030204" pitchFamily="18" charset="0"/>
+                      </a:rPr>
+                      <m:t>≡</m:t>
+                    </m:r>
+                    <m:r>
+                      <a:rPr lang="fr-BE" sz="1800" i="1">
+                        <a:latin typeface="Cambria Math" panose="02040503050406030204" pitchFamily="18" charset="0"/>
+                      </a:rPr>
+                      <m:t>𝑦</m:t>
+                    </m:r>
+                    <m:r>
+                      <a:rPr lang="fr-BE" sz="1800" i="1">
+                        <a:latin typeface="Cambria Math" panose="02040503050406030204" pitchFamily="18" charset="0"/>
+                      </a:rPr>
+                      <m:t>−</m:t>
+                    </m:r>
+                    <m:acc>
+                      <m:accPr>
+                        <m:chr m:val="̅"/>
+                        <m:ctrlPr>
+                          <a:rPr lang="fr-BE" sz="1800" i="1">
+                            <a:latin typeface="Cambria Math" panose="02040503050406030204" pitchFamily="18" charset="0"/>
+                          </a:rPr>
+                        </m:ctrlPr>
+                      </m:accPr>
+                      <m:e>
+                        <m:r>
+                          <a:rPr lang="fr-BE" sz="1800" i="1">
+                            <a:latin typeface="Cambria Math" panose="02040503050406030204" pitchFamily="18" charset="0"/>
+                          </a:rPr>
+                          <m:t>𝑋</m:t>
+                        </m:r>
+                      </m:e>
+                    </m:acc>
+                    <m:acc>
+                      <m:accPr>
+                        <m:chr m:val="̅"/>
+                        <m:ctrlPr>
+                          <a:rPr lang="en-US" sz="1800" i="1">
+                            <a:latin typeface="Cambria Math" panose="02040503050406030204" pitchFamily="18" charset="0"/>
+                            <a:ea typeface="Cambria Math" panose="02040503050406030204" pitchFamily="18" charset="0"/>
+                          </a:rPr>
+                        </m:ctrlPr>
+                      </m:accPr>
+                      <m:e>
+                        <m:r>
+                          <a:rPr lang="en-US" sz="1800" i="1">
+                            <a:latin typeface="Cambria Math" panose="02040503050406030204" pitchFamily="18" charset="0"/>
+                            <a:ea typeface="Cambria Math" panose="02040503050406030204" pitchFamily="18" charset="0"/>
+                          </a:rPr>
+                          <m:t>𝛽</m:t>
+                        </m:r>
+                      </m:e>
+                    </m:acc>
+                  </m:oMath>
+                </a14:m>
+                <a:endParaRPr lang="en-US" sz="2000" dirty="0"/>
+              </a:p>
+              <a:p>
+                <a:pPr lvl="2"/>
+                <a:r>
+                  <a:rPr lang="en-US" sz="2000" dirty="0"/>
+                  <a:t>Multiplicative case: </a:t>
+                </a:r>
+                <a14:m>
+                  <m:oMath xmlns:m="http://schemas.openxmlformats.org/officeDocument/2006/math">
+                    <m:sSub>
+                      <m:sSubPr>
+                        <m:ctrlPr>
+                          <a:rPr lang="fr-BE" sz="1800" i="1">
+                            <a:latin typeface="Cambria Math" panose="02040503050406030204" pitchFamily="18" charset="0"/>
+                          </a:rPr>
+                        </m:ctrlPr>
+                      </m:sSubPr>
+                      <m:e>
+                        <m:r>
+                          <a:rPr lang="fr-BE" sz="1800" i="1">
+                            <a:latin typeface="Cambria Math" panose="02040503050406030204" pitchFamily="18" charset="0"/>
+                          </a:rPr>
+                          <m:t>𝑦</m:t>
+                        </m:r>
+                      </m:e>
+                      <m:sub>
+                        <m:r>
+                          <a:rPr lang="fr-BE" sz="1800" i="1">
+                            <a:latin typeface="Cambria Math" panose="02040503050406030204" pitchFamily="18" charset="0"/>
+                          </a:rPr>
+                          <m:t>𝑐</m:t>
+                        </m:r>
+                      </m:sub>
+                    </m:sSub>
+                    <m:r>
+                      <a:rPr lang="fr-BE" sz="1800" i="1">
+                        <a:latin typeface="Cambria Math" panose="02040503050406030204" pitchFamily="18" charset="0"/>
+                      </a:rPr>
+                      <m:t>≡</m:t>
+                    </m:r>
+                    <m:func>
+                      <m:funcPr>
+                        <m:ctrlPr>
+                          <a:rPr lang="fr-BE" sz="1800">
+                            <a:latin typeface="Cambria Math" panose="02040503050406030204" pitchFamily="18" charset="0"/>
+                          </a:rPr>
+                        </m:ctrlPr>
+                      </m:funcPr>
+                      <m:fName>
+                        <m:r>
+                          <m:rPr>
+                            <m:sty m:val="p"/>
+                          </m:rPr>
+                          <a:rPr lang="fr-BE" sz="1800">
+                            <a:latin typeface="Cambria Math" panose="02040503050406030204" pitchFamily="18" charset="0"/>
+                          </a:rPr>
+                          <m:t>ln</m:t>
+                        </m:r>
+                      </m:fName>
+                      <m:e>
+                        <m:d>
+                          <m:dPr>
+                            <m:ctrlPr>
+                              <a:rPr lang="fr-BE" sz="1800" i="1">
+                                <a:latin typeface="Cambria Math" panose="02040503050406030204" pitchFamily="18" charset="0"/>
+                              </a:rPr>
+                            </m:ctrlPr>
+                          </m:dPr>
+                          <m:e>
+                            <m:r>
+                              <a:rPr lang="fr-BE" sz="1800" i="1">
+                                <a:latin typeface="Cambria Math" panose="02040503050406030204" pitchFamily="18" charset="0"/>
+                              </a:rPr>
+                              <m:t>𝑦</m:t>
+                            </m:r>
+                          </m:e>
+                        </m:d>
+                      </m:e>
+                    </m:func>
+                    <m:r>
+                      <a:rPr lang="fr-BE" sz="1800" i="1">
+                        <a:latin typeface="Cambria Math" panose="02040503050406030204" pitchFamily="18" charset="0"/>
+                      </a:rPr>
+                      <m:t>−</m:t>
+                    </m:r>
+                    <m:acc>
+                      <m:accPr>
+                        <m:chr m:val="̅"/>
+                        <m:ctrlPr>
+                          <a:rPr lang="fr-BE" sz="1800" i="1">
+                            <a:latin typeface="Cambria Math" panose="02040503050406030204" pitchFamily="18" charset="0"/>
+                          </a:rPr>
+                        </m:ctrlPr>
+                      </m:accPr>
+                      <m:e>
+                        <m:r>
+                          <a:rPr lang="fr-BE" sz="1800" i="1">
+                            <a:latin typeface="Cambria Math" panose="02040503050406030204" pitchFamily="18" charset="0"/>
+                          </a:rPr>
+                          <m:t>𝑋</m:t>
+                        </m:r>
+                      </m:e>
+                    </m:acc>
+                    <m:acc>
+                      <m:accPr>
+                        <m:chr m:val="̅"/>
+                        <m:ctrlPr>
+                          <a:rPr lang="en-US" sz="1800" i="1">
+                            <a:latin typeface="Cambria Math" panose="02040503050406030204" pitchFamily="18" charset="0"/>
+                            <a:ea typeface="Cambria Math" panose="02040503050406030204" pitchFamily="18" charset="0"/>
+                          </a:rPr>
+                        </m:ctrlPr>
+                      </m:accPr>
+                      <m:e>
+                        <m:r>
+                          <a:rPr lang="en-US" sz="1800" i="1">
+                            <a:latin typeface="Cambria Math" panose="02040503050406030204" pitchFamily="18" charset="0"/>
+                            <a:ea typeface="Cambria Math" panose="02040503050406030204" pitchFamily="18" charset="0"/>
+                          </a:rPr>
+                          <m:t>𝛽</m:t>
+                        </m:r>
+                      </m:e>
+                    </m:acc>
+                    <m:r>
+                      <a:rPr lang="fr-BE" sz="1800" i="1">
+                        <a:latin typeface="Cambria Math" panose="02040503050406030204" pitchFamily="18" charset="0"/>
+                        <a:ea typeface="Cambria Math" panose="02040503050406030204" pitchFamily="18" charset="0"/>
+                      </a:rPr>
+                      <m:t>−</m:t>
+                    </m:r>
+                    <m:r>
+                      <m:rPr>
+                        <m:sty m:val="p"/>
+                      </m:rPr>
+                      <a:rPr lang="fr-BE" sz="1800">
+                        <a:latin typeface="Cambria Math" panose="02040503050406030204" pitchFamily="18" charset="0"/>
+                        <a:ea typeface="Cambria Math" panose="02040503050406030204" pitchFamily="18" charset="0"/>
+                      </a:rPr>
+                      <m:t>ln</m:t>
+                    </m:r>
+                    <m:r>
+                      <a:rPr lang="fr-BE" sz="1800" i="1">
+                        <a:latin typeface="Cambria Math" panose="02040503050406030204" pitchFamily="18" charset="0"/>
+                        <a:ea typeface="Cambria Math" panose="02040503050406030204" pitchFamily="18" charset="0"/>
+                      </a:rPr>
+                      <m:t>⁡(</m:t>
+                    </m:r>
+                    <m:r>
+                      <a:rPr lang="fr-BE" sz="1800" i="1">
+                        <a:latin typeface="Cambria Math" panose="02040503050406030204" pitchFamily="18" charset="0"/>
+                        <a:ea typeface="Cambria Math" panose="02040503050406030204" pitchFamily="18" charset="0"/>
+                      </a:rPr>
+                      <m:t>𝑙𝑝</m:t>
+                    </m:r>
+                    <m:r>
+                      <a:rPr lang="fr-BE" sz="1800" i="1">
+                        <a:latin typeface="Cambria Math" panose="02040503050406030204" pitchFamily="18" charset="0"/>
+                        <a:ea typeface="Cambria Math" panose="02040503050406030204" pitchFamily="18" charset="0"/>
+                      </a:rPr>
+                      <m:t>)</m:t>
+                    </m:r>
+                  </m:oMath>
+                </a14:m>
+                <a:endParaRPr lang="en-US" sz="2000" dirty="0"/>
+              </a:p>
+              <a:p>
+                <a:pPr lvl="1"/>
+                <a:r>
+                  <a:rPr lang="en-US" sz="2800" dirty="0"/>
+                  <a:t>Linearized series: </a:t>
+                </a:r>
+                <a14:m>
+                  <m:oMath xmlns:m="http://schemas.openxmlformats.org/officeDocument/2006/math">
+                    <m:sSub>
+                      <m:sSubPr>
+                        <m:ctrlPr>
+                          <a:rPr lang="fr-BE" sz="2800" i="1">
+                            <a:latin typeface="Cambria Math" panose="02040503050406030204" pitchFamily="18" charset="0"/>
+                          </a:rPr>
+                        </m:ctrlPr>
+                      </m:sSubPr>
+                      <m:e>
+                        <m:r>
+                          <a:rPr lang="fr-BE" sz="2800" i="1">
+                            <a:latin typeface="Cambria Math" panose="02040503050406030204" pitchFamily="18" charset="0"/>
+                          </a:rPr>
+                          <m:t>𝑦</m:t>
+                        </m:r>
+                      </m:e>
+                      <m:sub>
+                        <m:r>
+                          <a:rPr lang="fr-BE" sz="2800" i="1">
+                            <a:latin typeface="Cambria Math" panose="02040503050406030204" pitchFamily="18" charset="0"/>
+                          </a:rPr>
+                          <m:t>𝑙𝑖𝑛</m:t>
+                        </m:r>
+                      </m:sub>
+                    </m:sSub>
+                    <m:r>
+                      <a:rPr lang="fr-BE" sz="2800" i="1">
+                        <a:latin typeface="Cambria Math" panose="02040503050406030204" pitchFamily="18" charset="0"/>
+                      </a:rPr>
+                      <m:t>=</m:t>
+                    </m:r>
+                    <m:sSub>
+                      <m:sSubPr>
+                        <m:ctrlPr>
+                          <a:rPr lang="en-US" sz="2800" i="1">
+                            <a:latin typeface="Cambria Math"/>
+                          </a:rPr>
+                        </m:ctrlPr>
+                      </m:sSubPr>
+                      <m:e>
+                        <m:r>
+                          <a:rPr lang="en-US" sz="2800" i="1">
+                            <a:latin typeface="Cambria Math"/>
+                          </a:rPr>
+                          <m:t>𝑦</m:t>
+                        </m:r>
+                      </m:e>
+                      <m:sub>
+                        <m:r>
+                          <a:rPr lang="en-US" sz="2800" i="1">
+                            <a:latin typeface="Cambria Math"/>
+                          </a:rPr>
+                          <m:t>𝑐</m:t>
+                        </m:r>
+                      </m:sub>
+                    </m:sSub>
+                    <m:r>
+                      <a:rPr lang="fr-BE" sz="2800" i="1">
+                        <a:latin typeface="Cambria Math" panose="02040503050406030204" pitchFamily="18" charset="0"/>
+                      </a:rPr>
+                      <m:t>−</m:t>
+                    </m:r>
+                    <m:r>
+                      <a:rPr lang="fr-BE" sz="2800" i="1">
+                        <a:latin typeface="Cambria Math" panose="02040503050406030204" pitchFamily="18" charset="0"/>
+                      </a:rPr>
+                      <m:t>𝑋</m:t>
+                    </m:r>
+                    <m:r>
+                      <a:rPr lang="fr-BE" sz="2800" i="1">
+                        <a:latin typeface="Cambria Math" panose="02040503050406030204" pitchFamily="18" charset="0"/>
+                        <a:ea typeface="Cambria Math" panose="02040503050406030204" pitchFamily="18" charset="0"/>
+                      </a:rPr>
+                      <m:t>𝛽</m:t>
+                    </m:r>
+                  </m:oMath>
+                </a14:m>
+                <a:endParaRPr lang="en-US" sz="2800" dirty="0"/>
+              </a:p>
+              <a:p>
+                <a:pPr lvl="2"/>
+                <a:endParaRPr lang="en-US" sz="1800" dirty="0"/>
+              </a:p>
+              <a:p>
+                <a:pPr lvl="1"/>
+                <a:endParaRPr lang="en-US" sz="2000" dirty="0"/>
+              </a:p>
+              <a:p>
+                <a:endParaRPr lang="en-GB" dirty="0"/>
               </a:p>
             </p:txBody>
           </p:sp>
         </mc:Choice>
-        <mc:Fallback xmlns="">
+        <mc:Fallback>
           <p:sp>
             <p:nvSpPr>
-              <p:cNvPr id="3" name="Content Placeholder 2"/>
+              <p:cNvPr id="4" name="Espace réservé du contenu 3">
+                <a:extLst>
+                  <a:ext uri="{FF2B5EF4-FFF2-40B4-BE49-F238E27FC236}">
+                    <a16:creationId xmlns:a16="http://schemas.microsoft.com/office/drawing/2014/main" id="{341D43BD-D4E0-C71E-1D18-7A04FF8D8FAB}"/>
+                  </a:ext>
+                </a:extLst>
+              </p:cNvPr>
               <p:cNvSpPr>
                 <a:spLocks noGrp="1" noRot="1" noChangeAspect="1" noMove="1" noResize="1" noEditPoints="1" noAdjustHandles="1" noChangeArrowheads="1" noChangeShapeType="1" noTextEdit="1"/>
               </p:cNvSpPr>
@@ -7522,7 +7154,7 @@
               <a:blipFill>
                 <a:blip r:embed="rId2"/>
                 <a:stretch>
-                  <a:fillRect l="-754" t="-2979"/>
+                  <a:fillRect l="-754" t="-2720"/>
                 </a:stretch>
               </a:blipFill>
             </p:spPr>
@@ -7541,37 +7173,10 @@
           </p:sp>
         </mc:Fallback>
       </mc:AlternateContent>
-      <p:sp>
-        <p:nvSpPr>
-          <p:cNvPr id="5" name="Footer Placeholder 4"/>
-          <p:cNvSpPr>
-            <a:spLocks noGrp="1"/>
-          </p:cNvSpPr>
-          <p:nvPr>
-            <p:ph type="ftr" sz="quarter" idx="4294967295"/>
-          </p:nvPr>
-        </p:nvSpPr>
-        <p:spPr>
-          <a:xfrm>
-            <a:off x="0" y="0"/>
-            <a:ext cx="0" cy="0"/>
-          </a:xfrm>
-        </p:spPr>
-        <p:txBody>
-          <a:bodyPr/>
-          <a:lstStyle/>
-          <a:p>
-            <a:r>
-              <a:rPr lang="en-US"/>
-              <a:t>Decomposition model</a:t>
-            </a:r>
-          </a:p>
-        </p:txBody>
-      </p:sp>
     </p:spTree>
     <p:extLst>
       <p:ext uri="{BB962C8B-B14F-4D97-AF65-F5344CB8AC3E}">
-        <p14:creationId xmlns:p14="http://schemas.microsoft.com/office/powerpoint/2010/main" val="3887769678"/>
+        <p14:creationId xmlns:p14="http://schemas.microsoft.com/office/powerpoint/2010/main" val="1653649746"/>
       </p:ext>
     </p:extLst>
   </p:cSld>
@@ -7586,7 +7191,13 @@
   <p:cSld>
     <p:spTree>
       <p:nvGrpSpPr>
-        <p:cNvPr id="1" name=""/>
+        <p:cNvPr id="1" name="">
+          <a:extLst>
+            <a:ext uri="{FF2B5EF4-FFF2-40B4-BE49-F238E27FC236}">
+              <a16:creationId xmlns:a16="http://schemas.microsoft.com/office/drawing/2014/main" id="{17D9ACFA-A85E-C05F-7567-72CFB803305A}"/>
+            </a:ext>
+          </a:extLst>
+        </p:cNvPr>
         <p:cNvGrpSpPr/>
         <p:nvPr/>
       </p:nvGrpSpPr>
@@ -7600,7 +7211,13 @@
       </p:grpSpPr>
       <p:sp>
         <p:nvSpPr>
-          <p:cNvPr id="2" name="Title 1"/>
+          <p:cNvPr id="2" name="Titre 1">
+            <a:extLst>
+              <a:ext uri="{FF2B5EF4-FFF2-40B4-BE49-F238E27FC236}">
+                <a16:creationId xmlns:a16="http://schemas.microsoft.com/office/drawing/2014/main" id="{FC9CE5CC-4DA6-A9DA-507B-A27933E33E79}"/>
+              </a:ext>
+            </a:extLst>
+          </p:cNvPr>
           <p:cNvSpPr>
             <a:spLocks noGrp="1"/>
           </p:cNvSpPr>
@@ -7610,33 +7227,22 @@
         </p:nvSpPr>
         <p:spPr/>
         <p:txBody>
-          <a:bodyPr>
-            <a:normAutofit/>
-          </a:bodyPr>
+          <a:bodyPr/>
           <a:lstStyle/>
           <a:p>
             <a:r>
-              <a:rPr lang="fr-BE" dirty="0"/>
-              <a:t>Handling of the </a:t>
+              <a:rPr lang="en-GB" dirty="0"/>
+              <a:t>1 Two-steps models</a:t>
             </a:r>
-            <a:r>
-              <a:rPr lang="fr-BE" dirty="0" err="1"/>
-              <a:t>regression</a:t>
-            </a:r>
-            <a:r>
-              <a:rPr lang="fr-BE" dirty="0"/>
-              <a:t> variables</a:t>
-            </a:r>
-            <a:endParaRPr lang="en-US" dirty="0"/>
           </a:p>
         </p:txBody>
       </p:sp>
       <p:sp>
         <p:nvSpPr>
-          <p:cNvPr id="5" name="Espace réservé du numéro de diapositive 4">
+          <p:cNvPr id="3" name="Espace réservé du numéro de diapositive 2">
             <a:extLst>
               <a:ext uri="{FF2B5EF4-FFF2-40B4-BE49-F238E27FC236}">
-                <a16:creationId xmlns:a16="http://schemas.microsoft.com/office/drawing/2014/main" id="{47EC902F-173B-84FB-0061-ED5D71A0FDA1}"/>
+                <a16:creationId xmlns:a16="http://schemas.microsoft.com/office/drawing/2014/main" id="{BD3D49AE-C51B-9B76-4C34-1F36F0989E71}"/>
               </a:ext>
             </a:extLst>
           </p:cNvPr>
@@ -7661,1782 +7267,915 @@
           </a:p>
         </p:txBody>
       </p:sp>
-      <p:graphicFrame>
-        <p:nvGraphicFramePr>
-          <p:cNvPr id="4" name="Content Placeholder 3"/>
-          <p:cNvGraphicFramePr>
-            <a:graphicFrameLocks noGrp="1"/>
-          </p:cNvGraphicFramePr>
-          <p:nvPr>
-            <p:ph sz="half" idx="2"/>
-            <p:extLst>
-              <p:ext uri="{D42A27DB-BD31-4B8C-83A1-F6EECF244321}">
-                <p14:modId xmlns:p14="http://schemas.microsoft.com/office/powerpoint/2010/main" val="3636678214"/>
-              </p:ext>
-            </p:extLst>
-          </p:nvPr>
-        </p:nvGraphicFramePr>
-        <p:xfrm>
-          <a:off x="969963" y="1389063"/>
-          <a:ext cx="10515598" cy="5009009"/>
-        </p:xfrm>
-        <a:graphic>
-          <a:graphicData uri="http://schemas.openxmlformats.org/drawingml/2006/table">
-            <a:tbl>
-              <a:tblPr firstRow="1" bandRow="1">
-                <a:tableStyleId>{5C22544A-7EE6-4342-B048-85BDC9FD1C3A}</a:tableStyleId>
-              </a:tblPr>
-              <a:tblGrid>
-                <a:gridCol w="1503915">
-                  <a:extLst>
-                    <a:ext uri="{9D8B030D-6E8A-4147-A177-3AD203B41FA5}">
-                      <a16:colId xmlns:a16="http://schemas.microsoft.com/office/drawing/2014/main" val="20000"/>
-                    </a:ext>
-                  </a:extLst>
-                </a:gridCol>
-                <a:gridCol w="6431106">
-                  <a:extLst>
-                    <a:ext uri="{9D8B030D-6E8A-4147-A177-3AD203B41FA5}">
-                      <a16:colId xmlns:a16="http://schemas.microsoft.com/office/drawing/2014/main" val="20001"/>
-                    </a:ext>
-                  </a:extLst>
-                </a:gridCol>
-                <a:gridCol w="662883">
-                  <a:extLst>
-                    <a:ext uri="{9D8B030D-6E8A-4147-A177-3AD203B41FA5}">
-                      <a16:colId xmlns:a16="http://schemas.microsoft.com/office/drawing/2014/main" val="20003"/>
-                    </a:ext>
-                  </a:extLst>
-                </a:gridCol>
-                <a:gridCol w="599901">
-                  <a:extLst>
-                    <a:ext uri="{9D8B030D-6E8A-4147-A177-3AD203B41FA5}">
-                      <a16:colId xmlns:a16="http://schemas.microsoft.com/office/drawing/2014/main" val="20004"/>
-                    </a:ext>
-                  </a:extLst>
-                </a:gridCol>
-                <a:gridCol w="601565">
-                  <a:extLst>
-                    <a:ext uri="{9D8B030D-6E8A-4147-A177-3AD203B41FA5}">
-                      <a16:colId xmlns:a16="http://schemas.microsoft.com/office/drawing/2014/main" val="20005"/>
-                    </a:ext>
-                  </a:extLst>
-                </a:gridCol>
-                <a:gridCol w="716228">
-                  <a:extLst>
-                    <a:ext uri="{9D8B030D-6E8A-4147-A177-3AD203B41FA5}">
-                      <a16:colId xmlns:a16="http://schemas.microsoft.com/office/drawing/2014/main" val="20006"/>
-                    </a:ext>
-                  </a:extLst>
-                </a:gridCol>
-              </a:tblGrid>
-              <a:tr h="255912">
-                <a:tc>
-                  <a:txBody>
-                    <a:bodyPr/>
-                    <a:lstStyle/>
-                    <a:p>
-                      <a:r>
-                        <a:rPr lang="fr-BE" sz="1400" dirty="0"/>
-                        <a:t>Code</a:t>
-                      </a:r>
-                      <a:endParaRPr lang="en-US" sz="1400" dirty="0"/>
-                    </a:p>
-                  </a:txBody>
-                  <a:tcPr/>
-                </a:tc>
-                <a:tc>
-                  <a:txBody>
-                    <a:bodyPr/>
-                    <a:lstStyle/>
-                    <a:p>
-                      <a:r>
-                        <a:rPr lang="fr-BE" sz="1400" dirty="0"/>
-                        <a:t>Description</a:t>
-                      </a:r>
-                      <a:endParaRPr lang="en-US" sz="1400" dirty="0"/>
-                    </a:p>
-                  </a:txBody>
-                  <a:tcPr/>
-                </a:tc>
-                <a:tc>
-                  <a:txBody>
-                    <a:bodyPr/>
-                    <a:lstStyle/>
-                    <a:p>
-                      <a:pPr algn="ctr"/>
-                      <a:r>
-                        <a:rPr lang="fr-BE" sz="1400" dirty="0"/>
-                        <a:t>T</a:t>
-                      </a:r>
-                      <a:endParaRPr lang="en-US" sz="1400" dirty="0"/>
-                    </a:p>
-                  </a:txBody>
-                  <a:tcPr/>
-                </a:tc>
-                <a:tc>
-                  <a:txBody>
-                    <a:bodyPr/>
-                    <a:lstStyle/>
-                    <a:p>
-                      <a:pPr algn="ctr"/>
-                      <a:r>
-                        <a:rPr lang="fr-BE" sz="1400" dirty="0"/>
-                        <a:t>S</a:t>
-                      </a:r>
-                      <a:endParaRPr lang="en-US" sz="1400" dirty="0"/>
-                    </a:p>
-                  </a:txBody>
-                  <a:tcPr/>
-                </a:tc>
-                <a:tc>
-                  <a:txBody>
-                    <a:bodyPr/>
-                    <a:lstStyle/>
-                    <a:p>
-                      <a:pPr algn="ctr"/>
-                      <a:r>
-                        <a:rPr lang="fr-BE" sz="1400" dirty="0"/>
-                        <a:t>I</a:t>
-                      </a:r>
-                      <a:endParaRPr lang="en-US" sz="1400" dirty="0"/>
-                    </a:p>
-                  </a:txBody>
-                  <a:tcPr/>
-                </a:tc>
-                <a:tc>
-                  <a:txBody>
-                    <a:bodyPr/>
-                    <a:lstStyle/>
-                    <a:p>
-                      <a:pPr algn="ctr"/>
-                      <a:r>
-                        <a:rPr lang="fr-BE" sz="1400" dirty="0"/>
-                        <a:t>SA</a:t>
-                      </a:r>
-                      <a:endParaRPr lang="en-US" sz="1400" dirty="0"/>
-                    </a:p>
-                  </a:txBody>
-                  <a:tcPr/>
-                </a:tc>
+      <mc:AlternateContent xmlns:mc="http://schemas.openxmlformats.org/markup-compatibility/2006">
+        <mc:Choice xmlns:a14="http://schemas.microsoft.com/office/drawing/2010/main" Requires="a14">
+          <p:sp>
+            <p:nvSpPr>
+              <p:cNvPr id="4" name="Espace réservé du contenu 3">
                 <a:extLst>
-                  <a:ext uri="{0D108BD9-81ED-4DB2-BD59-A6C34878D82A}">
-                    <a16:rowId xmlns:a16="http://schemas.microsoft.com/office/drawing/2014/main" val="10000"/>
+                  <a:ext uri="{FF2B5EF4-FFF2-40B4-BE49-F238E27FC236}">
+                    <a16:creationId xmlns:a16="http://schemas.microsoft.com/office/drawing/2014/main" id="{E9D06A12-2B4B-ADB9-C45C-6DB3B319508F}"/>
                   </a:ext>
                 </a:extLst>
-              </a:tr>
-              <a:tr h="255912">
-                <a:tc>
-                  <a:txBody>
-                    <a:bodyPr/>
-                    <a:lstStyle/>
-                    <a:p>
-                      <a:r>
-                        <a:rPr lang="fr-BE" sz="1400" dirty="0" err="1"/>
-                        <a:t>tde</a:t>
-                      </a:r>
-                      <a:endParaRPr lang="en-US" sz="1400" dirty="0"/>
-                    </a:p>
-                  </a:txBody>
-                  <a:tcPr/>
-                </a:tc>
-                <a:tc>
-                  <a:txBody>
-                    <a:bodyPr/>
-                    <a:lstStyle/>
-                    <a:p>
-                      <a:r>
-                        <a:rPr lang="fr-BE" sz="1400" dirty="0"/>
-                        <a:t>Trading </a:t>
-                      </a:r>
-                      <a:r>
-                        <a:rPr lang="fr-BE" sz="1400" dirty="0" err="1"/>
-                        <a:t>days</a:t>
-                      </a:r>
-                      <a:r>
-                        <a:rPr lang="fr-BE" sz="1400" dirty="0"/>
-                        <a:t>  (default,</a:t>
-                      </a:r>
-                      <a:r>
-                        <a:rPr lang="fr-BE" sz="1400" baseline="0" dirty="0"/>
-                        <a:t> </a:t>
-                      </a:r>
-                      <a:r>
-                        <a:rPr lang="fr-BE" sz="1400" baseline="0" dirty="0" err="1"/>
-                        <a:t>holidays</a:t>
-                      </a:r>
-                      <a:r>
-                        <a:rPr lang="fr-BE" sz="1400" baseline="0" dirty="0"/>
-                        <a:t>, user-</a:t>
-                      </a:r>
-                      <a:r>
-                        <a:rPr lang="fr-BE" sz="1400" baseline="0" dirty="0" err="1"/>
-                        <a:t>defined</a:t>
-                      </a:r>
-                      <a:r>
-                        <a:rPr lang="fr-BE" sz="1400" baseline="0" dirty="0"/>
-                        <a:t>)</a:t>
-                      </a:r>
-                      <a:endParaRPr lang="en-US" sz="1400" dirty="0"/>
-                    </a:p>
-                  </a:txBody>
-                  <a:tcPr/>
-                </a:tc>
-                <a:tc>
-                  <a:txBody>
-                    <a:bodyPr/>
-                    <a:lstStyle/>
-                    <a:p>
-                      <a:pPr algn="ctr"/>
-                      <a:endParaRPr lang="en-US" sz="1400"/>
-                    </a:p>
-                  </a:txBody>
-                  <a:tcPr/>
-                </a:tc>
-                <a:tc>
-                  <a:txBody>
-                    <a:bodyPr/>
-                    <a:lstStyle/>
-                    <a:p>
-                      <a:pPr algn="ctr"/>
-                      <a:r>
-                        <a:rPr lang="fr-BE" sz="1400" dirty="0"/>
-                        <a:t>x</a:t>
-                      </a:r>
-                      <a:endParaRPr lang="en-US" sz="1400" dirty="0"/>
-                    </a:p>
-                  </a:txBody>
-                  <a:tcPr/>
-                </a:tc>
-                <a:tc>
-                  <a:txBody>
-                    <a:bodyPr/>
-                    <a:lstStyle/>
-                    <a:p>
-                      <a:pPr algn="ctr"/>
-                      <a:endParaRPr lang="en-US" sz="1400"/>
-                    </a:p>
-                  </a:txBody>
-                  <a:tcPr/>
-                </a:tc>
-                <a:tc>
-                  <a:txBody>
-                    <a:bodyPr/>
-                    <a:lstStyle/>
-                    <a:p>
-                      <a:pPr algn="ctr"/>
-                      <a:endParaRPr lang="en-US" sz="1400" dirty="0"/>
-                    </a:p>
-                  </a:txBody>
-                  <a:tcPr/>
-                </a:tc>
+              </p:cNvPr>
+              <p:cNvSpPr>
+                <a:spLocks noGrp="1"/>
+              </p:cNvSpPr>
+              <p:nvPr>
+                <p:ph sz="half" idx="2"/>
+              </p:nvPr>
+            </p:nvSpPr>
+            <p:spPr>
+              <a:xfrm>
+                <a:off x="1035424" y="1388854"/>
+                <a:ext cx="10450895" cy="4707273"/>
+              </a:xfrm>
+            </p:spPr>
+            <p:txBody>
+              <a:bodyPr/>
+              <a:lstStyle/>
+              <a:p>
+                <a:r>
+                  <a:rPr lang="en-GB" sz="3200" dirty="0"/>
+                  <a:t>2 Decomposition: </a:t>
+                </a:r>
+              </a:p>
+              <a:p>
+                <a:pPr lvl="1"/>
+                <a:r>
+                  <a:rPr lang="en-US" sz="2400" dirty="0"/>
+                  <a:t>Additive case: </a:t>
+                </a:r>
+                <a14:m>
+                  <m:oMath xmlns:m="http://schemas.openxmlformats.org/officeDocument/2006/math">
+                    <m:sSub>
+                      <m:sSubPr>
+                        <m:ctrlPr>
+                          <a:rPr lang="fr-BE" sz="2400" i="1">
+                            <a:latin typeface="Cambria Math" panose="02040503050406030204" pitchFamily="18" charset="0"/>
+                          </a:rPr>
+                        </m:ctrlPr>
+                      </m:sSubPr>
+                      <m:e>
+                        <m:r>
+                          <a:rPr lang="fr-BE" sz="2400" i="1">
+                            <a:latin typeface="Cambria Math" panose="02040503050406030204" pitchFamily="18" charset="0"/>
+                          </a:rPr>
+                          <m:t>𝑦</m:t>
+                        </m:r>
+                      </m:e>
+                      <m:sub>
+                        <m:r>
+                          <a:rPr lang="fr-BE" sz="2400" b="0" i="1" smtClean="0">
+                            <a:latin typeface="Cambria Math" panose="02040503050406030204" pitchFamily="18" charset="0"/>
+                          </a:rPr>
+                          <m:t>𝑙𝑖𝑛</m:t>
+                        </m:r>
+                      </m:sub>
+                    </m:sSub>
+                    <m:r>
+                      <a:rPr lang="fr-BE" sz="2400" i="1">
+                        <a:latin typeface="Cambria Math" panose="02040503050406030204" pitchFamily="18" charset="0"/>
+                      </a:rPr>
+                      <m:t>= </m:t>
+                    </m:r>
+                    <m:sSub>
+                      <m:sSubPr>
+                        <m:ctrlPr>
+                          <a:rPr lang="fr-BE" sz="2400" i="1">
+                            <a:latin typeface="Cambria Math" panose="02040503050406030204" pitchFamily="18" charset="0"/>
+                          </a:rPr>
+                        </m:ctrlPr>
+                      </m:sSubPr>
+                      <m:e>
+                        <m:r>
+                          <a:rPr lang="fr-BE" sz="2400" i="1">
+                            <a:latin typeface="Cambria Math" panose="02040503050406030204" pitchFamily="18" charset="0"/>
+                          </a:rPr>
+                          <m:t>𝑇</m:t>
+                        </m:r>
+                      </m:e>
+                      <m:sub>
+                        <m:r>
+                          <a:rPr lang="fr-BE" sz="2400" b="0" i="1" smtClean="0">
+                            <a:latin typeface="Cambria Math" panose="02040503050406030204" pitchFamily="18" charset="0"/>
+                          </a:rPr>
+                          <m:t>𝑙𝑖𝑛</m:t>
+                        </m:r>
+                      </m:sub>
+                    </m:sSub>
+                    <m:r>
+                      <a:rPr lang="fr-BE" sz="2400" i="1">
+                        <a:latin typeface="Cambria Math" panose="02040503050406030204" pitchFamily="18" charset="0"/>
+                      </a:rPr>
+                      <m:t>+</m:t>
+                    </m:r>
+                    <m:sSub>
+                      <m:sSubPr>
+                        <m:ctrlPr>
+                          <a:rPr lang="fr-BE" sz="2400" i="1">
+                            <a:latin typeface="Cambria Math" panose="02040503050406030204" pitchFamily="18" charset="0"/>
+                          </a:rPr>
+                        </m:ctrlPr>
+                      </m:sSubPr>
+                      <m:e>
+                        <m:r>
+                          <a:rPr lang="fr-BE" sz="2400" i="1">
+                            <a:latin typeface="Cambria Math" panose="02040503050406030204" pitchFamily="18" charset="0"/>
+                          </a:rPr>
+                          <m:t>𝑆</m:t>
+                        </m:r>
+                      </m:e>
+                      <m:sub>
+                        <m:r>
+                          <a:rPr lang="fr-BE" sz="2400" b="0" i="1" smtClean="0">
+                            <a:latin typeface="Cambria Math" panose="02040503050406030204" pitchFamily="18" charset="0"/>
+                          </a:rPr>
+                          <m:t>𝑙𝑖𝑛</m:t>
+                        </m:r>
+                      </m:sub>
+                    </m:sSub>
+                    <m:r>
+                      <a:rPr lang="fr-BE" sz="2400" i="1">
+                        <a:latin typeface="Cambria Math" panose="02040503050406030204" pitchFamily="18" charset="0"/>
+                      </a:rPr>
+                      <m:t>+</m:t>
+                    </m:r>
+                    <m:sSub>
+                      <m:sSubPr>
+                        <m:ctrlPr>
+                          <a:rPr lang="fr-BE" sz="2400" i="1">
+                            <a:latin typeface="Cambria Math" panose="02040503050406030204" pitchFamily="18" charset="0"/>
+                          </a:rPr>
+                        </m:ctrlPr>
+                      </m:sSubPr>
+                      <m:e>
+                        <m:r>
+                          <a:rPr lang="fr-BE" sz="2400" i="1">
+                            <a:latin typeface="Cambria Math" panose="02040503050406030204" pitchFamily="18" charset="0"/>
+                          </a:rPr>
+                          <m:t>𝐼</m:t>
+                        </m:r>
+                      </m:e>
+                      <m:sub>
+                        <m:r>
+                          <a:rPr lang="fr-BE" sz="2400" b="0" i="1" smtClean="0">
+                            <a:latin typeface="Cambria Math" panose="02040503050406030204" pitchFamily="18" charset="0"/>
+                          </a:rPr>
+                          <m:t>𝑙𝑖𝑛</m:t>
+                        </m:r>
+                      </m:sub>
+                    </m:sSub>
+                  </m:oMath>
+                </a14:m>
+                <a:endParaRPr lang="en-US" sz="2400" dirty="0"/>
+              </a:p>
+              <a:p>
+                <a:pPr lvl="1"/>
+                <a:r>
+                  <a:rPr lang="en-US" sz="2000" dirty="0"/>
+                  <a:t>Multiplicative case:</a:t>
+                </a:r>
+                <a:endParaRPr lang="fr-BE" sz="2800" b="0" i="0" dirty="0">
+                  <a:latin typeface="Cambria Math" panose="02040503050406030204" pitchFamily="18" charset="0"/>
+                </a:endParaRPr>
+              </a:p>
+              <a:p>
+                <a:pPr lvl="3"/>
+                <a14:m>
+                  <m:oMath xmlns:m="http://schemas.openxmlformats.org/officeDocument/2006/math">
+                    <m:r>
+                      <m:rPr>
+                        <m:sty m:val="p"/>
+                      </m:rPr>
+                      <a:rPr lang="fr-BE" sz="2400" b="0" i="0" smtClean="0">
+                        <a:latin typeface="Cambria Math" panose="02040503050406030204" pitchFamily="18" charset="0"/>
+                      </a:rPr>
+                      <m:t>exp</m:t>
+                    </m:r>
+                    <m:r>
+                      <a:rPr lang="fr-BE" sz="2400" b="0" i="0" smtClean="0">
+                        <a:latin typeface="Cambria Math" panose="02040503050406030204" pitchFamily="18" charset="0"/>
+                      </a:rPr>
+                      <m:t>(</m:t>
+                    </m:r>
+                    <m:sSub>
+                      <m:sSubPr>
+                        <m:ctrlPr>
+                          <a:rPr lang="fr-BE" sz="2400" i="1">
+                            <a:latin typeface="Cambria Math" panose="02040503050406030204" pitchFamily="18" charset="0"/>
+                          </a:rPr>
+                        </m:ctrlPr>
+                      </m:sSubPr>
+                      <m:e>
+                        <m:r>
+                          <a:rPr lang="fr-BE" sz="2400" i="1">
+                            <a:latin typeface="Cambria Math" panose="02040503050406030204" pitchFamily="18" charset="0"/>
+                          </a:rPr>
+                          <m:t>𝑦</m:t>
+                        </m:r>
+                      </m:e>
+                      <m:sub>
+                        <m:r>
+                          <a:rPr lang="fr-BE" sz="2400" b="0" i="1" smtClean="0">
+                            <a:latin typeface="Cambria Math" panose="02040503050406030204" pitchFamily="18" charset="0"/>
+                          </a:rPr>
+                          <m:t>𝑙𝑖𝑛</m:t>
+                        </m:r>
+                      </m:sub>
+                    </m:sSub>
+                    <m:r>
+                      <a:rPr lang="fr-BE" sz="2400" b="0" i="1" smtClean="0">
+                        <a:latin typeface="Cambria Math" panose="02040503050406030204" pitchFamily="18" charset="0"/>
+                      </a:rPr>
+                      <m:t>)</m:t>
+                    </m:r>
+                    <m:r>
+                      <a:rPr lang="fr-BE" sz="2400" i="1">
+                        <a:latin typeface="Cambria Math" panose="02040503050406030204" pitchFamily="18" charset="0"/>
+                      </a:rPr>
+                      <m:t>= </m:t>
+                    </m:r>
+                    <m:sSub>
+                      <m:sSubPr>
+                        <m:ctrlPr>
+                          <a:rPr lang="fr-BE" sz="2400" i="1">
+                            <a:latin typeface="Cambria Math" panose="02040503050406030204" pitchFamily="18" charset="0"/>
+                          </a:rPr>
+                        </m:ctrlPr>
+                      </m:sSubPr>
+                      <m:e>
+                        <m:r>
+                          <a:rPr lang="fr-BE" sz="2400" i="1">
+                            <a:latin typeface="Cambria Math" panose="02040503050406030204" pitchFamily="18" charset="0"/>
+                          </a:rPr>
+                          <m:t>𝑇</m:t>
+                        </m:r>
+                      </m:e>
+                      <m:sub>
+                        <m:r>
+                          <a:rPr lang="fr-BE" sz="2400" b="0" i="1" smtClean="0">
+                            <a:latin typeface="Cambria Math" panose="02040503050406030204" pitchFamily="18" charset="0"/>
+                          </a:rPr>
+                          <m:t>𝑐𝑚𝑝</m:t>
+                        </m:r>
+                      </m:sub>
+                    </m:sSub>
+                    <m:r>
+                      <a:rPr lang="fr-BE" sz="2400" i="1" smtClean="0">
+                        <a:latin typeface="Cambria Math" panose="02040503050406030204" pitchFamily="18" charset="0"/>
+                        <a:ea typeface="Cambria Math" panose="02040503050406030204" pitchFamily="18" charset="0"/>
+                      </a:rPr>
+                      <m:t>×</m:t>
+                    </m:r>
+                    <m:sSub>
+                      <m:sSubPr>
+                        <m:ctrlPr>
+                          <a:rPr lang="fr-BE" sz="2400" i="1">
+                            <a:latin typeface="Cambria Math" panose="02040503050406030204" pitchFamily="18" charset="0"/>
+                          </a:rPr>
+                        </m:ctrlPr>
+                      </m:sSubPr>
+                      <m:e>
+                        <m:r>
+                          <a:rPr lang="fr-BE" sz="2400" i="1">
+                            <a:latin typeface="Cambria Math" panose="02040503050406030204" pitchFamily="18" charset="0"/>
+                          </a:rPr>
+                          <m:t>𝑆</m:t>
+                        </m:r>
+                      </m:e>
+                      <m:sub>
+                        <m:r>
+                          <a:rPr lang="fr-BE" sz="2400" b="0" i="1" smtClean="0">
+                            <a:latin typeface="Cambria Math" panose="02040503050406030204" pitchFamily="18" charset="0"/>
+                          </a:rPr>
+                          <m:t>𝑐𝑚𝑝</m:t>
+                        </m:r>
+                      </m:sub>
+                    </m:sSub>
+                    <m:r>
+                      <a:rPr lang="fr-BE" sz="2400" i="1" smtClean="0">
+                        <a:latin typeface="Cambria Math" panose="02040503050406030204" pitchFamily="18" charset="0"/>
+                        <a:ea typeface="Cambria Math" panose="02040503050406030204" pitchFamily="18" charset="0"/>
+                      </a:rPr>
+                      <m:t>×</m:t>
+                    </m:r>
+                    <m:sSub>
+                      <m:sSubPr>
+                        <m:ctrlPr>
+                          <a:rPr lang="fr-BE" sz="2400" i="1">
+                            <a:latin typeface="Cambria Math" panose="02040503050406030204" pitchFamily="18" charset="0"/>
+                          </a:rPr>
+                        </m:ctrlPr>
+                      </m:sSubPr>
+                      <m:e>
+                        <m:r>
+                          <a:rPr lang="fr-BE" sz="2400" i="1">
+                            <a:latin typeface="Cambria Math" panose="02040503050406030204" pitchFamily="18" charset="0"/>
+                          </a:rPr>
+                          <m:t>𝐼</m:t>
+                        </m:r>
+                      </m:e>
+                      <m:sub>
+                        <m:r>
+                          <a:rPr lang="fr-BE" sz="2400" b="0" i="1" smtClean="0">
+                            <a:latin typeface="Cambria Math" panose="02040503050406030204" pitchFamily="18" charset="0"/>
+                          </a:rPr>
+                          <m:t>𝑐𝑚𝑝</m:t>
+                        </m:r>
+                      </m:sub>
+                    </m:sSub>
+                  </m:oMath>
+                </a14:m>
+                <a:r>
+                  <a:rPr lang="en-US" sz="2400" dirty="0"/>
+                  <a:t> </a:t>
+                </a:r>
+                <a:r>
+                  <a:rPr lang="en-US" sz="1600" dirty="0">
+                    <a:solidFill>
+                      <a:schemeClr val="bg2">
+                        <a:lumMod val="60000"/>
+                        <a:lumOff val="40000"/>
+                      </a:schemeClr>
+                    </a:solidFill>
+                  </a:rPr>
+                  <a:t>(X11)</a:t>
+                </a:r>
+              </a:p>
+              <a:p>
+                <a:pPr lvl="3"/>
+                <a14:m>
+                  <m:oMath xmlns:m="http://schemas.openxmlformats.org/officeDocument/2006/math">
+                    <m:r>
+                      <m:rPr>
+                        <m:sty m:val="p"/>
+                      </m:rPr>
+                      <a:rPr lang="fr-BE" sz="2400">
+                        <a:latin typeface="Cambria Math" panose="02040503050406030204" pitchFamily="18" charset="0"/>
+                      </a:rPr>
+                      <m:t>exp</m:t>
+                    </m:r>
+                    <m:r>
+                      <a:rPr lang="fr-BE" sz="2400">
+                        <a:latin typeface="Cambria Math" panose="02040503050406030204" pitchFamily="18" charset="0"/>
+                      </a:rPr>
+                      <m:t>(</m:t>
+                    </m:r>
+                    <m:sSub>
+                      <m:sSubPr>
+                        <m:ctrlPr>
+                          <a:rPr lang="fr-BE" sz="2400" i="1">
+                            <a:latin typeface="Cambria Math" panose="02040503050406030204" pitchFamily="18" charset="0"/>
+                          </a:rPr>
+                        </m:ctrlPr>
+                      </m:sSubPr>
+                      <m:e>
+                        <m:r>
+                          <a:rPr lang="fr-BE" sz="2400" i="1">
+                            <a:latin typeface="Cambria Math" panose="02040503050406030204" pitchFamily="18" charset="0"/>
+                          </a:rPr>
+                          <m:t>𝑦</m:t>
+                        </m:r>
+                      </m:e>
+                      <m:sub>
+                        <m:r>
+                          <a:rPr lang="fr-BE" sz="2400" b="0" i="1" smtClean="0">
+                            <a:latin typeface="Cambria Math" panose="02040503050406030204" pitchFamily="18" charset="0"/>
+                          </a:rPr>
+                          <m:t>𝑙𝑖𝑛</m:t>
+                        </m:r>
+                      </m:sub>
+                    </m:sSub>
+                    <m:r>
+                      <a:rPr lang="fr-BE" sz="2400" i="1">
+                        <a:latin typeface="Cambria Math" panose="02040503050406030204" pitchFamily="18" charset="0"/>
+                      </a:rPr>
+                      <m:t>)=</m:t>
+                    </m:r>
+                    <m:r>
+                      <m:rPr>
+                        <m:sty m:val="p"/>
+                      </m:rPr>
+                      <a:rPr lang="fr-BE" sz="2400" b="0" i="0" smtClean="0">
+                        <a:latin typeface="Cambria Math" panose="02040503050406030204" pitchFamily="18" charset="0"/>
+                      </a:rPr>
+                      <m:t>exp</m:t>
+                    </m:r>
+                    <m:r>
+                      <a:rPr lang="fr-BE" sz="2400" b="0" i="1" smtClean="0">
+                        <a:latin typeface="Cambria Math" panose="02040503050406030204" pitchFamily="18" charset="0"/>
+                      </a:rPr>
+                      <m:t>⁡(</m:t>
+                    </m:r>
+                    <m:sSub>
+                      <m:sSubPr>
+                        <m:ctrlPr>
+                          <a:rPr lang="fr-BE" sz="2400" i="1">
+                            <a:latin typeface="Cambria Math" panose="02040503050406030204" pitchFamily="18" charset="0"/>
+                          </a:rPr>
+                        </m:ctrlPr>
+                      </m:sSubPr>
+                      <m:e>
+                        <m:r>
+                          <a:rPr lang="fr-BE" sz="2400" i="1">
+                            <a:latin typeface="Cambria Math" panose="02040503050406030204" pitchFamily="18" charset="0"/>
+                          </a:rPr>
+                          <m:t>𝑇</m:t>
+                        </m:r>
+                      </m:e>
+                      <m:sub>
+                        <m:r>
+                          <a:rPr lang="fr-BE" sz="2400" b="0" i="1" smtClean="0">
+                            <a:latin typeface="Cambria Math" panose="02040503050406030204" pitchFamily="18" charset="0"/>
+                          </a:rPr>
+                          <m:t>𝑙𝑖𝑛</m:t>
+                        </m:r>
+                        <m:r>
+                          <a:rPr lang="fr-BE" sz="2400" b="0" i="1" smtClean="0">
+                            <a:latin typeface="Cambria Math" panose="02040503050406030204" pitchFamily="18" charset="0"/>
+                          </a:rPr>
+                          <m:t>)</m:t>
+                        </m:r>
+                      </m:sub>
+                    </m:sSub>
+                    <m:r>
+                      <a:rPr lang="fr-BE" sz="2400" i="1">
+                        <a:latin typeface="Cambria Math" panose="02040503050406030204" pitchFamily="18" charset="0"/>
+                        <a:ea typeface="Cambria Math" panose="02040503050406030204" pitchFamily="18" charset="0"/>
+                      </a:rPr>
+                      <m:t>×</m:t>
+                    </m:r>
+                    <m:sSub>
+                      <m:sSubPr>
+                        <m:ctrlPr>
+                          <a:rPr lang="fr-BE" sz="2400" b="0" i="0" smtClean="0">
+                            <a:latin typeface="Cambria Math" panose="02040503050406030204" pitchFamily="18" charset="0"/>
+                          </a:rPr>
+                        </m:ctrlPr>
+                      </m:sSubPr>
+                      <m:e>
+                        <m:r>
+                          <m:rPr>
+                            <m:sty m:val="p"/>
+                          </m:rPr>
+                          <a:rPr lang="fr-BE" sz="2400" b="0" i="0" smtClean="0">
+                            <a:latin typeface="Cambria Math" panose="02040503050406030204" pitchFamily="18" charset="0"/>
+                          </a:rPr>
+                          <m:t>exp</m:t>
+                        </m:r>
+                        <m:r>
+                          <a:rPr lang="fr-BE" sz="2400" b="0" i="1" smtClean="0">
+                            <a:latin typeface="Cambria Math" panose="02040503050406030204" pitchFamily="18" charset="0"/>
+                          </a:rPr>
+                          <m:t>⁡(</m:t>
+                        </m:r>
+                        <m:r>
+                          <a:rPr lang="fr-BE" sz="2400" i="1">
+                            <a:latin typeface="Cambria Math" panose="02040503050406030204" pitchFamily="18" charset="0"/>
+                          </a:rPr>
+                          <m:t>𝑆</m:t>
+                        </m:r>
+                      </m:e>
+                      <m:sub>
+                        <m:r>
+                          <a:rPr lang="fr-BE" sz="2400" b="0" i="1" smtClean="0">
+                            <a:latin typeface="Cambria Math" panose="02040503050406030204" pitchFamily="18" charset="0"/>
+                          </a:rPr>
+                          <m:t>𝑙𝑖𝑛</m:t>
+                        </m:r>
+                      </m:sub>
+                    </m:sSub>
+                    <m:r>
+                      <a:rPr lang="fr-BE" sz="2400" b="0" i="1" smtClean="0">
+                        <a:latin typeface="Cambria Math" panose="02040503050406030204" pitchFamily="18" charset="0"/>
+                      </a:rPr>
+                      <m:t>)</m:t>
+                    </m:r>
+                    <m:r>
+                      <a:rPr lang="fr-BE" sz="2400" i="1">
+                        <a:latin typeface="Cambria Math" panose="02040503050406030204" pitchFamily="18" charset="0"/>
+                        <a:ea typeface="Cambria Math" panose="02040503050406030204" pitchFamily="18" charset="0"/>
+                      </a:rPr>
+                      <m:t>×</m:t>
+                    </m:r>
+                    <m:sSub>
+                      <m:sSubPr>
+                        <m:ctrlPr>
+                          <a:rPr lang="fr-BE" sz="2400" b="0" i="0" smtClean="0">
+                            <a:latin typeface="Cambria Math" panose="02040503050406030204" pitchFamily="18" charset="0"/>
+                          </a:rPr>
+                        </m:ctrlPr>
+                      </m:sSubPr>
+                      <m:e>
+                        <m:r>
+                          <m:rPr>
+                            <m:sty m:val="p"/>
+                          </m:rPr>
+                          <a:rPr lang="fr-BE" sz="2400" b="0" i="0" smtClean="0">
+                            <a:latin typeface="Cambria Math" panose="02040503050406030204" pitchFamily="18" charset="0"/>
+                          </a:rPr>
+                          <m:t>exp</m:t>
+                        </m:r>
+                        <m:r>
+                          <a:rPr lang="fr-BE" sz="2400" b="0" i="1" smtClean="0">
+                            <a:latin typeface="Cambria Math" panose="02040503050406030204" pitchFamily="18" charset="0"/>
+                          </a:rPr>
+                          <m:t>⁡(</m:t>
+                        </m:r>
+                        <m:r>
+                          <a:rPr lang="fr-BE" sz="2400" i="1">
+                            <a:latin typeface="Cambria Math" panose="02040503050406030204" pitchFamily="18" charset="0"/>
+                          </a:rPr>
+                          <m:t>𝐼</m:t>
+                        </m:r>
+                      </m:e>
+                      <m:sub>
+                        <m:r>
+                          <a:rPr lang="fr-BE" sz="2400" b="0" i="1" smtClean="0">
+                            <a:latin typeface="Cambria Math" panose="02040503050406030204" pitchFamily="18" charset="0"/>
+                          </a:rPr>
+                          <m:t>𝑙𝑖𝑛</m:t>
+                        </m:r>
+                      </m:sub>
+                    </m:sSub>
+                    <m:r>
+                      <a:rPr lang="fr-BE" sz="2400" b="0" i="1" smtClean="0">
+                        <a:latin typeface="Cambria Math" panose="02040503050406030204" pitchFamily="18" charset="0"/>
+                      </a:rPr>
+                      <m:t>)</m:t>
+                    </m:r>
+                    <m:r>
+                      <a:rPr lang="fr-BE" sz="2400" b="0" i="1" smtClean="0">
+                        <a:latin typeface="Cambria Math" panose="02040503050406030204" pitchFamily="18" charset="0"/>
+                        <a:ea typeface="Cambria Math" panose="02040503050406030204" pitchFamily="18" charset="0"/>
+                      </a:rPr>
+                      <m:t>×(</m:t>
+                    </m:r>
+                    <m:r>
+                      <a:rPr lang="fr-BE" sz="2400" b="0" i="1" smtClean="0">
+                        <a:latin typeface="Cambria Math" panose="02040503050406030204" pitchFamily="18" charset="0"/>
+                        <a:ea typeface="Cambria Math" panose="02040503050406030204" pitchFamily="18" charset="0"/>
+                      </a:rPr>
+                      <m:t>𝑏𝑖𝑎𝑠</m:t>
+                    </m:r>
+                    <m:r>
+                      <a:rPr lang="fr-BE" sz="2400" b="0" i="1" smtClean="0">
+                        <a:latin typeface="Cambria Math" panose="02040503050406030204" pitchFamily="18" charset="0"/>
+                        <a:ea typeface="Cambria Math" panose="02040503050406030204" pitchFamily="18" charset="0"/>
+                      </a:rPr>
+                      <m:t> </m:t>
+                    </m:r>
+                    <m:r>
+                      <a:rPr lang="fr-BE" sz="2400" b="0" i="1" smtClean="0">
+                        <a:latin typeface="Cambria Math" panose="02040503050406030204" pitchFamily="18" charset="0"/>
+                        <a:ea typeface="Cambria Math" panose="02040503050406030204" pitchFamily="18" charset="0"/>
+                      </a:rPr>
+                      <m:t>𝑐𝑜𝑟𝑟</m:t>
+                    </m:r>
+                    <m:r>
+                      <a:rPr lang="fr-BE" sz="2400" b="0" i="1" smtClean="0">
+                        <a:latin typeface="Cambria Math" panose="02040503050406030204" pitchFamily="18" charset="0"/>
+                        <a:ea typeface="Cambria Math" panose="02040503050406030204" pitchFamily="18" charset="0"/>
+                      </a:rPr>
+                      <m:t>)=</m:t>
+                    </m:r>
+                  </m:oMath>
+                </a14:m>
+                <a:r>
+                  <a:rPr lang="fr-BE" sz="2400" dirty="0"/>
+                  <a:t> </a:t>
+                </a:r>
+                <a14:m>
+                  <m:oMath xmlns:m="http://schemas.openxmlformats.org/officeDocument/2006/math">
+                    <m:sSub>
+                      <m:sSubPr>
+                        <m:ctrlPr>
+                          <a:rPr lang="fr-BE" sz="2400" i="1">
+                            <a:latin typeface="Cambria Math" panose="02040503050406030204" pitchFamily="18" charset="0"/>
+                          </a:rPr>
+                        </m:ctrlPr>
+                      </m:sSubPr>
+                      <m:e>
+                        <m:r>
+                          <a:rPr lang="fr-BE" sz="2400" i="1">
+                            <a:latin typeface="Cambria Math" panose="02040503050406030204" pitchFamily="18" charset="0"/>
+                          </a:rPr>
+                          <m:t>𝑇</m:t>
+                        </m:r>
+                      </m:e>
+                      <m:sub>
+                        <m:r>
+                          <a:rPr lang="fr-BE" sz="2400" i="1">
+                            <a:latin typeface="Cambria Math" panose="02040503050406030204" pitchFamily="18" charset="0"/>
+                          </a:rPr>
+                          <m:t>𝑐𝑚𝑝</m:t>
+                        </m:r>
+                      </m:sub>
+                    </m:sSub>
+                    <m:r>
+                      <a:rPr lang="fr-BE" sz="2400" i="1">
+                        <a:latin typeface="Cambria Math" panose="02040503050406030204" pitchFamily="18" charset="0"/>
+                        <a:ea typeface="Cambria Math" panose="02040503050406030204" pitchFamily="18" charset="0"/>
+                      </a:rPr>
+                      <m:t>×</m:t>
+                    </m:r>
+                    <m:sSub>
+                      <m:sSubPr>
+                        <m:ctrlPr>
+                          <a:rPr lang="fr-BE" sz="2400" i="1">
+                            <a:latin typeface="Cambria Math" panose="02040503050406030204" pitchFamily="18" charset="0"/>
+                          </a:rPr>
+                        </m:ctrlPr>
+                      </m:sSubPr>
+                      <m:e>
+                        <m:r>
+                          <a:rPr lang="fr-BE" sz="2400" i="1">
+                            <a:latin typeface="Cambria Math" panose="02040503050406030204" pitchFamily="18" charset="0"/>
+                          </a:rPr>
+                          <m:t>𝑆</m:t>
+                        </m:r>
+                      </m:e>
+                      <m:sub>
+                        <m:r>
+                          <a:rPr lang="fr-BE" sz="2400" i="1">
+                            <a:latin typeface="Cambria Math" panose="02040503050406030204" pitchFamily="18" charset="0"/>
+                          </a:rPr>
+                          <m:t>𝑐𝑚𝑝</m:t>
+                        </m:r>
+                      </m:sub>
+                    </m:sSub>
+                    <m:r>
+                      <a:rPr lang="fr-BE" sz="2400" i="1">
+                        <a:latin typeface="Cambria Math" panose="02040503050406030204" pitchFamily="18" charset="0"/>
+                        <a:ea typeface="Cambria Math" panose="02040503050406030204" pitchFamily="18" charset="0"/>
+                      </a:rPr>
+                      <m:t>×</m:t>
+                    </m:r>
+                    <m:sSub>
+                      <m:sSubPr>
+                        <m:ctrlPr>
+                          <a:rPr lang="fr-BE" sz="2400" i="1">
+                            <a:latin typeface="Cambria Math" panose="02040503050406030204" pitchFamily="18" charset="0"/>
+                          </a:rPr>
+                        </m:ctrlPr>
+                      </m:sSubPr>
+                      <m:e>
+                        <m:r>
+                          <a:rPr lang="fr-BE" sz="2400" i="1">
+                            <a:latin typeface="Cambria Math" panose="02040503050406030204" pitchFamily="18" charset="0"/>
+                          </a:rPr>
+                          <m:t>𝐼</m:t>
+                        </m:r>
+                      </m:e>
+                      <m:sub>
+                        <m:r>
+                          <a:rPr lang="fr-BE" sz="2400" i="1">
+                            <a:latin typeface="Cambria Math" panose="02040503050406030204" pitchFamily="18" charset="0"/>
+                          </a:rPr>
+                          <m:t>𝑐𝑚𝑝</m:t>
+                        </m:r>
+                      </m:sub>
+                    </m:sSub>
+                  </m:oMath>
+                </a14:m>
+                <a:r>
+                  <a:rPr lang="en-US" sz="1100" dirty="0"/>
+                  <a:t> </a:t>
+                </a:r>
+                <a:r>
+                  <a:rPr lang="en-US" sz="1600" dirty="0">
+                    <a:solidFill>
+                      <a:schemeClr val="bg2">
+                        <a:lumMod val="60000"/>
+                        <a:lumOff val="40000"/>
+                      </a:schemeClr>
+                    </a:solidFill>
+                  </a:rPr>
+                  <a:t>(SEATS…)</a:t>
+                </a:r>
+              </a:p>
+              <a:p>
+                <a:pPr lvl="2"/>
+                <a:endParaRPr lang="en-US" sz="2400" dirty="0"/>
+              </a:p>
+              <a:p>
+                <a:pPr lvl="2"/>
+                <a:endParaRPr lang="en-US" sz="2400" dirty="0"/>
+              </a:p>
+              <a:p>
+                <a:r>
+                  <a:rPr lang="en-US" sz="2400" dirty="0">
+                    <a:solidFill>
+                      <a:schemeClr val="bg2">
+                        <a:lumMod val="60000"/>
+                        <a:lumOff val="40000"/>
+                      </a:schemeClr>
+                    </a:solidFill>
+                  </a:rPr>
+                  <a:t>Note on bias correction: annual average of </a:t>
+                </a:r>
+                <a14:m>
+                  <m:oMath xmlns:m="http://schemas.openxmlformats.org/officeDocument/2006/math">
+                    <m:sSub>
+                      <m:sSubPr>
+                        <m:ctrlPr>
+                          <a:rPr lang="fr-BE" sz="2400" i="1">
+                            <a:solidFill>
+                              <a:schemeClr val="bg2">
+                                <a:lumMod val="60000"/>
+                                <a:lumOff val="40000"/>
+                              </a:schemeClr>
+                            </a:solidFill>
+                            <a:latin typeface="Cambria Math" panose="02040503050406030204" pitchFamily="18" charset="0"/>
+                          </a:rPr>
+                        </m:ctrlPr>
+                      </m:sSubPr>
+                      <m:e>
+                        <m:r>
+                          <a:rPr lang="fr-BE" sz="2400" i="1">
+                            <a:solidFill>
+                              <a:schemeClr val="bg2">
+                                <a:lumMod val="60000"/>
+                                <a:lumOff val="40000"/>
+                              </a:schemeClr>
+                            </a:solidFill>
+                            <a:latin typeface="Cambria Math" panose="02040503050406030204" pitchFamily="18" charset="0"/>
+                          </a:rPr>
+                          <m:t>𝑆</m:t>
+                        </m:r>
+                      </m:e>
+                      <m:sub>
+                        <m:r>
+                          <a:rPr lang="fr-BE" sz="2400" i="1">
+                            <a:solidFill>
+                              <a:schemeClr val="bg2">
+                                <a:lumMod val="60000"/>
+                                <a:lumOff val="40000"/>
+                              </a:schemeClr>
+                            </a:solidFill>
+                            <a:latin typeface="Cambria Math" panose="02040503050406030204" pitchFamily="18" charset="0"/>
+                          </a:rPr>
+                          <m:t>𝑐𝑚𝑝</m:t>
+                        </m:r>
+                      </m:sub>
+                    </m:sSub>
+                    <m:r>
+                      <a:rPr lang="fr-BE" sz="2400" b="0" i="1" smtClean="0">
+                        <a:solidFill>
+                          <a:schemeClr val="bg2">
+                            <a:lumMod val="60000"/>
+                            <a:lumOff val="40000"/>
+                          </a:schemeClr>
+                        </a:solidFill>
+                        <a:latin typeface="Cambria Math" panose="02040503050406030204" pitchFamily="18" charset="0"/>
+                      </a:rPr>
+                      <m:t>,</m:t>
+                    </m:r>
+                    <m:sSub>
+                      <m:sSubPr>
+                        <m:ctrlPr>
+                          <a:rPr lang="fr-BE" sz="2400" b="0" i="1" smtClean="0">
+                            <a:solidFill>
+                              <a:schemeClr val="bg2">
+                                <a:lumMod val="60000"/>
+                                <a:lumOff val="40000"/>
+                              </a:schemeClr>
+                            </a:solidFill>
+                            <a:latin typeface="Cambria Math" panose="02040503050406030204" pitchFamily="18" charset="0"/>
+                          </a:rPr>
+                        </m:ctrlPr>
+                      </m:sSubPr>
+                      <m:e>
+                        <m:r>
+                          <a:rPr lang="fr-BE" sz="2400" b="0" i="1" smtClean="0">
+                            <a:solidFill>
+                              <a:schemeClr val="bg2">
+                                <a:lumMod val="60000"/>
+                                <a:lumOff val="40000"/>
+                              </a:schemeClr>
+                            </a:solidFill>
+                            <a:latin typeface="Cambria Math" panose="02040503050406030204" pitchFamily="18" charset="0"/>
+                          </a:rPr>
+                          <m:t>𝐼</m:t>
+                        </m:r>
+                      </m:e>
+                      <m:sub>
+                        <m:r>
+                          <a:rPr lang="fr-BE" sz="2400" i="1">
+                            <a:solidFill>
+                              <a:schemeClr val="bg2">
+                                <a:lumMod val="60000"/>
+                                <a:lumOff val="40000"/>
+                              </a:schemeClr>
+                            </a:solidFill>
+                            <a:latin typeface="Cambria Math" panose="02040503050406030204" pitchFamily="18" charset="0"/>
+                          </a:rPr>
+                          <m:t>𝑐𝑚𝑝</m:t>
+                        </m:r>
+                      </m:sub>
+                    </m:sSub>
+                    <m:r>
+                      <a:rPr lang="fr-BE" sz="2400" b="0" i="1" smtClean="0">
+                        <a:solidFill>
+                          <a:schemeClr val="bg2">
+                            <a:lumMod val="60000"/>
+                            <a:lumOff val="40000"/>
+                          </a:schemeClr>
+                        </a:solidFill>
+                        <a:latin typeface="Cambria Math" panose="02040503050406030204" pitchFamily="18" charset="0"/>
+                      </a:rPr>
+                      <m:t>=1</m:t>
+                    </m:r>
+                  </m:oMath>
+                </a14:m>
+                <a:r>
+                  <a:rPr lang="en-US" sz="2400" dirty="0">
+                    <a:solidFill>
+                      <a:schemeClr val="bg2">
+                        <a:lumMod val="60000"/>
+                        <a:lumOff val="40000"/>
+                      </a:schemeClr>
+                    </a:solidFill>
+                  </a:rPr>
+                  <a:t>(see later)</a:t>
+                </a:r>
+              </a:p>
+              <a:p>
+                <a:endParaRPr lang="en-US" sz="1600" dirty="0">
+                  <a:solidFill>
+                    <a:schemeClr val="bg2">
+                      <a:lumMod val="60000"/>
+                      <a:lumOff val="40000"/>
+                    </a:schemeClr>
+                  </a:solidFill>
+                </a:endParaRPr>
+              </a:p>
+              <a:p>
+                <a:pPr lvl="3"/>
+                <a:endParaRPr lang="en-US" sz="2000" dirty="0"/>
+              </a:p>
+              <a:p>
+                <a:endParaRPr lang="en-US" sz="1600" dirty="0"/>
+              </a:p>
+              <a:p>
+                <a:pPr lvl="3"/>
+                <a:endParaRPr lang="en-GB" dirty="0"/>
+              </a:p>
+              <a:p>
+                <a:endParaRPr lang="en-GB" dirty="0"/>
+              </a:p>
+            </p:txBody>
+          </p:sp>
+        </mc:Choice>
+        <mc:Fallback>
+          <p:sp>
+            <p:nvSpPr>
+              <p:cNvPr id="4" name="Espace réservé du contenu 3">
                 <a:extLst>
-                  <a:ext uri="{0D108BD9-81ED-4DB2-BD59-A6C34878D82A}">
-                    <a16:rowId xmlns:a16="http://schemas.microsoft.com/office/drawing/2014/main" val="10001"/>
+                  <a:ext uri="{FF2B5EF4-FFF2-40B4-BE49-F238E27FC236}">
+                    <a16:creationId xmlns:a16="http://schemas.microsoft.com/office/drawing/2014/main" id="{E9D06A12-2B4B-ADB9-C45C-6DB3B319508F}"/>
                   </a:ext>
                 </a:extLst>
-              </a:tr>
-              <a:tr h="255912">
-                <a:tc>
-                  <a:txBody>
-                    <a:bodyPr/>
-                    <a:lstStyle/>
-                    <a:p>
-                      <a:r>
-                        <a:rPr lang="fr-BE" sz="1400" dirty="0" err="1"/>
-                        <a:t>ee</a:t>
-                      </a:r>
-                      <a:endParaRPr lang="en-US" sz="1400" dirty="0"/>
-                    </a:p>
-                  </a:txBody>
-                  <a:tcPr/>
-                </a:tc>
-                <a:tc>
-                  <a:txBody>
-                    <a:bodyPr/>
-                    <a:lstStyle/>
-                    <a:p>
-                      <a:r>
-                        <a:rPr lang="fr-BE" sz="1400" dirty="0" err="1"/>
-                        <a:t>Easter</a:t>
-                      </a:r>
-                      <a:endParaRPr lang="en-US" sz="1400" dirty="0"/>
-                    </a:p>
-                  </a:txBody>
-                  <a:tcPr/>
-                </a:tc>
-                <a:tc>
-                  <a:txBody>
-                    <a:bodyPr/>
-                    <a:lstStyle/>
-                    <a:p>
-                      <a:pPr algn="ctr"/>
-                      <a:endParaRPr lang="en-US" sz="1400" dirty="0"/>
-                    </a:p>
-                  </a:txBody>
-                  <a:tcPr/>
-                </a:tc>
-                <a:tc>
-                  <a:txBody>
-                    <a:bodyPr/>
-                    <a:lstStyle/>
-                    <a:p>
-                      <a:pPr algn="ctr"/>
-                      <a:r>
-                        <a:rPr lang="fr-BE" sz="1400" dirty="0"/>
-                        <a:t>x</a:t>
-                      </a:r>
-                      <a:endParaRPr lang="en-US" sz="1400" dirty="0"/>
-                    </a:p>
-                  </a:txBody>
-                  <a:tcPr/>
-                </a:tc>
-                <a:tc>
-                  <a:txBody>
-                    <a:bodyPr/>
-                    <a:lstStyle/>
-                    <a:p>
-                      <a:pPr algn="ctr"/>
-                      <a:endParaRPr lang="en-US" sz="1400"/>
-                    </a:p>
-                  </a:txBody>
-                  <a:tcPr/>
-                </a:tc>
-                <a:tc>
-                  <a:txBody>
-                    <a:bodyPr/>
-                    <a:lstStyle/>
-                    <a:p>
-                      <a:pPr algn="ctr"/>
-                      <a:endParaRPr lang="en-US" sz="1400" dirty="0"/>
-                    </a:p>
-                  </a:txBody>
-                  <a:tcPr/>
-                </a:tc>
-                <a:extLst>
-                  <a:ext uri="{0D108BD9-81ED-4DB2-BD59-A6C34878D82A}">
-                    <a16:rowId xmlns:a16="http://schemas.microsoft.com/office/drawing/2014/main" val="10002"/>
-                  </a:ext>
-                </a:extLst>
-              </a:tr>
-              <a:tr h="255912">
-                <a:tc>
-                  <a:txBody>
-                    <a:bodyPr/>
-                    <a:lstStyle/>
-                    <a:p>
-                      <a:r>
-                        <a:rPr lang="fr-BE" sz="1400" dirty="0" err="1"/>
-                        <a:t>omhe</a:t>
-                      </a:r>
-                      <a:endParaRPr lang="en-US" sz="1400" dirty="0"/>
-                    </a:p>
-                  </a:txBody>
-                  <a:tcPr/>
-                </a:tc>
-                <a:tc>
-                  <a:txBody>
-                    <a:bodyPr/>
-                    <a:lstStyle/>
-                    <a:p>
-                      <a:r>
-                        <a:rPr lang="fr-BE" sz="1400" dirty="0" err="1"/>
-                        <a:t>Other</a:t>
-                      </a:r>
-                      <a:r>
-                        <a:rPr lang="fr-BE" sz="1400" dirty="0"/>
-                        <a:t> </a:t>
-                      </a:r>
-                      <a:r>
-                        <a:rPr lang="fr-BE" sz="1400" dirty="0" err="1"/>
-                        <a:t>moving</a:t>
-                      </a:r>
-                      <a:r>
-                        <a:rPr lang="fr-BE" sz="1400" dirty="0"/>
-                        <a:t> </a:t>
-                      </a:r>
-                      <a:r>
-                        <a:rPr lang="fr-BE" sz="1400" dirty="0" err="1"/>
-                        <a:t>holidays</a:t>
-                      </a:r>
-                      <a:r>
-                        <a:rPr lang="fr-BE" sz="1400" dirty="0"/>
-                        <a:t> (TODO: Ramadan…)</a:t>
-                      </a:r>
-                      <a:endParaRPr lang="en-US" sz="1400" dirty="0"/>
-                    </a:p>
-                  </a:txBody>
-                  <a:tcPr/>
-                </a:tc>
-                <a:tc>
-                  <a:txBody>
-                    <a:bodyPr/>
-                    <a:lstStyle/>
-                    <a:p>
-                      <a:pPr algn="ctr"/>
-                      <a:endParaRPr lang="en-US" sz="1400" dirty="0"/>
-                    </a:p>
-                  </a:txBody>
-                  <a:tcPr/>
-                </a:tc>
-                <a:tc>
-                  <a:txBody>
-                    <a:bodyPr/>
-                    <a:lstStyle/>
-                    <a:p>
-                      <a:pPr algn="ctr"/>
-                      <a:r>
-                        <a:rPr lang="fr-BE" sz="1400" dirty="0"/>
-                        <a:t>x</a:t>
-                      </a:r>
-                      <a:endParaRPr lang="en-US" sz="1400" dirty="0"/>
-                    </a:p>
-                  </a:txBody>
-                  <a:tcPr/>
-                </a:tc>
-                <a:tc>
-                  <a:txBody>
-                    <a:bodyPr/>
-                    <a:lstStyle/>
-                    <a:p>
-                      <a:pPr algn="ctr"/>
-                      <a:endParaRPr lang="en-US" sz="1400"/>
-                    </a:p>
-                  </a:txBody>
-                  <a:tcPr/>
-                </a:tc>
-                <a:tc>
-                  <a:txBody>
-                    <a:bodyPr/>
-                    <a:lstStyle/>
-                    <a:p>
-                      <a:pPr algn="ctr"/>
-                      <a:endParaRPr lang="en-US" sz="1400" dirty="0"/>
-                    </a:p>
-                  </a:txBody>
-                  <a:tcPr/>
-                </a:tc>
-                <a:extLst>
-                  <a:ext uri="{0D108BD9-81ED-4DB2-BD59-A6C34878D82A}">
-                    <a16:rowId xmlns:a16="http://schemas.microsoft.com/office/drawing/2014/main" val="10003"/>
-                  </a:ext>
-                </a:extLst>
-              </a:tr>
-              <a:tr h="255912">
-                <a:tc>
-                  <a:txBody>
-                    <a:bodyPr/>
-                    <a:lstStyle/>
-                    <a:p>
-                      <a:endParaRPr lang="en-US" sz="1400" dirty="0"/>
-                    </a:p>
-                  </a:txBody>
-                  <a:tcPr/>
-                </a:tc>
-                <a:tc>
-                  <a:txBody>
-                    <a:bodyPr/>
-                    <a:lstStyle/>
-                    <a:p>
-                      <a:endParaRPr lang="en-US" sz="1400"/>
-                    </a:p>
-                  </a:txBody>
-                  <a:tcPr/>
-                </a:tc>
-                <a:tc>
-                  <a:txBody>
-                    <a:bodyPr/>
-                    <a:lstStyle/>
-                    <a:p>
-                      <a:pPr algn="ctr"/>
-                      <a:endParaRPr lang="en-US" sz="1400"/>
-                    </a:p>
-                  </a:txBody>
-                  <a:tcPr/>
-                </a:tc>
-                <a:tc>
-                  <a:txBody>
-                    <a:bodyPr/>
-                    <a:lstStyle/>
-                    <a:p>
-                      <a:pPr algn="ctr"/>
-                      <a:endParaRPr lang="en-US" sz="1400"/>
-                    </a:p>
-                  </a:txBody>
-                  <a:tcPr/>
-                </a:tc>
-                <a:tc>
-                  <a:txBody>
-                    <a:bodyPr/>
-                    <a:lstStyle/>
-                    <a:p>
-                      <a:pPr algn="ctr"/>
-                      <a:endParaRPr lang="en-US" sz="1400"/>
-                    </a:p>
-                  </a:txBody>
-                  <a:tcPr/>
-                </a:tc>
-                <a:tc>
-                  <a:txBody>
-                    <a:bodyPr/>
-                    <a:lstStyle/>
-                    <a:p>
-                      <a:pPr algn="ctr"/>
-                      <a:endParaRPr lang="en-US" sz="1400"/>
-                    </a:p>
-                  </a:txBody>
-                  <a:tcPr/>
-                </a:tc>
-                <a:extLst>
-                  <a:ext uri="{0D108BD9-81ED-4DB2-BD59-A6C34878D82A}">
-                    <a16:rowId xmlns:a16="http://schemas.microsoft.com/office/drawing/2014/main" val="10004"/>
-                  </a:ext>
-                </a:extLst>
-              </a:tr>
-              <a:tr h="255912">
-                <a:tc>
-                  <a:txBody>
-                    <a:bodyPr/>
-                    <a:lstStyle/>
-                    <a:p>
-                      <a:r>
-                        <a:rPr lang="fr-BE" sz="1400" dirty="0"/>
-                        <a:t>AO</a:t>
-                      </a:r>
-                      <a:endParaRPr lang="en-US" sz="1400" dirty="0"/>
-                    </a:p>
-                  </a:txBody>
-                  <a:tcPr/>
-                </a:tc>
-                <a:tc>
-                  <a:txBody>
-                    <a:bodyPr/>
-                    <a:lstStyle/>
-                    <a:p>
-                      <a:r>
-                        <a:rPr lang="fr-BE" sz="1400" dirty="0"/>
-                        <a:t>Additive </a:t>
-                      </a:r>
-                      <a:r>
-                        <a:rPr lang="fr-BE" sz="1400" dirty="0" err="1"/>
-                        <a:t>outlier</a:t>
-                      </a:r>
-                      <a:endParaRPr lang="en-US" sz="1400" dirty="0"/>
-                    </a:p>
-                  </a:txBody>
-                  <a:tcPr/>
-                </a:tc>
-                <a:tc>
-                  <a:txBody>
-                    <a:bodyPr/>
-                    <a:lstStyle/>
-                    <a:p>
-                      <a:pPr algn="ctr"/>
-                      <a:endParaRPr lang="en-US" sz="1400" dirty="0"/>
-                    </a:p>
-                  </a:txBody>
-                  <a:tcPr/>
-                </a:tc>
-                <a:tc>
-                  <a:txBody>
-                    <a:bodyPr/>
-                    <a:lstStyle/>
-                    <a:p>
-                      <a:pPr algn="ctr"/>
-                      <a:endParaRPr lang="en-US" sz="1400" dirty="0"/>
-                    </a:p>
-                  </a:txBody>
-                  <a:tcPr/>
-                </a:tc>
-                <a:tc>
-                  <a:txBody>
-                    <a:bodyPr/>
-                    <a:lstStyle/>
-                    <a:p>
-                      <a:pPr algn="ctr"/>
-                      <a:r>
-                        <a:rPr lang="fr-BE" sz="1400" dirty="0"/>
-                        <a:t>x</a:t>
-                      </a:r>
-                      <a:endParaRPr lang="en-US" sz="1400" dirty="0"/>
-                    </a:p>
-                  </a:txBody>
-                  <a:tcPr/>
-                </a:tc>
-                <a:tc>
-                  <a:txBody>
-                    <a:bodyPr/>
-                    <a:lstStyle/>
-                    <a:p>
-                      <a:pPr algn="ctr"/>
-                      <a:r>
-                        <a:rPr lang="fr-BE" sz="1400" dirty="0"/>
-                        <a:t>x</a:t>
-                      </a:r>
-                      <a:endParaRPr lang="en-US" sz="1400" dirty="0"/>
-                    </a:p>
-                  </a:txBody>
-                  <a:tcPr/>
-                </a:tc>
-                <a:extLst>
-                  <a:ext uri="{0D108BD9-81ED-4DB2-BD59-A6C34878D82A}">
-                    <a16:rowId xmlns:a16="http://schemas.microsoft.com/office/drawing/2014/main" val="10005"/>
-                  </a:ext>
-                </a:extLst>
-              </a:tr>
-              <a:tr h="255912">
-                <a:tc>
-                  <a:txBody>
-                    <a:bodyPr/>
-                    <a:lstStyle/>
-                    <a:p>
-                      <a:r>
-                        <a:rPr lang="fr-BE" sz="1400" dirty="0"/>
-                        <a:t>TC</a:t>
-                      </a:r>
-                      <a:endParaRPr lang="en-US" sz="1400" dirty="0"/>
-                    </a:p>
-                  </a:txBody>
-                  <a:tcPr/>
-                </a:tc>
-                <a:tc>
-                  <a:txBody>
-                    <a:bodyPr/>
-                    <a:lstStyle/>
-                    <a:p>
-                      <a:r>
-                        <a:rPr lang="fr-BE" sz="1400" dirty="0" err="1"/>
-                        <a:t>Transitory</a:t>
-                      </a:r>
-                      <a:r>
-                        <a:rPr lang="fr-BE" sz="1400" dirty="0"/>
-                        <a:t> change</a:t>
-                      </a:r>
-                      <a:endParaRPr lang="en-US" sz="1400" dirty="0"/>
-                    </a:p>
-                  </a:txBody>
-                  <a:tcPr/>
-                </a:tc>
-                <a:tc>
-                  <a:txBody>
-                    <a:bodyPr/>
-                    <a:lstStyle/>
-                    <a:p>
-                      <a:pPr algn="ctr"/>
-                      <a:endParaRPr lang="en-US" sz="1400" dirty="0"/>
-                    </a:p>
-                  </a:txBody>
-                  <a:tcPr/>
-                </a:tc>
-                <a:tc>
-                  <a:txBody>
-                    <a:bodyPr/>
-                    <a:lstStyle/>
-                    <a:p>
-                      <a:pPr algn="ctr"/>
-                      <a:endParaRPr lang="en-US" sz="1400" dirty="0"/>
-                    </a:p>
-                  </a:txBody>
-                  <a:tcPr/>
-                </a:tc>
-                <a:tc>
-                  <a:txBody>
-                    <a:bodyPr/>
-                    <a:lstStyle/>
-                    <a:p>
-                      <a:pPr algn="ctr"/>
-                      <a:r>
-                        <a:rPr lang="fr-BE" sz="1400" dirty="0"/>
-                        <a:t>x</a:t>
-                      </a:r>
-                      <a:endParaRPr lang="en-US" sz="1400" dirty="0"/>
-                    </a:p>
-                  </a:txBody>
-                  <a:tcPr/>
-                </a:tc>
-                <a:tc>
-                  <a:txBody>
-                    <a:bodyPr/>
-                    <a:lstStyle/>
-                    <a:p>
-                      <a:pPr algn="ctr"/>
-                      <a:r>
-                        <a:rPr lang="fr-BE" sz="1400" dirty="0"/>
-                        <a:t>x</a:t>
-                      </a:r>
-                      <a:endParaRPr lang="en-US" sz="1400" dirty="0"/>
-                    </a:p>
-                  </a:txBody>
-                  <a:tcPr/>
-                </a:tc>
-                <a:extLst>
-                  <a:ext uri="{0D108BD9-81ED-4DB2-BD59-A6C34878D82A}">
-                    <a16:rowId xmlns:a16="http://schemas.microsoft.com/office/drawing/2014/main" val="10006"/>
-                  </a:ext>
-                </a:extLst>
-              </a:tr>
-              <a:tr h="255912">
-                <a:tc>
-                  <a:txBody>
-                    <a:bodyPr/>
-                    <a:lstStyle/>
-                    <a:p>
-                      <a:r>
-                        <a:rPr lang="fr-BE" sz="1400" dirty="0"/>
-                        <a:t>LS</a:t>
-                      </a:r>
-                      <a:endParaRPr lang="en-US" sz="1400" dirty="0"/>
-                    </a:p>
-                  </a:txBody>
-                  <a:tcPr/>
-                </a:tc>
-                <a:tc>
-                  <a:txBody>
-                    <a:bodyPr/>
-                    <a:lstStyle/>
-                    <a:p>
-                      <a:r>
-                        <a:rPr lang="fr-BE" sz="1400" dirty="0" err="1"/>
-                        <a:t>Level</a:t>
-                      </a:r>
-                      <a:r>
-                        <a:rPr lang="fr-BE" sz="1400" dirty="0"/>
-                        <a:t> shift</a:t>
-                      </a:r>
-                      <a:endParaRPr lang="en-US" sz="1400" dirty="0"/>
-                    </a:p>
-                  </a:txBody>
-                  <a:tcPr/>
-                </a:tc>
-                <a:tc>
-                  <a:txBody>
-                    <a:bodyPr/>
-                    <a:lstStyle/>
-                    <a:p>
-                      <a:pPr algn="ctr"/>
-                      <a:r>
-                        <a:rPr lang="fr-BE" sz="1400" dirty="0"/>
-                        <a:t>x</a:t>
-                      </a:r>
-                      <a:endParaRPr lang="en-US" sz="1400" dirty="0"/>
-                    </a:p>
-                  </a:txBody>
-                  <a:tcPr/>
-                </a:tc>
-                <a:tc>
-                  <a:txBody>
-                    <a:bodyPr/>
-                    <a:lstStyle/>
-                    <a:p>
-                      <a:pPr algn="ctr"/>
-                      <a:endParaRPr lang="en-US" sz="1400" dirty="0"/>
-                    </a:p>
-                  </a:txBody>
-                  <a:tcPr/>
-                </a:tc>
-                <a:tc>
-                  <a:txBody>
-                    <a:bodyPr/>
-                    <a:lstStyle/>
-                    <a:p>
-                      <a:pPr algn="ctr"/>
-                      <a:endParaRPr lang="en-US" sz="1400" dirty="0"/>
-                    </a:p>
-                  </a:txBody>
-                  <a:tcPr/>
-                </a:tc>
-                <a:tc>
-                  <a:txBody>
-                    <a:bodyPr/>
-                    <a:lstStyle/>
-                    <a:p>
-                      <a:pPr algn="ctr"/>
-                      <a:r>
-                        <a:rPr lang="fr-BE" sz="1400" dirty="0"/>
-                        <a:t>x</a:t>
-                      </a:r>
-                      <a:endParaRPr lang="en-US" sz="1400" dirty="0"/>
-                    </a:p>
-                  </a:txBody>
-                  <a:tcPr/>
-                </a:tc>
-                <a:extLst>
-                  <a:ext uri="{0D108BD9-81ED-4DB2-BD59-A6C34878D82A}">
-                    <a16:rowId xmlns:a16="http://schemas.microsoft.com/office/drawing/2014/main" val="10007"/>
-                  </a:ext>
-                </a:extLst>
-              </a:tr>
-              <a:tr h="255912">
-                <a:tc>
-                  <a:txBody>
-                    <a:bodyPr/>
-                    <a:lstStyle/>
-                    <a:p>
-                      <a:r>
-                        <a:rPr lang="fr-BE" sz="1400" dirty="0"/>
-                        <a:t>SO, SLS</a:t>
-                      </a:r>
-                      <a:endParaRPr lang="en-US" sz="1400" dirty="0"/>
-                    </a:p>
-                  </a:txBody>
-                  <a:tcPr/>
-                </a:tc>
-                <a:tc>
-                  <a:txBody>
-                    <a:bodyPr/>
-                    <a:lstStyle/>
-                    <a:p>
-                      <a:r>
-                        <a:rPr lang="fr-BE" sz="1400" dirty="0"/>
-                        <a:t>Seasonal </a:t>
-                      </a:r>
-                      <a:r>
-                        <a:rPr lang="fr-BE" sz="1400" dirty="0" err="1"/>
-                        <a:t>outlier</a:t>
-                      </a:r>
-                      <a:r>
-                        <a:rPr lang="fr-BE" sz="1400" dirty="0"/>
-                        <a:t> / </a:t>
-                      </a:r>
-                      <a:r>
-                        <a:rPr lang="fr-BE" sz="1400" dirty="0" err="1"/>
-                        <a:t>seasonal</a:t>
-                      </a:r>
-                      <a:r>
-                        <a:rPr lang="fr-BE" sz="1400" dirty="0"/>
-                        <a:t> </a:t>
-                      </a:r>
-                      <a:r>
-                        <a:rPr lang="fr-BE" sz="1400" dirty="0" err="1"/>
-                        <a:t>level</a:t>
-                      </a:r>
-                      <a:r>
-                        <a:rPr lang="fr-BE" sz="1400" dirty="0"/>
-                        <a:t> shift</a:t>
-                      </a:r>
-                      <a:endParaRPr lang="en-US" sz="1400" dirty="0"/>
-                    </a:p>
-                  </a:txBody>
-                  <a:tcPr/>
-                </a:tc>
-                <a:tc>
-                  <a:txBody>
-                    <a:bodyPr/>
-                    <a:lstStyle/>
-                    <a:p>
-                      <a:pPr algn="ctr"/>
-                      <a:endParaRPr lang="en-US" sz="1400" dirty="0"/>
-                    </a:p>
-                  </a:txBody>
-                  <a:tcPr/>
-                </a:tc>
-                <a:tc>
-                  <a:txBody>
-                    <a:bodyPr/>
-                    <a:lstStyle/>
-                    <a:p>
-                      <a:pPr algn="ctr"/>
-                      <a:r>
-                        <a:rPr lang="fr-BE" sz="1400" dirty="0"/>
-                        <a:t>x</a:t>
-                      </a:r>
-                      <a:endParaRPr lang="en-US" sz="1400" dirty="0"/>
-                    </a:p>
-                  </a:txBody>
-                  <a:tcPr/>
-                </a:tc>
-                <a:tc>
-                  <a:txBody>
-                    <a:bodyPr/>
-                    <a:lstStyle/>
-                    <a:p>
-                      <a:pPr algn="ctr"/>
-                      <a:endParaRPr lang="en-US" sz="1400"/>
-                    </a:p>
-                  </a:txBody>
-                  <a:tcPr/>
-                </a:tc>
-                <a:tc>
-                  <a:txBody>
-                    <a:bodyPr/>
-                    <a:lstStyle/>
-                    <a:p>
-                      <a:pPr algn="ctr"/>
-                      <a:endParaRPr lang="en-US" sz="1400" dirty="0"/>
-                    </a:p>
-                  </a:txBody>
-                  <a:tcPr/>
-                </a:tc>
-                <a:extLst>
-                  <a:ext uri="{0D108BD9-81ED-4DB2-BD59-A6C34878D82A}">
-                    <a16:rowId xmlns:a16="http://schemas.microsoft.com/office/drawing/2014/main" val="10008"/>
-                  </a:ext>
-                </a:extLst>
-              </a:tr>
-              <a:tr h="255912">
-                <a:tc>
-                  <a:txBody>
-                    <a:bodyPr/>
-                    <a:lstStyle/>
-                    <a:p>
-                      <a:endParaRPr lang="en-US" sz="1400" dirty="0"/>
-                    </a:p>
-                  </a:txBody>
-                  <a:tcPr/>
-                </a:tc>
-                <a:tc>
-                  <a:txBody>
-                    <a:bodyPr/>
-                    <a:lstStyle/>
-                    <a:p>
-                      <a:endParaRPr lang="en-US" sz="1400"/>
-                    </a:p>
-                  </a:txBody>
-                  <a:tcPr/>
-                </a:tc>
-                <a:tc>
-                  <a:txBody>
-                    <a:bodyPr/>
-                    <a:lstStyle/>
-                    <a:p>
-                      <a:pPr algn="ctr"/>
-                      <a:endParaRPr lang="en-US" sz="1400"/>
-                    </a:p>
-                  </a:txBody>
-                  <a:tcPr/>
-                </a:tc>
-                <a:tc>
-                  <a:txBody>
-                    <a:bodyPr/>
-                    <a:lstStyle/>
-                    <a:p>
-                      <a:pPr algn="ctr"/>
-                      <a:endParaRPr lang="en-US" sz="1400"/>
-                    </a:p>
-                  </a:txBody>
-                  <a:tcPr/>
-                </a:tc>
-                <a:tc>
-                  <a:txBody>
-                    <a:bodyPr/>
-                    <a:lstStyle/>
-                    <a:p>
-                      <a:pPr algn="ctr"/>
-                      <a:endParaRPr lang="en-US" sz="1400"/>
-                    </a:p>
-                  </a:txBody>
-                  <a:tcPr/>
-                </a:tc>
-                <a:tc>
-                  <a:txBody>
-                    <a:bodyPr/>
-                    <a:lstStyle/>
-                    <a:p>
-                      <a:pPr algn="ctr"/>
-                      <a:endParaRPr lang="en-US" sz="1400" dirty="0"/>
-                    </a:p>
-                  </a:txBody>
-                  <a:tcPr/>
-                </a:tc>
-                <a:extLst>
-                  <a:ext uri="{0D108BD9-81ED-4DB2-BD59-A6C34878D82A}">
-                    <a16:rowId xmlns:a16="http://schemas.microsoft.com/office/drawing/2014/main" val="10009"/>
-                  </a:ext>
-                </a:extLst>
-              </a:tr>
-              <a:tr h="255912">
-                <a:tc>
-                  <a:txBody>
-                    <a:bodyPr/>
-                    <a:lstStyle/>
-                    <a:p>
-                      <a:r>
-                        <a:rPr lang="fr-BE" sz="1400" dirty="0" err="1"/>
-                        <a:t>Reg_i</a:t>
-                      </a:r>
-                      <a:endParaRPr lang="en-US" sz="1400" dirty="0"/>
-                    </a:p>
-                  </a:txBody>
-                  <a:tcPr/>
-                </a:tc>
-                <a:tc>
-                  <a:txBody>
-                    <a:bodyPr/>
-                    <a:lstStyle/>
-                    <a:p>
-                      <a:pPr marL="0" marR="0" indent="0" algn="l" defTabSz="914400" rtl="0" eaLnBrk="1" fontAlgn="auto" latinLnBrk="0" hangingPunct="1">
-                        <a:lnSpc>
-                          <a:spcPct val="100000"/>
-                        </a:lnSpc>
-                        <a:spcBef>
-                          <a:spcPts val="0"/>
-                        </a:spcBef>
-                        <a:spcAft>
-                          <a:spcPts val="0"/>
-                        </a:spcAft>
-                        <a:buClrTx/>
-                        <a:buSzTx/>
-                        <a:buFontTx/>
-                        <a:buNone/>
-                        <a:tabLst/>
-                        <a:defRPr/>
-                      </a:pPr>
-                      <a:r>
-                        <a:rPr lang="fr-BE" sz="1400" dirty="0" err="1"/>
-                        <a:t>Regression</a:t>
-                      </a:r>
-                      <a:r>
-                        <a:rPr lang="fr-BE" sz="1400" baseline="0" dirty="0"/>
-                        <a:t> variables </a:t>
-                      </a:r>
-                      <a:r>
-                        <a:rPr lang="fr-BE" sz="1400" baseline="0" dirty="0" err="1"/>
-                        <a:t>allocated</a:t>
-                      </a:r>
-                      <a:r>
-                        <a:rPr lang="fr-BE" sz="1400" baseline="0" dirty="0"/>
-                        <a:t> to </a:t>
-                      </a:r>
-                      <a:r>
-                        <a:rPr lang="fr-BE" sz="1400" baseline="0" dirty="0" err="1"/>
-                        <a:t>irregular</a:t>
-                      </a:r>
-                      <a:r>
-                        <a:rPr lang="fr-BE" sz="1400" baseline="0" dirty="0"/>
-                        <a:t>, IV (p)</a:t>
-                      </a:r>
-                      <a:endParaRPr lang="en-US" sz="1400" dirty="0"/>
-                    </a:p>
-                  </a:txBody>
-                  <a:tcPr/>
-                </a:tc>
-                <a:tc>
-                  <a:txBody>
-                    <a:bodyPr/>
-                    <a:lstStyle/>
-                    <a:p>
-                      <a:pPr algn="ctr"/>
-                      <a:endParaRPr lang="en-US" sz="1400" dirty="0"/>
-                    </a:p>
-                  </a:txBody>
-                  <a:tcPr/>
-                </a:tc>
-                <a:tc>
-                  <a:txBody>
-                    <a:bodyPr/>
-                    <a:lstStyle/>
-                    <a:p>
-                      <a:pPr algn="ctr"/>
-                      <a:endParaRPr lang="en-US" sz="1400" dirty="0"/>
-                    </a:p>
-                  </a:txBody>
-                  <a:tcPr/>
-                </a:tc>
-                <a:tc>
-                  <a:txBody>
-                    <a:bodyPr/>
-                    <a:lstStyle/>
-                    <a:p>
-                      <a:pPr algn="ctr"/>
-                      <a:r>
-                        <a:rPr lang="fr-BE" sz="1400" dirty="0"/>
-                        <a:t>x</a:t>
-                      </a:r>
-                      <a:endParaRPr lang="en-US" sz="1400" dirty="0"/>
-                    </a:p>
-                  </a:txBody>
-                  <a:tcPr/>
-                </a:tc>
-                <a:tc>
-                  <a:txBody>
-                    <a:bodyPr/>
-                    <a:lstStyle/>
-                    <a:p>
-                      <a:pPr algn="ctr"/>
-                      <a:r>
-                        <a:rPr lang="fr-BE" sz="1400" dirty="0"/>
-                        <a:t>x</a:t>
-                      </a:r>
-                      <a:endParaRPr lang="en-US" sz="1400" dirty="0"/>
-                    </a:p>
-                  </a:txBody>
-                  <a:tcPr/>
-                </a:tc>
-                <a:extLst>
-                  <a:ext uri="{0D108BD9-81ED-4DB2-BD59-A6C34878D82A}">
-                    <a16:rowId xmlns:a16="http://schemas.microsoft.com/office/drawing/2014/main" val="10010"/>
-                  </a:ext>
-                </a:extLst>
-              </a:tr>
-              <a:tr h="437009">
-                <a:tc>
-                  <a:txBody>
-                    <a:bodyPr/>
-                    <a:lstStyle/>
-                    <a:p>
-                      <a:r>
-                        <a:rPr lang="fr-BE" sz="1400" dirty="0" err="1"/>
-                        <a:t>Reg_t</a:t>
-                      </a:r>
-                      <a:endParaRPr lang="en-US" sz="1400" dirty="0"/>
-                    </a:p>
-                  </a:txBody>
-                  <a:tcPr/>
-                </a:tc>
-                <a:tc>
-                  <a:txBody>
-                    <a:bodyPr/>
-                    <a:lstStyle/>
-                    <a:p>
-                      <a:pPr marL="0" marR="0" indent="0" algn="l" defTabSz="914400" rtl="0" eaLnBrk="1" fontAlgn="auto" latinLnBrk="0" hangingPunct="1">
-                        <a:lnSpc>
-                          <a:spcPct val="100000"/>
-                        </a:lnSpc>
-                        <a:spcBef>
-                          <a:spcPts val="0"/>
-                        </a:spcBef>
-                        <a:spcAft>
-                          <a:spcPts val="0"/>
-                        </a:spcAft>
-                        <a:buClrTx/>
-                        <a:buSzTx/>
-                        <a:buFontTx/>
-                        <a:buNone/>
-                        <a:tabLst/>
-                        <a:defRPr/>
-                      </a:pPr>
-                      <a:r>
-                        <a:rPr lang="fr-BE" sz="1400" dirty="0" err="1"/>
-                        <a:t>Regression</a:t>
-                      </a:r>
-                      <a:r>
-                        <a:rPr lang="fr-BE" sz="1400" baseline="0" dirty="0"/>
-                        <a:t> variables </a:t>
-                      </a:r>
-                      <a:r>
-                        <a:rPr lang="fr-BE" sz="1400" baseline="0" dirty="0" err="1"/>
-                        <a:t>allocated</a:t>
-                      </a:r>
-                      <a:r>
-                        <a:rPr lang="fr-BE" sz="1400" baseline="0" dirty="0"/>
-                        <a:t> to trend, </a:t>
-                      </a:r>
-                      <a:r>
-                        <a:rPr lang="fr-BE" sz="1400" baseline="0" dirty="0" err="1"/>
-                        <a:t>ramps</a:t>
-                      </a:r>
-                      <a:r>
-                        <a:rPr lang="fr-BE" sz="1400" baseline="0" dirty="0"/>
-                        <a:t>, IV (p)</a:t>
-                      </a:r>
-                      <a:endParaRPr lang="en-US" sz="1400" dirty="0"/>
-                    </a:p>
-                  </a:txBody>
-                  <a:tcPr/>
-                </a:tc>
-                <a:tc>
-                  <a:txBody>
-                    <a:bodyPr/>
-                    <a:lstStyle/>
-                    <a:p>
-                      <a:pPr algn="ctr"/>
-                      <a:r>
-                        <a:rPr lang="fr-BE" sz="1400" dirty="0"/>
-                        <a:t>x</a:t>
-                      </a:r>
-                      <a:endParaRPr lang="en-US" sz="1400" dirty="0"/>
-                    </a:p>
-                  </a:txBody>
-                  <a:tcPr/>
-                </a:tc>
-                <a:tc>
-                  <a:txBody>
-                    <a:bodyPr/>
-                    <a:lstStyle/>
-                    <a:p>
-                      <a:pPr algn="ctr"/>
-                      <a:endParaRPr lang="en-US" sz="1400" dirty="0"/>
-                    </a:p>
-                  </a:txBody>
-                  <a:tcPr/>
-                </a:tc>
-                <a:tc>
-                  <a:txBody>
-                    <a:bodyPr/>
-                    <a:lstStyle/>
-                    <a:p>
-                      <a:pPr algn="ctr"/>
-                      <a:endParaRPr lang="en-US" sz="1400" dirty="0"/>
-                    </a:p>
-                  </a:txBody>
-                  <a:tcPr/>
-                </a:tc>
-                <a:tc>
-                  <a:txBody>
-                    <a:bodyPr/>
-                    <a:lstStyle/>
-                    <a:p>
-                      <a:pPr algn="ctr"/>
-                      <a:r>
-                        <a:rPr lang="fr-BE" sz="1400" dirty="0"/>
-                        <a:t>x</a:t>
-                      </a:r>
-                      <a:endParaRPr lang="en-US" sz="1400" dirty="0"/>
-                    </a:p>
-                  </a:txBody>
-                  <a:tcPr/>
-                </a:tc>
-                <a:extLst>
-                  <a:ext uri="{0D108BD9-81ED-4DB2-BD59-A6C34878D82A}">
-                    <a16:rowId xmlns:a16="http://schemas.microsoft.com/office/drawing/2014/main" val="10011"/>
-                  </a:ext>
-                </a:extLst>
-              </a:tr>
-              <a:tr h="255912">
-                <a:tc>
-                  <a:txBody>
-                    <a:bodyPr/>
-                    <a:lstStyle/>
-                    <a:p>
-                      <a:r>
-                        <a:rPr lang="fr-BE" sz="1400" dirty="0" err="1"/>
-                        <a:t>Reg_s</a:t>
-                      </a:r>
-                      <a:endParaRPr lang="en-US" sz="1400" dirty="0"/>
-                    </a:p>
-                  </a:txBody>
-                  <a:tcPr/>
-                </a:tc>
-                <a:tc>
-                  <a:txBody>
-                    <a:bodyPr/>
-                    <a:lstStyle/>
-                    <a:p>
-                      <a:pPr marL="0" marR="0" indent="0" algn="l" defTabSz="914400" rtl="0" eaLnBrk="1" fontAlgn="auto" latinLnBrk="0" hangingPunct="1">
-                        <a:lnSpc>
-                          <a:spcPct val="100000"/>
-                        </a:lnSpc>
-                        <a:spcBef>
-                          <a:spcPts val="0"/>
-                        </a:spcBef>
-                        <a:spcAft>
-                          <a:spcPts val="0"/>
-                        </a:spcAft>
-                        <a:buClrTx/>
-                        <a:buSzTx/>
-                        <a:buFontTx/>
-                        <a:buNone/>
-                        <a:tabLst/>
-                        <a:defRPr/>
-                      </a:pPr>
-                      <a:r>
-                        <a:rPr lang="fr-BE" sz="1400" dirty="0" err="1"/>
-                        <a:t>Regression</a:t>
-                      </a:r>
-                      <a:r>
-                        <a:rPr lang="fr-BE" sz="1400" baseline="0" dirty="0"/>
-                        <a:t> variables </a:t>
-                      </a:r>
-                      <a:r>
-                        <a:rPr lang="fr-BE" sz="1400" baseline="0" dirty="0" err="1"/>
-                        <a:t>allocated</a:t>
-                      </a:r>
-                      <a:r>
-                        <a:rPr lang="fr-BE" sz="1400" baseline="0" dirty="0"/>
-                        <a:t> to </a:t>
-                      </a:r>
-                      <a:r>
-                        <a:rPr lang="fr-BE" sz="1400" baseline="0" dirty="0" err="1"/>
-                        <a:t>seasonal</a:t>
-                      </a:r>
-                      <a:r>
-                        <a:rPr lang="fr-BE" sz="1400" baseline="0" dirty="0"/>
-                        <a:t>, IV (p)</a:t>
-                      </a:r>
-                      <a:endParaRPr lang="en-US" sz="1400" dirty="0"/>
-                    </a:p>
-                  </a:txBody>
-                  <a:tcPr/>
-                </a:tc>
-                <a:tc>
-                  <a:txBody>
-                    <a:bodyPr/>
-                    <a:lstStyle/>
-                    <a:p>
-                      <a:pPr algn="ctr"/>
-                      <a:endParaRPr lang="en-US" sz="1400" dirty="0"/>
-                    </a:p>
-                  </a:txBody>
-                  <a:tcPr/>
-                </a:tc>
-                <a:tc>
-                  <a:txBody>
-                    <a:bodyPr/>
-                    <a:lstStyle/>
-                    <a:p>
-                      <a:pPr algn="ctr"/>
-                      <a:endParaRPr lang="en-US" sz="1400" dirty="0"/>
-                    </a:p>
-                  </a:txBody>
-                  <a:tcPr/>
-                </a:tc>
-                <a:tc>
-                  <a:txBody>
-                    <a:bodyPr/>
-                    <a:lstStyle/>
-                    <a:p>
-                      <a:pPr algn="ctr"/>
-                      <a:endParaRPr lang="en-US" sz="1400" dirty="0"/>
-                    </a:p>
-                  </a:txBody>
-                  <a:tcPr/>
-                </a:tc>
-                <a:tc>
-                  <a:txBody>
-                    <a:bodyPr/>
-                    <a:lstStyle/>
-                    <a:p>
-                      <a:pPr algn="ctr"/>
-                      <a:endParaRPr lang="en-US" sz="1400" dirty="0"/>
-                    </a:p>
-                  </a:txBody>
-                  <a:tcPr/>
-                </a:tc>
-                <a:extLst>
-                  <a:ext uri="{0D108BD9-81ED-4DB2-BD59-A6C34878D82A}">
-                    <a16:rowId xmlns:a16="http://schemas.microsoft.com/office/drawing/2014/main" val="10012"/>
-                  </a:ext>
-                </a:extLst>
-              </a:tr>
-              <a:tr h="255912">
-                <a:tc>
-                  <a:txBody>
-                    <a:bodyPr/>
-                    <a:lstStyle/>
-                    <a:p>
-                      <a:r>
-                        <a:rPr lang="fr-BE" sz="1400" dirty="0" err="1"/>
-                        <a:t>Reg_sa</a:t>
-                      </a:r>
-                      <a:endParaRPr lang="en-US" sz="1400" dirty="0"/>
-                    </a:p>
-                  </a:txBody>
-                  <a:tcPr/>
-                </a:tc>
-                <a:tc>
-                  <a:txBody>
-                    <a:bodyPr/>
-                    <a:lstStyle/>
-                    <a:p>
-                      <a:pPr marL="0" marR="0" indent="0" algn="l" defTabSz="914400" rtl="0" eaLnBrk="1" fontAlgn="auto" latinLnBrk="0" hangingPunct="1">
-                        <a:lnSpc>
-                          <a:spcPct val="100000"/>
-                        </a:lnSpc>
-                        <a:spcBef>
-                          <a:spcPts val="0"/>
-                        </a:spcBef>
-                        <a:spcAft>
-                          <a:spcPts val="0"/>
-                        </a:spcAft>
-                        <a:buClrTx/>
-                        <a:buSzTx/>
-                        <a:buFontTx/>
-                        <a:buNone/>
-                        <a:tabLst/>
-                        <a:defRPr/>
-                      </a:pPr>
-                      <a:r>
-                        <a:rPr lang="fr-BE" sz="1400" dirty="0" err="1"/>
-                        <a:t>Regression</a:t>
-                      </a:r>
-                      <a:r>
-                        <a:rPr lang="fr-BE" sz="1400" baseline="0" dirty="0"/>
-                        <a:t> variables </a:t>
-                      </a:r>
-                      <a:r>
-                        <a:rPr lang="fr-BE" sz="1400" baseline="0" dirty="0" err="1"/>
-                        <a:t>allocated</a:t>
-                      </a:r>
-                      <a:r>
-                        <a:rPr lang="fr-BE" sz="1400" baseline="0" dirty="0"/>
-                        <a:t> to </a:t>
-                      </a:r>
-                      <a:r>
-                        <a:rPr lang="fr-BE" sz="1400" baseline="0" dirty="0" err="1"/>
-                        <a:t>seas</a:t>
-                      </a:r>
-                      <a:r>
-                        <a:rPr lang="fr-BE" sz="1400" baseline="0" dirty="0"/>
-                        <a:t>.</a:t>
-                      </a:r>
-                      <a:r>
-                        <a:rPr lang="en-US" sz="1400" baseline="0" dirty="0"/>
-                        <a:t> adjusted</a:t>
-                      </a:r>
-                      <a:endParaRPr lang="en-US" sz="1400" dirty="0"/>
-                    </a:p>
-                  </a:txBody>
-                  <a:tcPr/>
-                </a:tc>
-                <a:tc>
-                  <a:txBody>
-                    <a:bodyPr/>
-                    <a:lstStyle/>
-                    <a:p>
-                      <a:pPr algn="ctr"/>
-                      <a:endParaRPr lang="en-US" sz="1400" dirty="0"/>
-                    </a:p>
-                  </a:txBody>
-                  <a:tcPr/>
-                </a:tc>
-                <a:tc>
-                  <a:txBody>
-                    <a:bodyPr/>
-                    <a:lstStyle/>
-                    <a:p>
-                      <a:pPr algn="ctr"/>
-                      <a:endParaRPr lang="en-US" sz="1400" dirty="0"/>
-                    </a:p>
-                  </a:txBody>
-                  <a:tcPr/>
-                </a:tc>
-                <a:tc>
-                  <a:txBody>
-                    <a:bodyPr/>
-                    <a:lstStyle/>
-                    <a:p>
-                      <a:pPr algn="ctr"/>
-                      <a:endParaRPr lang="en-US" sz="1400" dirty="0"/>
-                    </a:p>
-                  </a:txBody>
-                  <a:tcPr/>
-                </a:tc>
-                <a:tc>
-                  <a:txBody>
-                    <a:bodyPr/>
-                    <a:lstStyle/>
-                    <a:p>
-                      <a:pPr algn="ctr"/>
-                      <a:r>
-                        <a:rPr lang="fr-BE" sz="1400" dirty="0"/>
-                        <a:t>x</a:t>
-                      </a:r>
-                      <a:endParaRPr lang="en-US" sz="1400" dirty="0"/>
-                    </a:p>
-                  </a:txBody>
-                  <a:tcPr/>
-                </a:tc>
-                <a:extLst>
-                  <a:ext uri="{0D108BD9-81ED-4DB2-BD59-A6C34878D82A}">
-                    <a16:rowId xmlns:a16="http://schemas.microsoft.com/office/drawing/2014/main" val="10013"/>
-                  </a:ext>
-                </a:extLst>
-              </a:tr>
-              <a:tr h="255912">
-                <a:tc>
-                  <a:txBody>
-                    <a:bodyPr/>
-                    <a:lstStyle/>
-                    <a:p>
-                      <a:r>
-                        <a:rPr lang="fr-BE" sz="1400" dirty="0" err="1"/>
-                        <a:t>Reg_y</a:t>
-                      </a:r>
-                      <a:endParaRPr lang="en-US" sz="1400" dirty="0"/>
-                    </a:p>
-                  </a:txBody>
-                  <a:tcPr/>
-                </a:tc>
-                <a:tc>
-                  <a:txBody>
-                    <a:bodyPr/>
-                    <a:lstStyle/>
-                    <a:p>
-                      <a:pPr marL="0" marR="0" indent="0" algn="l" defTabSz="914400" rtl="0" eaLnBrk="1" fontAlgn="auto" latinLnBrk="0" hangingPunct="1">
-                        <a:lnSpc>
-                          <a:spcPct val="100000"/>
-                        </a:lnSpc>
-                        <a:spcBef>
-                          <a:spcPts val="0"/>
-                        </a:spcBef>
-                        <a:spcAft>
-                          <a:spcPts val="0"/>
-                        </a:spcAft>
-                        <a:buClrTx/>
-                        <a:buSzTx/>
-                        <a:buFontTx/>
-                        <a:buNone/>
-                        <a:tabLst/>
-                        <a:defRPr/>
-                      </a:pPr>
-                      <a:r>
-                        <a:rPr lang="fr-BE" sz="1400" dirty="0" err="1"/>
-                        <a:t>Regression</a:t>
-                      </a:r>
-                      <a:r>
-                        <a:rPr lang="fr-BE" sz="1400" baseline="0" dirty="0"/>
-                        <a:t> variables </a:t>
-                      </a:r>
-                      <a:r>
-                        <a:rPr lang="fr-BE" sz="1400" baseline="0" dirty="0" err="1"/>
-                        <a:t>removed</a:t>
-                      </a:r>
-                      <a:r>
-                        <a:rPr lang="fr-BE" sz="1400" baseline="0" dirty="0"/>
-                        <a:t> </a:t>
-                      </a:r>
-                      <a:r>
-                        <a:rPr lang="fr-BE" sz="1400" baseline="0" dirty="0" err="1"/>
-                        <a:t>before</a:t>
-                      </a:r>
-                      <a:r>
-                        <a:rPr lang="fr-BE" sz="1400" baseline="0" dirty="0"/>
-                        <a:t> </a:t>
-                      </a:r>
-                      <a:r>
-                        <a:rPr lang="fr-BE" sz="1400" baseline="0" dirty="0" err="1"/>
-                        <a:t>decomposition</a:t>
-                      </a:r>
-                      <a:endParaRPr lang="en-US" sz="1400" dirty="0"/>
-                    </a:p>
-                  </a:txBody>
-                  <a:tcPr/>
-                </a:tc>
-                <a:tc>
-                  <a:txBody>
-                    <a:bodyPr/>
-                    <a:lstStyle/>
-                    <a:p>
-                      <a:pPr algn="ctr"/>
-                      <a:endParaRPr lang="en-US" sz="1400" dirty="0"/>
-                    </a:p>
-                  </a:txBody>
-                  <a:tcPr/>
-                </a:tc>
-                <a:tc>
-                  <a:txBody>
-                    <a:bodyPr/>
-                    <a:lstStyle/>
-                    <a:p>
-                      <a:pPr algn="ctr"/>
-                      <a:endParaRPr lang="en-US" sz="1400" dirty="0"/>
-                    </a:p>
-                  </a:txBody>
-                  <a:tcPr/>
-                </a:tc>
-                <a:tc>
-                  <a:txBody>
-                    <a:bodyPr/>
-                    <a:lstStyle/>
-                    <a:p>
-                      <a:pPr algn="ctr"/>
-                      <a:endParaRPr lang="en-US" sz="1400" dirty="0"/>
-                    </a:p>
-                  </a:txBody>
-                  <a:tcPr/>
-                </a:tc>
-                <a:tc>
-                  <a:txBody>
-                    <a:bodyPr/>
-                    <a:lstStyle/>
-                    <a:p>
-                      <a:pPr algn="ctr"/>
-                      <a:endParaRPr lang="en-US" sz="1400" dirty="0"/>
-                    </a:p>
-                  </a:txBody>
-                  <a:tcPr/>
-                </a:tc>
-                <a:extLst>
-                  <a:ext uri="{0D108BD9-81ED-4DB2-BD59-A6C34878D82A}">
-                    <a16:rowId xmlns:a16="http://schemas.microsoft.com/office/drawing/2014/main" val="10014"/>
-                  </a:ext>
-                </a:extLst>
-              </a:tr>
-              <a:tr h="255912">
-                <a:tc>
-                  <a:txBody>
-                    <a:bodyPr/>
-                    <a:lstStyle/>
-                    <a:p>
-                      <a:r>
-                        <a:rPr lang="fr-BE" sz="1400" dirty="0" err="1"/>
-                        <a:t>Reg_u</a:t>
-                      </a:r>
-                      <a:endParaRPr lang="en-US" sz="1400" dirty="0"/>
-                    </a:p>
-                  </a:txBody>
-                  <a:tcPr/>
-                </a:tc>
-                <a:tc>
-                  <a:txBody>
-                    <a:bodyPr/>
-                    <a:lstStyle/>
-                    <a:p>
-                      <a:pPr marL="0" marR="0" indent="0" algn="l" defTabSz="914400" rtl="0" eaLnBrk="1" fontAlgn="auto" latinLnBrk="0" hangingPunct="1">
-                        <a:lnSpc>
-                          <a:spcPct val="100000"/>
-                        </a:lnSpc>
-                        <a:spcBef>
-                          <a:spcPts val="0"/>
-                        </a:spcBef>
-                        <a:spcAft>
-                          <a:spcPts val="0"/>
-                        </a:spcAft>
-                        <a:buClrTx/>
-                        <a:buSzTx/>
-                        <a:buFontTx/>
-                        <a:buNone/>
-                        <a:tabLst/>
-                        <a:defRPr/>
-                      </a:pPr>
-                      <a:r>
-                        <a:rPr lang="en-US" sz="1400" noProof="0" dirty="0"/>
-                        <a:t>Regression</a:t>
-                      </a:r>
-                      <a:r>
-                        <a:rPr lang="en-US" sz="1400" baseline="0" noProof="0" dirty="0"/>
-                        <a:t> variables unallocated to a component</a:t>
-                      </a:r>
-                      <a:endParaRPr lang="en-US" sz="1400" noProof="0" dirty="0"/>
-                    </a:p>
-                  </a:txBody>
-                  <a:tcPr/>
-                </a:tc>
-                <a:tc>
-                  <a:txBody>
-                    <a:bodyPr/>
-                    <a:lstStyle/>
-                    <a:p>
-                      <a:pPr algn="ctr"/>
-                      <a:r>
-                        <a:rPr lang="fr-BE" sz="1400" dirty="0"/>
-                        <a:t>p</a:t>
-                      </a:r>
-                      <a:endParaRPr lang="en-US" sz="1400" dirty="0"/>
-                    </a:p>
-                  </a:txBody>
-                  <a:tcPr/>
-                </a:tc>
-                <a:tc>
-                  <a:txBody>
-                    <a:bodyPr/>
-                    <a:lstStyle/>
-                    <a:p>
-                      <a:pPr algn="ctr"/>
-                      <a:r>
-                        <a:rPr lang="fr-BE" sz="1400" dirty="0"/>
-                        <a:t>p</a:t>
-                      </a:r>
-                      <a:endParaRPr lang="en-US" sz="1400" dirty="0"/>
-                    </a:p>
-                  </a:txBody>
-                  <a:tcPr/>
-                </a:tc>
-                <a:tc>
-                  <a:txBody>
-                    <a:bodyPr/>
-                    <a:lstStyle/>
-                    <a:p>
-                      <a:pPr algn="ctr"/>
-                      <a:r>
-                        <a:rPr lang="fr-BE" sz="1400" dirty="0"/>
-                        <a:t>p</a:t>
-                      </a:r>
-                      <a:endParaRPr lang="en-US" sz="1400" dirty="0"/>
-                    </a:p>
-                  </a:txBody>
-                  <a:tcPr/>
-                </a:tc>
-                <a:tc>
-                  <a:txBody>
-                    <a:bodyPr/>
-                    <a:lstStyle/>
-                    <a:p>
-                      <a:pPr algn="ctr"/>
-                      <a:r>
-                        <a:rPr lang="fr-BE" sz="1400" dirty="0"/>
-                        <a:t>p</a:t>
-                      </a:r>
-                      <a:endParaRPr lang="en-US" sz="1400" dirty="0"/>
-                    </a:p>
-                  </a:txBody>
-                  <a:tcPr/>
-                </a:tc>
-                <a:extLst>
-                  <a:ext uri="{0D108BD9-81ED-4DB2-BD59-A6C34878D82A}">
-                    <a16:rowId xmlns:a16="http://schemas.microsoft.com/office/drawing/2014/main" val="10015"/>
-                  </a:ext>
-                </a:extLst>
-              </a:tr>
-            </a:tbl>
-          </a:graphicData>
-        </a:graphic>
-      </p:graphicFrame>
-      <p:sp>
-        <p:nvSpPr>
-          <p:cNvPr id="6" name="Footer Placeholder 5"/>
-          <p:cNvSpPr>
-            <a:spLocks noGrp="1"/>
-          </p:cNvSpPr>
-          <p:nvPr>
-            <p:ph type="ftr" sz="quarter" idx="4294967295"/>
-          </p:nvPr>
-        </p:nvSpPr>
-        <p:spPr>
-          <a:xfrm>
-            <a:off x="0" y="0"/>
-            <a:ext cx="0" cy="0"/>
-          </a:xfrm>
-        </p:spPr>
-        <p:txBody>
-          <a:bodyPr/>
-          <a:lstStyle/>
-          <a:p>
-            <a:r>
-              <a:rPr lang="en-US"/>
-              <a:t>Decomposition model</a:t>
-            </a:r>
-            <a:endParaRPr lang="en-US" dirty="0"/>
-          </a:p>
-        </p:txBody>
-      </p:sp>
-      <p:sp>
-        <p:nvSpPr>
-          <p:cNvPr id="3" name="Rectangle 2"/>
-          <p:cNvSpPr/>
-          <p:nvPr/>
-        </p:nvSpPr>
-        <p:spPr>
-          <a:xfrm>
-            <a:off x="2207568" y="6048574"/>
-            <a:ext cx="4279252" cy="307777"/>
-          </a:xfrm>
-          <a:prstGeom prst="rect">
-            <a:avLst/>
-          </a:prstGeom>
-        </p:spPr>
-        <p:txBody>
-          <a:bodyPr wrap="square">
-            <a:spAutoFit/>
-          </a:bodyPr>
-          <a:lstStyle/>
-          <a:p>
-            <a:r>
-              <a:rPr lang="fr-BE" dirty="0"/>
-              <a:t>p stands for </a:t>
-            </a:r>
-            <a:r>
-              <a:rPr lang="fr-BE" dirty="0" err="1"/>
-              <a:t>partially</a:t>
-            </a:r>
-            <a:endParaRPr lang="en-US" dirty="0"/>
-          </a:p>
-        </p:txBody>
-      </p:sp>
+              </p:cNvPr>
+              <p:cNvSpPr>
+                <a:spLocks noGrp="1" noRot="1" noChangeAspect="1" noMove="1" noResize="1" noEditPoints="1" noAdjustHandles="1" noChangeArrowheads="1" noChangeShapeType="1" noTextEdit="1"/>
+              </p:cNvSpPr>
+              <p:nvPr>
+                <p:ph sz="half" idx="2"/>
+              </p:nvPr>
+            </p:nvSpPr>
+            <p:spPr>
+              <a:xfrm>
+                <a:off x="1035424" y="1388854"/>
+                <a:ext cx="10450895" cy="4707273"/>
+              </a:xfrm>
+              <a:blipFill>
+                <a:blip r:embed="rId2"/>
+                <a:stretch>
+                  <a:fillRect l="-817" t="-2720"/>
+                </a:stretch>
+              </a:blipFill>
+            </p:spPr>
+            <p:txBody>
+              <a:bodyPr/>
+              <a:lstStyle/>
+              <a:p>
+                <a:r>
+                  <a:rPr lang="en-GB">
+                    <a:noFill/>
+                  </a:rPr>
+                  <a:t> </a:t>
+                </a:r>
+              </a:p>
+            </p:txBody>
+          </p:sp>
+        </mc:Fallback>
+      </mc:AlternateContent>
     </p:spTree>
     <p:extLst>
       <p:ext uri="{BB962C8B-B14F-4D97-AF65-F5344CB8AC3E}">
-        <p14:creationId xmlns:p14="http://schemas.microsoft.com/office/powerpoint/2010/main" val="481437914"/>
+        <p14:creationId xmlns:p14="http://schemas.microsoft.com/office/powerpoint/2010/main" val="3710229063"/>
       </p:ext>
     </p:extLst>
   </p:cSld>
@@ -9475,836 +8214,6 @@
         </p:nvSpPr>
         <p:spPr/>
         <p:txBody>
-          <a:bodyPr/>
-          <a:lstStyle/>
-          <a:p>
-            <a:r>
-              <a:rPr lang="fr-BE" dirty="0" err="1"/>
-              <a:t>Decomposition</a:t>
-            </a:r>
-            <a:endParaRPr lang="en-US" dirty="0"/>
-          </a:p>
-        </p:txBody>
-      </p:sp>
-      <p:sp>
-        <p:nvSpPr>
-          <p:cNvPr id="4" name="Espace réservé du numéro de diapositive 3">
-            <a:extLst>
-              <a:ext uri="{FF2B5EF4-FFF2-40B4-BE49-F238E27FC236}">
-                <a16:creationId xmlns:a16="http://schemas.microsoft.com/office/drawing/2014/main" id="{8BF15B58-F279-AFB1-58A0-43CFF5F27257}"/>
-              </a:ext>
-            </a:extLst>
-          </p:cNvPr>
-          <p:cNvSpPr>
-            <a:spLocks noGrp="1"/>
-          </p:cNvSpPr>
-          <p:nvPr>
-            <p:ph type="sldNum" idx="12"/>
-          </p:nvPr>
-        </p:nvSpPr>
-        <p:spPr/>
-        <p:txBody>
-          <a:bodyPr/>
-          <a:lstStyle/>
-          <a:p>
-            <a:fld id="{627CDA0C-01AE-4E2F-8829-AAF8EAAF9DB3}" type="slidenum">
-              <a:rPr lang="en-US" smtClean="0"/>
-              <a:t>4</a:t>
-            </a:fld>
-            <a:endParaRPr lang="en-US" dirty="0"/>
-          </a:p>
-        </p:txBody>
-      </p:sp>
-      <mc:AlternateContent xmlns:mc="http://schemas.openxmlformats.org/markup-compatibility/2006" xmlns:a14="http://schemas.microsoft.com/office/drawing/2010/main">
-        <mc:Choice Requires="a14">
-          <p:sp>
-            <p:nvSpPr>
-              <p:cNvPr id="3" name="Content Placeholder 2"/>
-              <p:cNvSpPr>
-                <a:spLocks noGrp="1"/>
-              </p:cNvSpPr>
-              <p:nvPr>
-                <p:ph sz="half" idx="2"/>
-              </p:nvPr>
-            </p:nvSpPr>
-            <p:spPr/>
-            <p:txBody>
-              <a:bodyPr/>
-              <a:lstStyle/>
-              <a:p>
-                <a:r>
-                  <a:rPr lang="en-US" sz="2800" dirty="0"/>
-                  <a:t>Additive case:</a:t>
-                </a:r>
-              </a:p>
-              <a:p>
-                <a:pPr marL="0" indent="0">
-                  <a:buNone/>
-                </a:pPr>
-                <a14:m>
-                  <m:oMathPara xmlns:m="http://schemas.openxmlformats.org/officeDocument/2006/math">
-                    <m:oMath>
-                      <m:sSub>
-                        <m:sSubPr>
-                          <m:ctrlPr>
-                            <a:rPr lang="en-US" sz="2800" i="1">
-                              <a:latin typeface="Cambria Math"/>
-                            </a:rPr>
-                          </m:ctrlPr>
-                        </m:sSubPr>
-                        <m:e>
-                          <m:r>
-                            <a:rPr lang="en-US" sz="2800" i="1">
-                              <a:latin typeface="Cambria Math"/>
-                            </a:rPr>
-                            <m:t>𝛾</m:t>
-                          </m:r>
-                        </m:e>
-                        <m:sub>
-                          <m:r>
-                            <a:rPr lang="en-US" sz="2800" i="1">
-                              <a:latin typeface="Cambria Math"/>
-                            </a:rPr>
-                            <m:t>𝑢</m:t>
-                          </m:r>
-                        </m:sub>
-                      </m:sSub>
-                      <m:r>
-                        <a:rPr lang="en-US" sz="2800" i="1">
-                          <a:latin typeface="Cambria Math"/>
-                        </a:rPr>
-                        <m:t>∙</m:t>
-                      </m:r>
-                      <m:r>
-                        <a:rPr lang="en-US" sz="2800" i="1">
-                          <a:latin typeface="Cambria Math"/>
-                        </a:rPr>
-                        <m:t>𝑟𝑒</m:t>
-                      </m:r>
-                      <m:sSub>
-                        <m:sSubPr>
-                          <m:ctrlPr>
-                            <a:rPr lang="en-US" sz="2800" i="1">
-                              <a:latin typeface="Cambria Math"/>
-                            </a:rPr>
-                          </m:ctrlPr>
-                        </m:sSubPr>
-                        <m:e>
-                          <m:r>
-                            <a:rPr lang="en-US" sz="2800" i="1">
-                              <a:latin typeface="Cambria Math"/>
-                            </a:rPr>
-                            <m:t>𝑔</m:t>
-                          </m:r>
-                        </m:e>
-                        <m:sub>
-                          <m:r>
-                            <a:rPr lang="en-US" sz="2800" i="1">
-                              <a:latin typeface="Cambria Math"/>
-                            </a:rPr>
-                            <m:t>𝑢</m:t>
-                          </m:r>
-                        </m:sub>
-                      </m:sSub>
-                      <m:r>
-                        <a:rPr lang="en-US" sz="2800" i="1">
-                          <a:latin typeface="Cambria Math"/>
-                        </a:rPr>
-                        <m:t>+</m:t>
-                      </m:r>
-                      <m:r>
-                        <a:rPr lang="en-US" sz="2800" i="1">
-                          <a:latin typeface="Cambria Math"/>
-                        </a:rPr>
-                        <m:t>𝜇</m:t>
-                      </m:r>
-                      <m:r>
-                        <a:rPr lang="en-US" sz="2800" i="1">
-                          <a:latin typeface="Cambria Math"/>
-                        </a:rPr>
-                        <m:t>=</m:t>
-                      </m:r>
-                      <m:sSub>
-                        <m:sSubPr>
-                          <m:ctrlPr>
-                            <a:rPr lang="en-US" sz="2800" i="1">
-                              <a:latin typeface="Cambria Math"/>
-                            </a:rPr>
-                          </m:ctrlPr>
-                        </m:sSubPr>
-                        <m:e>
-                          <m:r>
-                            <a:rPr lang="en-US" sz="2800" i="1">
-                              <a:latin typeface="Cambria Math"/>
-                            </a:rPr>
-                            <m:t>𝑦</m:t>
-                          </m:r>
-                        </m:e>
-                        <m:sub>
-                          <m:r>
-                            <a:rPr lang="en-US" sz="2800" i="1">
-                              <a:latin typeface="Cambria Math"/>
-                            </a:rPr>
-                            <m:t>𝑐𝑚𝑝</m:t>
-                          </m:r>
-                        </m:sub>
-                      </m:sSub>
-                      <m:r>
-                        <a:rPr lang="en-US" sz="2800" i="1">
-                          <a:latin typeface="Cambria Math"/>
-                        </a:rPr>
-                        <m:t>=</m:t>
-                      </m:r>
-                      <m:sSub>
-                        <m:sSubPr>
-                          <m:ctrlPr>
-                            <a:rPr lang="en-US" sz="2800" i="1">
-                              <a:latin typeface="Cambria Math"/>
-                            </a:rPr>
-                          </m:ctrlPr>
-                        </m:sSubPr>
-                        <m:e>
-                          <m:r>
-                            <a:rPr lang="en-US" sz="2800" i="1">
-                              <a:latin typeface="Cambria Math"/>
-                            </a:rPr>
-                            <m:t>𝑡</m:t>
-                          </m:r>
-                        </m:e>
-                        <m:sub>
-                          <m:r>
-                            <a:rPr lang="en-US" sz="2800" i="1">
-                              <a:latin typeface="Cambria Math"/>
-                            </a:rPr>
-                            <m:t>𝑐𝑚𝑝</m:t>
-                          </m:r>
-                        </m:sub>
-                      </m:sSub>
-                      <m:r>
-                        <a:rPr lang="en-US" sz="2800" i="1">
-                          <a:latin typeface="Cambria Math"/>
-                        </a:rPr>
-                        <m:t>+</m:t>
-                      </m:r>
-                      <m:sSub>
-                        <m:sSubPr>
-                          <m:ctrlPr>
-                            <a:rPr lang="en-US" sz="2800" i="1">
-                              <a:latin typeface="Cambria Math"/>
-                            </a:rPr>
-                          </m:ctrlPr>
-                        </m:sSubPr>
-                        <m:e>
-                          <m:r>
-                            <a:rPr lang="en-US" sz="2800" i="1">
-                              <a:latin typeface="Cambria Math"/>
-                            </a:rPr>
-                            <m:t>𝑠</m:t>
-                          </m:r>
-                        </m:e>
-                        <m:sub>
-                          <m:r>
-                            <a:rPr lang="en-US" sz="2800" i="1">
-                              <a:latin typeface="Cambria Math"/>
-                            </a:rPr>
-                            <m:t>𝑐𝑚𝑝</m:t>
-                          </m:r>
-                        </m:sub>
-                      </m:sSub>
-                      <m:r>
-                        <a:rPr lang="en-US" sz="2800" i="1">
-                          <a:latin typeface="Cambria Math"/>
-                        </a:rPr>
-                        <m:t>+</m:t>
-                      </m:r>
-                      <m:sSub>
-                        <m:sSubPr>
-                          <m:ctrlPr>
-                            <a:rPr lang="en-US" sz="2800" i="1">
-                              <a:latin typeface="Cambria Math"/>
-                            </a:rPr>
-                          </m:ctrlPr>
-                        </m:sSubPr>
-                        <m:e>
-                          <m:r>
-                            <a:rPr lang="en-US" sz="2800" i="1">
-                              <a:latin typeface="Cambria Math"/>
-                            </a:rPr>
-                            <m:t>𝑖</m:t>
-                          </m:r>
-                        </m:e>
-                        <m:sub>
-                          <m:r>
-                            <a:rPr lang="en-US" sz="2800" i="1">
-                              <a:latin typeface="Cambria Math"/>
-                            </a:rPr>
-                            <m:t>𝑐𝑚𝑝</m:t>
-                          </m:r>
-                        </m:sub>
-                      </m:sSub>
-                    </m:oMath>
-                  </m:oMathPara>
-                </a14:m>
-                <a:endParaRPr lang="en-US" sz="2800" dirty="0"/>
-              </a:p>
-              <a:p>
-                <a:endParaRPr lang="en-US" sz="2800" dirty="0"/>
-              </a:p>
-              <a:p>
-                <a:r>
-                  <a:rPr lang="en-US" sz="2800" dirty="0"/>
-                  <a:t>Multiplicative case:</a:t>
-                </a:r>
-              </a:p>
-              <a:p>
-                <a:pPr marL="0" indent="0">
-                  <a:buNone/>
-                </a:pPr>
-                <a14:m>
-                  <m:oMathPara xmlns:m="http://schemas.openxmlformats.org/officeDocument/2006/math">
-                    <m:oMath>
-                      <m:sSub>
-                        <m:sSubPr>
-                          <m:ctrlPr>
-                            <a:rPr lang="en-US" sz="2800" i="1">
-                              <a:latin typeface="Cambria Math"/>
-                            </a:rPr>
-                          </m:ctrlPr>
-                        </m:sSubPr>
-                        <m:e>
-                          <m:r>
-                            <a:rPr lang="en-US" sz="2800" i="1">
-                              <a:latin typeface="Cambria Math"/>
-                            </a:rPr>
-                            <m:t>𝛾</m:t>
-                          </m:r>
-                        </m:e>
-                        <m:sub>
-                          <m:r>
-                            <a:rPr lang="en-US" sz="2800" i="1">
-                              <a:latin typeface="Cambria Math"/>
-                            </a:rPr>
-                            <m:t>𝑢</m:t>
-                          </m:r>
-                        </m:sub>
-                      </m:sSub>
-                      <m:r>
-                        <a:rPr lang="en-US" sz="2800" i="1">
-                          <a:latin typeface="Cambria Math"/>
-                        </a:rPr>
-                        <m:t>∙</m:t>
-                      </m:r>
-                      <m:r>
-                        <a:rPr lang="en-US" sz="2800" i="1">
-                          <a:latin typeface="Cambria Math"/>
-                        </a:rPr>
-                        <m:t>𝑟𝑒</m:t>
-                      </m:r>
-                      <m:sSub>
-                        <m:sSubPr>
-                          <m:ctrlPr>
-                            <a:rPr lang="en-US" sz="2800" i="1">
-                              <a:latin typeface="Cambria Math"/>
-                            </a:rPr>
-                          </m:ctrlPr>
-                        </m:sSubPr>
-                        <m:e>
-                          <m:r>
-                            <a:rPr lang="en-US" sz="2800" i="1">
-                              <a:latin typeface="Cambria Math"/>
-                            </a:rPr>
-                            <m:t>𝑔</m:t>
-                          </m:r>
-                        </m:e>
-                        <m:sub>
-                          <m:r>
-                            <a:rPr lang="en-US" sz="2800" i="1">
-                              <a:latin typeface="Cambria Math"/>
-                            </a:rPr>
-                            <m:t>𝑢</m:t>
-                          </m:r>
-                        </m:sub>
-                      </m:sSub>
-                      <m:r>
-                        <a:rPr lang="en-US" sz="2800" i="1">
-                          <a:latin typeface="Cambria Math"/>
-                        </a:rPr>
-                        <m:t>+</m:t>
-                      </m:r>
-                      <m:r>
-                        <a:rPr lang="en-US" sz="2800" i="1">
-                          <a:latin typeface="Cambria Math"/>
-                        </a:rPr>
-                        <m:t>𝜇</m:t>
-                      </m:r>
-                      <m:r>
-                        <a:rPr lang="en-US" sz="2800" i="1">
-                          <a:latin typeface="Cambria Math"/>
-                        </a:rPr>
-                        <m:t>=</m:t>
-                      </m:r>
-                      <m:sSub>
-                        <m:sSubPr>
-                          <m:ctrlPr>
-                            <a:rPr lang="en-US" sz="2800" i="1">
-                              <a:latin typeface="Cambria Math"/>
-                            </a:rPr>
-                          </m:ctrlPr>
-                        </m:sSubPr>
-                        <m:e>
-                          <m:r>
-                            <a:rPr lang="en-US" sz="2800" i="1">
-                              <a:latin typeface="Cambria Math"/>
-                            </a:rPr>
-                            <m:t>𝑦</m:t>
-                          </m:r>
-                        </m:e>
-                        <m:sub>
-                          <m:r>
-                            <a:rPr lang="en-US" sz="2800" i="1">
-                              <a:latin typeface="Cambria Math"/>
-                            </a:rPr>
-                            <m:t>𝑙𝑖𝑛</m:t>
-                          </m:r>
-                        </m:sub>
-                      </m:sSub>
-                      <m:r>
-                        <a:rPr lang="en-US" sz="2800" i="1">
-                          <a:latin typeface="Cambria Math"/>
-                        </a:rPr>
-                        <m:t>=</m:t>
-                      </m:r>
-                      <m:sSub>
-                        <m:sSubPr>
-                          <m:ctrlPr>
-                            <a:rPr lang="en-US" sz="2800" i="1">
-                              <a:latin typeface="Cambria Math"/>
-                            </a:rPr>
-                          </m:ctrlPr>
-                        </m:sSubPr>
-                        <m:e>
-                          <m:r>
-                            <a:rPr lang="en-US" sz="2800" i="1">
-                              <a:latin typeface="Cambria Math"/>
-                            </a:rPr>
-                            <m:t>𝑡</m:t>
-                          </m:r>
-                        </m:e>
-                        <m:sub>
-                          <m:r>
-                            <a:rPr lang="en-US" sz="2800" i="1">
-                              <a:latin typeface="Cambria Math"/>
-                            </a:rPr>
-                            <m:t>𝑙𝑖𝑛</m:t>
-                          </m:r>
-                        </m:sub>
-                      </m:sSub>
-                      <m:r>
-                        <a:rPr lang="en-US" sz="2800" i="1">
-                          <a:latin typeface="Cambria Math"/>
-                        </a:rPr>
-                        <m:t>+</m:t>
-                      </m:r>
-                      <m:sSub>
-                        <m:sSubPr>
-                          <m:ctrlPr>
-                            <a:rPr lang="en-US" sz="2800" i="1">
-                              <a:latin typeface="Cambria Math"/>
-                            </a:rPr>
-                          </m:ctrlPr>
-                        </m:sSubPr>
-                        <m:e>
-                          <m:r>
-                            <a:rPr lang="en-US" sz="2800" i="1">
-                              <a:latin typeface="Cambria Math"/>
-                            </a:rPr>
-                            <m:t>𝑠</m:t>
-                          </m:r>
-                        </m:e>
-                        <m:sub>
-                          <m:r>
-                            <a:rPr lang="en-US" sz="2800" i="1">
-                              <a:latin typeface="Cambria Math"/>
-                            </a:rPr>
-                            <m:t>𝑙𝑖𝑛</m:t>
-                          </m:r>
-                        </m:sub>
-                      </m:sSub>
-                      <m:r>
-                        <a:rPr lang="en-US" sz="2800" i="1">
-                          <a:latin typeface="Cambria Math"/>
-                        </a:rPr>
-                        <m:t>+</m:t>
-                      </m:r>
-                      <m:sSub>
-                        <m:sSubPr>
-                          <m:ctrlPr>
-                            <a:rPr lang="en-US" sz="2800" i="1">
-                              <a:latin typeface="Cambria Math"/>
-                            </a:rPr>
-                          </m:ctrlPr>
-                        </m:sSubPr>
-                        <m:e>
-                          <m:r>
-                            <a:rPr lang="en-US" sz="2800" i="1">
-                              <a:latin typeface="Cambria Math"/>
-                            </a:rPr>
-                            <m:t>𝑖</m:t>
-                          </m:r>
-                        </m:e>
-                        <m:sub>
-                          <m:r>
-                            <a:rPr lang="en-US" sz="2800" i="1">
-                              <a:latin typeface="Cambria Math"/>
-                            </a:rPr>
-                            <m:t>𝑙𝑖𝑛</m:t>
-                          </m:r>
-                        </m:sub>
-                      </m:sSub>
-                    </m:oMath>
-                  </m:oMathPara>
-                </a14:m>
-                <a:endParaRPr lang="en-US" sz="2800" dirty="0"/>
-              </a:p>
-              <a:p>
-                <a:pPr marL="0" indent="0">
-                  <a:buNone/>
-                </a:pPr>
-                <a14:m>
-                  <m:oMathPara xmlns:m="http://schemas.openxmlformats.org/officeDocument/2006/math">
-                    <m:oMath>
-                      <m:r>
-                        <a:rPr lang="en-US" sz="2800" i="1">
-                          <a:latin typeface="Cambria Math"/>
-                        </a:rPr>
-                        <m:t>𝑒𝑥𝑝</m:t>
-                      </m:r>
-                      <m:d>
-                        <m:dPr>
-                          <m:ctrlPr>
-                            <a:rPr lang="en-US" sz="2800" i="1">
-                              <a:latin typeface="Cambria Math" panose="02040503050406030204" pitchFamily="18" charset="0"/>
-                            </a:rPr>
-                          </m:ctrlPr>
-                        </m:dPr>
-                        <m:e>
-                          <m:sSub>
-                            <m:sSubPr>
-                              <m:ctrlPr>
-                                <a:rPr lang="en-US" sz="2800" i="1">
-                                  <a:latin typeface="Cambria Math"/>
-                                </a:rPr>
-                              </m:ctrlPr>
-                            </m:sSubPr>
-                            <m:e>
-                              <m:r>
-                                <a:rPr lang="en-US" sz="2800" i="1">
-                                  <a:latin typeface="Cambria Math"/>
-                                </a:rPr>
-                                <m:t>𝛾</m:t>
-                              </m:r>
-                            </m:e>
-                            <m:sub>
-                              <m:r>
-                                <a:rPr lang="en-US" sz="2800" i="1">
-                                  <a:latin typeface="Cambria Math"/>
-                                </a:rPr>
-                                <m:t>𝑢</m:t>
-                              </m:r>
-                            </m:sub>
-                          </m:sSub>
-                          <m:r>
-                            <a:rPr lang="en-US" sz="2800" i="1">
-                              <a:latin typeface="Cambria Math"/>
-                            </a:rPr>
-                            <m:t>∙</m:t>
-                          </m:r>
-                          <m:r>
-                            <a:rPr lang="en-US" sz="2800" i="1">
-                              <a:latin typeface="Cambria Math"/>
-                            </a:rPr>
-                            <m:t>𝑟𝑒</m:t>
-                          </m:r>
-                          <m:sSub>
-                            <m:sSubPr>
-                              <m:ctrlPr>
-                                <a:rPr lang="en-US" sz="2800" i="1">
-                                  <a:latin typeface="Cambria Math"/>
-                                </a:rPr>
-                              </m:ctrlPr>
-                            </m:sSubPr>
-                            <m:e>
-                              <m:r>
-                                <a:rPr lang="en-US" sz="2800" i="1">
-                                  <a:latin typeface="Cambria Math"/>
-                                </a:rPr>
-                                <m:t>𝑔</m:t>
-                              </m:r>
-                            </m:e>
-                            <m:sub>
-                              <m:r>
-                                <a:rPr lang="en-US" sz="2800" i="1">
-                                  <a:latin typeface="Cambria Math"/>
-                                </a:rPr>
-                                <m:t>𝑢</m:t>
-                              </m:r>
-                            </m:sub>
-                          </m:sSub>
-                          <m:r>
-                            <a:rPr lang="en-US" sz="2800" i="1">
-                              <a:latin typeface="Cambria Math"/>
-                            </a:rPr>
-                            <m:t>+</m:t>
-                          </m:r>
-                          <m:r>
-                            <a:rPr lang="en-US" sz="2800" i="1">
-                              <a:latin typeface="Cambria Math"/>
-                            </a:rPr>
-                            <m:t>𝜇</m:t>
-                          </m:r>
-                        </m:e>
-                      </m:d>
-                      <m:r>
-                        <a:rPr lang="en-US" sz="2800" i="1">
-                          <a:latin typeface="Cambria Math"/>
-                        </a:rPr>
-                        <m:t>=</m:t>
-                      </m:r>
-                      <m:sSub>
-                        <m:sSubPr>
-                          <m:ctrlPr>
-                            <a:rPr lang="en-US" sz="2800" i="1">
-                              <a:latin typeface="Cambria Math"/>
-                            </a:rPr>
-                          </m:ctrlPr>
-                        </m:sSubPr>
-                        <m:e>
-                          <m:r>
-                            <a:rPr lang="en-US" sz="2800" i="1">
-                              <a:latin typeface="Cambria Math"/>
-                            </a:rPr>
-                            <m:t>𝑦</m:t>
-                          </m:r>
-                        </m:e>
-                        <m:sub>
-                          <m:r>
-                            <a:rPr lang="en-US" sz="2800" i="1">
-                              <a:latin typeface="Cambria Math"/>
-                            </a:rPr>
-                            <m:t>𝑐𝑚𝑝</m:t>
-                          </m:r>
-                        </m:sub>
-                      </m:sSub>
-                      <m:r>
-                        <a:rPr lang="en-US" sz="2800" i="1">
-                          <a:latin typeface="Cambria Math"/>
-                        </a:rPr>
-                        <m:t>=</m:t>
-                      </m:r>
-                      <m:sSub>
-                        <m:sSubPr>
-                          <m:ctrlPr>
-                            <a:rPr lang="en-US" sz="2800" i="1">
-                              <a:latin typeface="Cambria Math"/>
-                            </a:rPr>
-                          </m:ctrlPr>
-                        </m:sSubPr>
-                        <m:e>
-                          <m:r>
-                            <a:rPr lang="en-US" sz="2800" i="1">
-                              <a:latin typeface="Cambria Math"/>
-                            </a:rPr>
-                            <m:t>𝑡</m:t>
-                          </m:r>
-                        </m:e>
-                        <m:sub>
-                          <m:r>
-                            <a:rPr lang="en-US" sz="2800" i="1">
-                              <a:latin typeface="Cambria Math"/>
-                            </a:rPr>
-                            <m:t>𝑐𝑚𝑝</m:t>
-                          </m:r>
-                        </m:sub>
-                      </m:sSub>
-                      <m:r>
-                        <a:rPr lang="en-US" sz="2800" i="1">
-                          <a:latin typeface="Cambria Math"/>
-                        </a:rPr>
-                        <m:t>∙</m:t>
-                      </m:r>
-                      <m:sSub>
-                        <m:sSubPr>
-                          <m:ctrlPr>
-                            <a:rPr lang="en-US" sz="2800" i="1">
-                              <a:latin typeface="Cambria Math"/>
-                            </a:rPr>
-                          </m:ctrlPr>
-                        </m:sSubPr>
-                        <m:e>
-                          <m:r>
-                            <a:rPr lang="en-US" sz="2800" i="1">
-                              <a:latin typeface="Cambria Math"/>
-                            </a:rPr>
-                            <m:t>𝑠</m:t>
-                          </m:r>
-                        </m:e>
-                        <m:sub>
-                          <m:r>
-                            <a:rPr lang="en-US" sz="2800" i="1">
-                              <a:latin typeface="Cambria Math"/>
-                            </a:rPr>
-                            <m:t>𝑐𝑚𝑝</m:t>
-                          </m:r>
-                        </m:sub>
-                      </m:sSub>
-                      <m:r>
-                        <a:rPr lang="en-US" sz="2800" i="1">
-                          <a:latin typeface="Cambria Math"/>
-                        </a:rPr>
-                        <m:t>∙</m:t>
-                      </m:r>
-                      <m:sSub>
-                        <m:sSubPr>
-                          <m:ctrlPr>
-                            <a:rPr lang="en-US" sz="2800" i="1">
-                              <a:latin typeface="Cambria Math"/>
-                            </a:rPr>
-                          </m:ctrlPr>
-                        </m:sSubPr>
-                        <m:e>
-                          <m:r>
-                            <a:rPr lang="en-US" sz="2800" i="1">
-                              <a:latin typeface="Cambria Math"/>
-                            </a:rPr>
-                            <m:t>𝑖</m:t>
-                          </m:r>
-                        </m:e>
-                        <m:sub>
-                          <m:r>
-                            <a:rPr lang="en-US" sz="2800" i="1">
-                              <a:latin typeface="Cambria Math"/>
-                            </a:rPr>
-                            <m:t>𝑐𝑚𝑝</m:t>
-                          </m:r>
-                        </m:sub>
-                      </m:sSub>
-                    </m:oMath>
-                  </m:oMathPara>
-                </a14:m>
-                <a:endParaRPr lang="en-US" sz="2800" dirty="0"/>
-              </a:p>
-              <a:p>
-                <a:pPr marL="0" indent="0">
-                  <a:buNone/>
-                </a:pPr>
-                <a:endParaRPr lang="en-US" dirty="0"/>
-              </a:p>
-            </p:txBody>
-          </p:sp>
-        </mc:Choice>
-        <mc:Fallback xmlns="">
-          <p:sp>
-            <p:nvSpPr>
-              <p:cNvPr id="3" name="Content Placeholder 2"/>
-              <p:cNvSpPr>
-                <a:spLocks noGrp="1" noRot="1" noChangeAspect="1" noMove="1" noResize="1" noEditPoints="1" noAdjustHandles="1" noChangeArrowheads="1" noChangeShapeType="1" noTextEdit="1"/>
-              </p:cNvSpPr>
-              <p:nvPr>
-                <p:ph sz="half" idx="2"/>
-              </p:nvPr>
-            </p:nvSpPr>
-            <p:spPr>
-              <a:blipFill>
-                <a:blip r:embed="rId2"/>
-                <a:stretch>
-                  <a:fillRect l="-754" t="-2332"/>
-                </a:stretch>
-              </a:blipFill>
-            </p:spPr>
-            <p:txBody>
-              <a:bodyPr/>
-              <a:lstStyle/>
-              <a:p>
-                <a:r>
-                  <a:rPr lang="en-GB">
-                    <a:noFill/>
-                  </a:rPr>
-                  <a:t> </a:t>
-                </a:r>
-              </a:p>
-            </p:txBody>
-          </p:sp>
-        </mc:Fallback>
-      </mc:AlternateContent>
-      <p:sp>
-        <p:nvSpPr>
-          <p:cNvPr id="5" name="Footer Placeholder 4"/>
-          <p:cNvSpPr>
-            <a:spLocks noGrp="1"/>
-          </p:cNvSpPr>
-          <p:nvPr>
-            <p:ph type="ftr" sz="quarter" idx="4294967295"/>
-          </p:nvPr>
-        </p:nvSpPr>
-        <p:spPr>
-          <a:xfrm>
-            <a:off x="0" y="0"/>
-            <a:ext cx="0" cy="0"/>
-          </a:xfrm>
-        </p:spPr>
-        <p:txBody>
-          <a:bodyPr/>
-          <a:lstStyle/>
-          <a:p>
-            <a:r>
-              <a:rPr lang="en-US"/>
-              <a:t>Decomposition model</a:t>
-            </a:r>
-          </a:p>
-        </p:txBody>
-      </p:sp>
-    </p:spTree>
-    <p:extLst>
-      <p:ext uri="{BB962C8B-B14F-4D97-AF65-F5344CB8AC3E}">
-        <p14:creationId xmlns:p14="http://schemas.microsoft.com/office/powerpoint/2010/main" val="289984010"/>
-      </p:ext>
-    </p:extLst>
-  </p:cSld>
-  <p:clrMapOvr>
-    <a:masterClrMapping/>
-  </p:clrMapOvr>
-</p:sld>
-</file>
-
-<file path=ppt/slides/slide5.xml><?xml version="1.0" encoding="utf-8"?>
-<p:sld xmlns:a="http://schemas.openxmlformats.org/drawingml/2006/main" xmlns:r="http://schemas.openxmlformats.org/officeDocument/2006/relationships" xmlns:p="http://schemas.openxmlformats.org/presentationml/2006/main">
-  <p:cSld>
-    <p:spTree>
-      <p:nvGrpSpPr>
-        <p:cNvPr id="1" name=""/>
-        <p:cNvGrpSpPr/>
-        <p:nvPr/>
-      </p:nvGrpSpPr>
-      <p:grpSpPr>
-        <a:xfrm>
-          <a:off x="0" y="0"/>
-          <a:ext cx="0" cy="0"/>
-          <a:chOff x="0" y="0"/>
-          <a:chExt cx="0" cy="0"/>
-        </a:xfrm>
-      </p:grpSpPr>
-      <p:sp>
-        <p:nvSpPr>
-          <p:cNvPr id="2" name="Title 1"/>
-          <p:cNvSpPr>
-            <a:spLocks noGrp="1"/>
-          </p:cNvSpPr>
-          <p:nvPr>
-            <p:ph type="title"/>
-          </p:nvPr>
-        </p:nvSpPr>
-        <p:spPr/>
-        <p:txBody>
           <a:bodyPr>
             <a:normAutofit/>
           </a:bodyPr>
@@ -10312,7 +8221,7 @@
           <a:p>
             <a:r>
               <a:rPr lang="fr-BE" dirty="0"/>
-              <a:t>Final </a:t>
+              <a:t>2 Final </a:t>
             </a:r>
             <a:r>
               <a:rPr lang="fr-BE" dirty="0" err="1"/>
@@ -10345,14 +8254,14 @@
           <a:p>
             <a:fld id="{627CDA0C-01AE-4E2F-8829-AAF8EAAF9DB3}" type="slidenum">
               <a:rPr lang="en-US" smtClean="0"/>
-              <a:t>5</a:t>
+              <a:t>4</a:t>
             </a:fld>
             <a:endParaRPr lang="en-US" dirty="0"/>
           </a:p>
         </p:txBody>
       </p:sp>
-      <mc:AlternateContent xmlns:mc="http://schemas.openxmlformats.org/markup-compatibility/2006" xmlns:a14="http://schemas.microsoft.com/office/drawing/2010/main">
-        <mc:Choice Requires="a14">
+      <mc:AlternateContent xmlns:mc="http://schemas.openxmlformats.org/markup-compatibility/2006">
+        <mc:Choice xmlns:a14="http://schemas.microsoft.com/office/drawing/2010/main" Requires="a14">
           <p:sp>
             <p:nvSpPr>
               <p:cNvPr id="3" name="Content Placeholder 2"/>
@@ -10366,7 +8275,7 @@
             <p:spPr/>
             <p:txBody>
               <a:bodyPr>
-                <a:normAutofit fontScale="70000" lnSpcReduction="20000"/>
+                <a:normAutofit/>
               </a:bodyPr>
               <a:lstStyle/>
               <a:p>
@@ -10383,13 +8292,13 @@
                 <a14:m>
                   <m:oMath xmlns:m="http://schemas.openxmlformats.org/officeDocument/2006/math">
                     <m:r>
-                      <a:rPr lang="en-US" sz="2200" i="1">
+                      <a:rPr lang="en-US" sz="2000" i="1">
                         <a:latin typeface="Cambria Math"/>
                       </a:rPr>
                       <m:t>𝑡</m:t>
                     </m:r>
                     <m:r>
-                      <a:rPr lang="en-US" sz="2200" i="1">
+                      <a:rPr lang="en-US" sz="2000" i="1">
                         <a:latin typeface="Cambria Math"/>
                       </a:rPr>
                       <m:t>=</m:t>
@@ -10397,20 +8306,51 @@
                     <m:sSub>
                       <m:sSubPr>
                         <m:ctrlPr>
-                          <a:rPr lang="fr-BE" sz="2200" i="1">
-                            <a:latin typeface="Cambria Math" panose="02040503050406030204" pitchFamily="18" charset="0"/>
+                          <a:rPr lang="en-US" sz="2000" i="1">
+                            <a:latin typeface="Cambria Math"/>
                           </a:rPr>
                         </m:ctrlPr>
                       </m:sSubPr>
                       <m:e>
                         <m:r>
-                          <a:rPr lang="fr-BE" sz="2200" i="1">
+                          <a:rPr lang="en-US" sz="2000" i="1">
+                            <a:latin typeface="Cambria Math"/>
+                          </a:rPr>
+                          <m:t>𝑡</m:t>
+                        </m:r>
+                      </m:e>
+                      <m:sub>
+                        <m:r>
+                          <a:rPr lang="fr-BE" sz="2000" b="0" i="1" smtClean="0">
+                            <a:latin typeface="Cambria Math" panose="02040503050406030204" pitchFamily="18" charset="0"/>
+                          </a:rPr>
+                          <m:t>𝑙𝑖𝑛</m:t>
+                        </m:r>
+                      </m:sub>
+                    </m:sSub>
+                    <m:sSub>
+                      <m:sSubPr>
+                        <m:ctrlPr>
+                          <a:rPr lang="fr-BE" sz="2000" b="0" i="1" smtClean="0">
+                            <a:latin typeface="Cambria Math" panose="02040503050406030204" pitchFamily="18" charset="0"/>
+                          </a:rPr>
+                        </m:ctrlPr>
+                      </m:sSubPr>
+                      <m:e>
+                        <m:r>
+                          <a:rPr lang="fr-BE" sz="2000" b="0" i="1" smtClean="0">
+                            <a:latin typeface="Cambria Math" panose="02040503050406030204" pitchFamily="18" charset="0"/>
+                          </a:rPr>
+                          <m:t>+ </m:t>
+                        </m:r>
+                        <m:r>
+                          <a:rPr lang="fr-BE" sz="2000" i="1">
                             <a:latin typeface="Cambria Math" panose="02040503050406030204" pitchFamily="18" charset="0"/>
                           </a:rPr>
                           <m:t>𝑂</m:t>
                         </m:r>
                         <m:r>
-                          <a:rPr lang="en-US" sz="2200" i="1">
+                          <a:rPr lang="en-US" sz="2000" i="1">
                             <a:latin typeface="Cambria Math"/>
                           </a:rPr>
                           <m:t>𝑢𝑡</m:t>
@@ -10418,7 +8358,7 @@
                       </m:e>
                       <m:sub>
                         <m:r>
-                          <a:rPr lang="en-US" sz="2200" i="1">
+                          <a:rPr lang="en-US" sz="2000" i="1">
                             <a:latin typeface="Cambria Math"/>
                           </a:rPr>
                           <m:t>𝑡</m:t>
@@ -10426,7 +8366,7 @@
                       </m:sub>
                     </m:sSub>
                     <m:r>
-                      <a:rPr lang="en-US" sz="2200" i="1">
+                      <a:rPr lang="en-US" sz="2000" i="1">
                         <a:latin typeface="Cambria Math"/>
                       </a:rPr>
                       <m:t>+ </m:t>
@@ -10434,20 +8374,20 @@
                     <m:sSub>
                       <m:sSubPr>
                         <m:ctrlPr>
-                          <a:rPr lang="fr-BE" sz="2200" i="1">
+                          <a:rPr lang="fr-BE" sz="2000" i="1">
                             <a:latin typeface="Cambria Math" panose="02040503050406030204" pitchFamily="18" charset="0"/>
                           </a:rPr>
                         </m:ctrlPr>
                       </m:sSubPr>
                       <m:e>
                         <m:r>
-                          <a:rPr lang="fr-BE" sz="2200" i="1">
+                          <a:rPr lang="fr-BE" sz="2000" i="1">
                             <a:latin typeface="Cambria Math" panose="02040503050406030204" pitchFamily="18" charset="0"/>
                           </a:rPr>
                           <m:t>𝑅</m:t>
                         </m:r>
                         <m:r>
-                          <a:rPr lang="en-US" sz="2200" i="1">
+                          <a:rPr lang="en-US" sz="2000" i="1">
                             <a:latin typeface="Cambria Math"/>
                           </a:rPr>
                           <m:t>𝑒𝑔</m:t>
@@ -10455,47 +8395,16 @@
                       </m:e>
                       <m:sub>
                         <m:r>
-                          <a:rPr lang="en-US" sz="2200" i="1">
+                          <a:rPr lang="en-US" sz="2000" i="1">
                             <a:latin typeface="Cambria Math"/>
                           </a:rPr>
                           <m:t>𝑡</m:t>
-                        </m:r>
-                      </m:sub>
-                    </m:sSub>
-                    <m:r>
-                      <a:rPr lang="en-US" sz="2200" i="1">
-                        <a:latin typeface="Cambria Math"/>
-                      </a:rPr>
-                      <m:t>+</m:t>
-                    </m:r>
-                    <m:sSub>
-                      <m:sSubPr>
-                        <m:ctrlPr>
-                          <a:rPr lang="en-US" sz="2200" i="1">
-                            <a:latin typeface="Cambria Math"/>
-                          </a:rPr>
-                        </m:ctrlPr>
-                      </m:sSubPr>
-                      <m:e>
-                        <m:r>
-                          <a:rPr lang="en-US" sz="2200" i="1">
-                            <a:latin typeface="Cambria Math"/>
-                          </a:rPr>
-                          <m:t>𝑡</m:t>
-                        </m:r>
-                      </m:e>
-                      <m:sub>
-                        <m:r>
-                          <a:rPr lang="en-US" sz="2200" i="1">
-                            <a:latin typeface="Cambria Math"/>
-                          </a:rPr>
-                          <m:t>𝑐𝑚𝑝</m:t>
                         </m:r>
                       </m:sub>
                     </m:sSub>
                   </m:oMath>
                 </a14:m>
-                <a:endParaRPr lang="en-US" sz="2200" dirty="0"/>
+                <a:endParaRPr lang="en-US" sz="2000" dirty="0"/>
               </a:p>
               <a:p>
                 <a:pPr lvl="1">
@@ -10505,31 +8414,62 @@
                 <a14:m>
                   <m:oMath xmlns:m="http://schemas.openxmlformats.org/officeDocument/2006/math">
                     <m:r>
-                      <a:rPr lang="en-US" sz="2200" i="1">
+                      <a:rPr lang="en-US" sz="2000" i="1">
                         <a:latin typeface="Cambria Math"/>
                       </a:rPr>
                       <m:t>𝑠</m:t>
                     </m:r>
                     <m:r>
-                      <a:rPr lang="en-US" sz="2200" i="1">
+                      <a:rPr lang="en-US" sz="2000" i="1">
                         <a:latin typeface="Cambria Math"/>
                       </a:rPr>
                       <m:t>=</m:t>
                     </m:r>
+                    <m:sSub>
+                      <m:sSubPr>
+                        <m:ctrlPr>
+                          <a:rPr lang="en-US" sz="2000" i="1">
+                            <a:latin typeface="Cambria Math"/>
+                          </a:rPr>
+                        </m:ctrlPr>
+                      </m:sSubPr>
+                      <m:e>
+                        <m:r>
+                          <a:rPr lang="en-US" sz="2000" i="1">
+                            <a:latin typeface="Cambria Math"/>
+                          </a:rPr>
+                          <m:t>𝑠</m:t>
+                        </m:r>
+                      </m:e>
+                      <m:sub>
+                        <m:r>
+                          <a:rPr lang="fr-BE" sz="2000" b="0" i="1" smtClean="0">
+                            <a:latin typeface="Cambria Math" panose="02040503050406030204" pitchFamily="18" charset="0"/>
+                          </a:rPr>
+                          <m:t>𝑙𝑖𝑛</m:t>
+                        </m:r>
+                      </m:sub>
+                    </m:sSub>
                     <m:r>
-                      <a:rPr lang="fr-BE" sz="2200" i="1">
+                      <a:rPr lang="fr-BE" sz="2000" b="0" i="1" smtClean="0">
+                        <a:latin typeface="Cambria Math" panose="02040503050406030204" pitchFamily="18" charset="0"/>
+                      </a:rPr>
+                      <m:t>+</m:t>
+                    </m:r>
+                    <m:r>
+                      <a:rPr lang="fr-BE" sz="2000" i="1">
                         <a:latin typeface="Cambria Math" panose="02040503050406030204" pitchFamily="18" charset="0"/>
                       </a:rPr>
                       <m:t>𝐶</m:t>
                     </m:r>
                     <m:r>
-                      <a:rPr lang="en-US" sz="2200" i="1">
+                      <a:rPr lang="en-US" sz="2000" i="1">
                         <a:latin typeface="Cambria Math"/>
                       </a:rPr>
                       <m:t>𝑎𝑙</m:t>
                     </m:r>
                     <m:r>
-                      <a:rPr lang="en-US" sz="2200" i="1">
+                      <a:rPr lang="en-US" sz="2000" i="1">
                         <a:latin typeface="Cambria Math"/>
                       </a:rPr>
                       <m:t>+</m:t>
@@ -10537,20 +8477,20 @@
                     <m:sSub>
                       <m:sSubPr>
                         <m:ctrlPr>
-                          <a:rPr lang="fr-BE" sz="2200" i="1">
+                          <a:rPr lang="fr-BE" sz="2000" i="1">
                             <a:latin typeface="Cambria Math" panose="02040503050406030204" pitchFamily="18" charset="0"/>
                           </a:rPr>
                         </m:ctrlPr>
                       </m:sSubPr>
                       <m:e>
                         <m:r>
-                          <a:rPr lang="fr-BE" sz="2200" i="1">
+                          <a:rPr lang="fr-BE" sz="2000" i="1">
                             <a:latin typeface="Cambria Math" panose="02040503050406030204" pitchFamily="18" charset="0"/>
                           </a:rPr>
                           <m:t>𝑂</m:t>
                         </m:r>
                         <m:r>
-                          <a:rPr lang="en-US" sz="2200" i="1">
+                          <a:rPr lang="en-US" sz="2000" i="1">
                             <a:latin typeface="Cambria Math"/>
                           </a:rPr>
                           <m:t>𝑢𝑡</m:t>
@@ -10558,7 +8498,7 @@
                       </m:e>
                       <m:sub>
                         <m:r>
-                          <a:rPr lang="en-US" sz="2200" i="1">
+                          <a:rPr lang="en-US" sz="2000" i="1">
                             <a:latin typeface="Cambria Math"/>
                           </a:rPr>
                           <m:t>𝑠</m:t>
@@ -10566,7 +8506,7 @@
                       </m:sub>
                     </m:sSub>
                     <m:r>
-                      <a:rPr lang="en-US" sz="2200" i="1">
+                      <a:rPr lang="en-US" sz="2000" i="1">
                         <a:latin typeface="Cambria Math"/>
                       </a:rPr>
                       <m:t>+ </m:t>
@@ -10574,20 +8514,20 @@
                     <m:sSub>
                       <m:sSubPr>
                         <m:ctrlPr>
-                          <a:rPr lang="fr-BE" sz="2200" i="1">
+                          <a:rPr lang="fr-BE" sz="2000" i="1">
                             <a:latin typeface="Cambria Math" panose="02040503050406030204" pitchFamily="18" charset="0"/>
                           </a:rPr>
                         </m:ctrlPr>
                       </m:sSubPr>
                       <m:e>
                         <m:r>
-                          <a:rPr lang="fr-BE" sz="2200" i="1">
+                          <a:rPr lang="fr-BE" sz="2000" i="1">
                             <a:latin typeface="Cambria Math" panose="02040503050406030204" pitchFamily="18" charset="0"/>
                           </a:rPr>
                           <m:t>𝑅</m:t>
                         </m:r>
                         <m:r>
-                          <a:rPr lang="en-US" sz="2200" i="1">
+                          <a:rPr lang="en-US" sz="2000" i="1">
                             <a:latin typeface="Cambria Math"/>
                           </a:rPr>
                           <m:t>𝑒𝑔</m:t>
@@ -10595,47 +8535,16 @@
                       </m:e>
                       <m:sub>
                         <m:r>
-                          <a:rPr lang="en-US" sz="2200" i="1">
+                          <a:rPr lang="en-US" sz="2000" i="1">
                             <a:latin typeface="Cambria Math"/>
                           </a:rPr>
                           <m:t>𝑠</m:t>
-                        </m:r>
-                      </m:sub>
-                    </m:sSub>
-                    <m:r>
-                      <a:rPr lang="en-US" sz="2200" i="1">
-                        <a:latin typeface="Cambria Math"/>
-                      </a:rPr>
-                      <m:t>+</m:t>
-                    </m:r>
-                    <m:sSub>
-                      <m:sSubPr>
-                        <m:ctrlPr>
-                          <a:rPr lang="en-US" sz="2200" i="1">
-                            <a:latin typeface="Cambria Math"/>
-                          </a:rPr>
-                        </m:ctrlPr>
-                      </m:sSubPr>
-                      <m:e>
-                        <m:r>
-                          <a:rPr lang="en-US" sz="2200" i="1">
-                            <a:latin typeface="Cambria Math"/>
-                          </a:rPr>
-                          <m:t>𝑠</m:t>
-                        </m:r>
-                      </m:e>
-                      <m:sub>
-                        <m:r>
-                          <a:rPr lang="en-US" sz="2200" i="1">
-                            <a:latin typeface="Cambria Math"/>
-                          </a:rPr>
-                          <m:t>𝑐𝑚𝑝</m:t>
                         </m:r>
                       </m:sub>
                     </m:sSub>
                   </m:oMath>
                 </a14:m>
-                <a:endParaRPr lang="en-US" sz="2200" dirty="0"/>
+                <a:endParaRPr lang="en-US" sz="2000" dirty="0"/>
               </a:p>
               <a:p>
                 <a:pPr lvl="1">
@@ -10645,13 +8554,13 @@
                 <a14:m>
                   <m:oMath xmlns:m="http://schemas.openxmlformats.org/officeDocument/2006/math">
                     <m:r>
-                      <a:rPr lang="en-US" sz="2200" i="1">
+                      <a:rPr lang="en-US" sz="2000" i="1">
                         <a:latin typeface="Cambria Math"/>
                       </a:rPr>
                       <m:t>𝑖</m:t>
                     </m:r>
                     <m:r>
-                      <a:rPr lang="en-US" sz="2200" i="1">
+                      <a:rPr lang="en-US" sz="2000" i="1">
                         <a:latin typeface="Cambria Math"/>
                       </a:rPr>
                       <m:t>=</m:t>
@@ -10659,20 +8568,51 @@
                     <m:sSub>
                       <m:sSubPr>
                         <m:ctrlPr>
-                          <a:rPr lang="fr-BE" sz="2200" i="1">
-                            <a:latin typeface="Cambria Math" panose="02040503050406030204" pitchFamily="18" charset="0"/>
+                          <a:rPr lang="en-US" sz="2000" i="1">
+                            <a:latin typeface="Cambria Math"/>
                           </a:rPr>
                         </m:ctrlPr>
                       </m:sSubPr>
                       <m:e>
                         <m:r>
-                          <a:rPr lang="fr-BE" sz="2200" i="1">
+                          <a:rPr lang="en-US" sz="2000" i="1">
+                            <a:latin typeface="Cambria Math"/>
+                          </a:rPr>
+                          <m:t>𝑖</m:t>
+                        </m:r>
+                      </m:e>
+                      <m:sub>
+                        <m:r>
+                          <a:rPr lang="fr-BE" sz="2000" b="0" i="1" smtClean="0">
+                            <a:latin typeface="Cambria Math" panose="02040503050406030204" pitchFamily="18" charset="0"/>
+                          </a:rPr>
+                          <m:t>𝑙𝑖𝑛</m:t>
+                        </m:r>
+                      </m:sub>
+                    </m:sSub>
+                    <m:r>
+                      <a:rPr lang="fr-BE" sz="2000" b="0" i="1" smtClean="0">
+                        <a:latin typeface="Cambria Math" panose="02040503050406030204" pitchFamily="18" charset="0"/>
+                      </a:rPr>
+                      <m:t>+</m:t>
+                    </m:r>
+                    <m:sSub>
+                      <m:sSubPr>
+                        <m:ctrlPr>
+                          <a:rPr lang="fr-BE" sz="2000" i="1">
+                            <a:latin typeface="Cambria Math" panose="02040503050406030204" pitchFamily="18" charset="0"/>
+                          </a:rPr>
+                        </m:ctrlPr>
+                      </m:sSubPr>
+                      <m:e>
+                        <m:r>
+                          <a:rPr lang="fr-BE" sz="2000" i="1">
                             <a:latin typeface="Cambria Math" panose="02040503050406030204" pitchFamily="18" charset="0"/>
                           </a:rPr>
                           <m:t>𝑂</m:t>
                         </m:r>
                         <m:r>
-                          <a:rPr lang="en-US" sz="2200" i="1">
+                          <a:rPr lang="en-US" sz="2000" i="1">
                             <a:latin typeface="Cambria Math"/>
                           </a:rPr>
                           <m:t>𝑢𝑡</m:t>
@@ -10680,7 +8620,7 @@
                       </m:e>
                       <m:sub>
                         <m:r>
-                          <a:rPr lang="en-US" sz="2200" i="1">
+                          <a:rPr lang="en-US" sz="2000" i="1">
                             <a:latin typeface="Cambria Math"/>
                           </a:rPr>
                           <m:t>𝑖</m:t>
@@ -10688,7 +8628,7 @@
                       </m:sub>
                     </m:sSub>
                     <m:r>
-                      <a:rPr lang="en-US" sz="2200" i="1">
+                      <a:rPr lang="en-US" sz="2000" i="1">
                         <a:latin typeface="Cambria Math"/>
                       </a:rPr>
                       <m:t>+ </m:t>
@@ -10696,20 +8636,20 @@
                     <m:sSub>
                       <m:sSubPr>
                         <m:ctrlPr>
-                          <a:rPr lang="fr-BE" sz="2200" i="1">
+                          <a:rPr lang="fr-BE" sz="2000" i="1">
                             <a:latin typeface="Cambria Math" panose="02040503050406030204" pitchFamily="18" charset="0"/>
                           </a:rPr>
                         </m:ctrlPr>
                       </m:sSubPr>
                       <m:e>
                         <m:r>
-                          <a:rPr lang="fr-BE" sz="2200" i="1">
+                          <a:rPr lang="fr-BE" sz="2000" i="1">
                             <a:latin typeface="Cambria Math" panose="02040503050406030204" pitchFamily="18" charset="0"/>
                           </a:rPr>
                           <m:t>𝑅</m:t>
                         </m:r>
                         <m:r>
-                          <a:rPr lang="en-US" sz="2200" i="1">
+                          <a:rPr lang="en-US" sz="2000" i="1">
                             <a:latin typeface="Cambria Math"/>
                           </a:rPr>
                           <m:t>𝑒𝑔</m:t>
@@ -10717,47 +8657,16 @@
                       </m:e>
                       <m:sub>
                         <m:r>
-                          <a:rPr lang="en-US" sz="2200" i="1">
+                          <a:rPr lang="en-US" sz="2000" i="1">
                             <a:latin typeface="Cambria Math"/>
                           </a:rPr>
                           <m:t>𝑖</m:t>
-                        </m:r>
-                      </m:sub>
-                    </m:sSub>
-                    <m:r>
-                      <a:rPr lang="en-US" sz="2200" i="1">
-                        <a:latin typeface="Cambria Math"/>
-                      </a:rPr>
-                      <m:t>+</m:t>
-                    </m:r>
-                    <m:sSub>
-                      <m:sSubPr>
-                        <m:ctrlPr>
-                          <a:rPr lang="en-US" sz="2200" i="1">
-                            <a:latin typeface="Cambria Math"/>
-                          </a:rPr>
-                        </m:ctrlPr>
-                      </m:sSubPr>
-                      <m:e>
-                        <m:r>
-                          <a:rPr lang="en-US" sz="2200" i="1">
-                            <a:latin typeface="Cambria Math"/>
-                          </a:rPr>
-                          <m:t>𝑖</m:t>
-                        </m:r>
-                      </m:e>
-                      <m:sub>
-                        <m:r>
-                          <a:rPr lang="en-US" sz="2200" i="1">
-                            <a:latin typeface="Cambria Math"/>
-                          </a:rPr>
-                          <m:t>𝑐𝑚𝑝</m:t>
                         </m:r>
                       </m:sub>
                     </m:sSub>
                   </m:oMath>
                 </a14:m>
-                <a:endParaRPr lang="en-US" sz="2200" dirty="0"/>
+                <a:endParaRPr lang="en-US" sz="2000" dirty="0"/>
               </a:p>
               <a:p>
                 <a:pPr lvl="1">
@@ -10800,43 +8709,6 @@
                       <a:rPr lang="en-US" sz="2200" i="1">
                         <a:latin typeface="Cambria Math"/>
                       </a:rPr>
-                      <m:t>+ </m:t>
-                    </m:r>
-                    <m:sSub>
-                      <m:sSubPr>
-                        <m:ctrlPr>
-                          <a:rPr lang="fr-BE" sz="2200" i="1">
-                            <a:latin typeface="Cambria Math" panose="02040503050406030204" pitchFamily="18" charset="0"/>
-                          </a:rPr>
-                        </m:ctrlPr>
-                      </m:sSubPr>
-                      <m:e>
-                        <m:r>
-                          <a:rPr lang="fr-BE" sz="2200" i="1">
-                            <a:latin typeface="Cambria Math" panose="02040503050406030204" pitchFamily="18" charset="0"/>
-                          </a:rPr>
-                          <m:t>𝑅</m:t>
-                        </m:r>
-                        <m:r>
-                          <a:rPr lang="en-US" sz="2200" i="1">
-                            <a:latin typeface="Cambria Math"/>
-                          </a:rPr>
-                          <m:t>𝑒𝑔</m:t>
-                        </m:r>
-                      </m:e>
-                      <m:sub>
-                        <m:r>
-                          <a:rPr lang="en-US" sz="2200" i="1">
-                            <a:latin typeface="Cambria Math"/>
-                          </a:rPr>
-                          <m:t>𝑠𝑎</m:t>
-                        </m:r>
-                      </m:sub>
-                    </m:sSub>
-                    <m:r>
-                      <a:rPr lang="en-US" sz="2200" i="1">
-                        <a:latin typeface="Cambria Math"/>
-                      </a:rPr>
                       <m:t>=</m:t>
                     </m:r>
                     <m:sSub>
@@ -10865,44 +8737,7 @@
                       </m:sub>
                     </m:sSub>
                     <m:r>
-                      <a:rPr lang="en-US" sz="2200" i="1">
-                        <a:latin typeface="Cambria Math"/>
-                      </a:rPr>
-                      <m:t>− </m:t>
-                    </m:r>
-                    <m:sSub>
-                      <m:sSubPr>
-                        <m:ctrlPr>
-                          <a:rPr lang="fr-BE" sz="2200" i="1">
-                            <a:latin typeface="Cambria Math" panose="02040503050406030204" pitchFamily="18" charset="0"/>
-                          </a:rPr>
-                        </m:ctrlPr>
-                      </m:sSubPr>
-                      <m:e>
-                        <m:r>
-                          <a:rPr lang="fr-BE" sz="2200" i="1">
-                            <a:latin typeface="Cambria Math" panose="02040503050406030204" pitchFamily="18" charset="0"/>
-                          </a:rPr>
-                          <m:t>𝑅</m:t>
-                        </m:r>
-                        <m:r>
-                          <a:rPr lang="en-US" sz="2200" i="1">
-                            <a:latin typeface="Cambria Math"/>
-                          </a:rPr>
-                          <m:t>𝑒𝑔</m:t>
-                        </m:r>
-                      </m:e>
-                      <m:sub>
-                        <m:r>
-                          <a:rPr lang="en-US" sz="2200" i="1">
-                            <a:latin typeface="Cambria Math"/>
-                          </a:rPr>
-                          <m:t>𝑦</m:t>
-                        </m:r>
-                      </m:sub>
-                    </m:sSub>
-                    <m:r>
-                      <a:rPr lang="en-US" sz="2200" i="1">
+                      <a:rPr lang="en-US" sz="2200" i="1" smtClean="0">
                         <a:latin typeface="Cambria Math"/>
                       </a:rPr>
                       <m:t>−</m:t>
@@ -10918,115 +8753,6 @@
                 <a:endParaRPr lang="en-US" sz="2200" dirty="0"/>
               </a:p>
               <a:p>
-                <a:pPr lvl="1">
-                  <a:buFont typeface="Wingdings" panose="05000000000000000000" pitchFamily="2" charset="2"/>
-                  <a:buChar char="ü"/>
-                </a:pPr>
-                <a14:m>
-                  <m:oMath xmlns:m="http://schemas.openxmlformats.org/officeDocument/2006/math">
-                    <m:sSub>
-                      <m:sSubPr>
-                        <m:ctrlPr>
-                          <a:rPr lang="en-US" sz="2200" i="1">
-                            <a:latin typeface="Cambria Math"/>
-                          </a:rPr>
-                        </m:ctrlPr>
-                      </m:sSubPr>
-                      <m:e>
-                        <m:r>
-                          <a:rPr lang="en-US" sz="2200" i="1">
-                            <a:latin typeface="Cambria Math"/>
-                          </a:rPr>
-                          <m:t>𝑦</m:t>
-                        </m:r>
-                      </m:e>
-                      <m:sub>
-                        <m:r>
-                          <a:rPr lang="en-US" sz="2200" i="1">
-                            <a:latin typeface="Cambria Math"/>
-                          </a:rPr>
-                          <m:t>𝑐</m:t>
-                        </m:r>
-                      </m:sub>
-                    </m:sSub>
-                    <m:r>
-                      <a:rPr lang="en-US" sz="2200" i="1">
-                        <a:latin typeface="Cambria Math"/>
-                      </a:rPr>
-                      <m:t>=</m:t>
-                    </m:r>
-                    <m:r>
-                      <a:rPr lang="en-US" sz="2200" i="1">
-                        <a:latin typeface="Cambria Math"/>
-                      </a:rPr>
-                      <m:t>𝑠</m:t>
-                    </m:r>
-                    <m:r>
-                      <a:rPr lang="en-US" sz="2200" i="1">
-                        <a:latin typeface="Cambria Math"/>
-                      </a:rPr>
-                      <m:t>+</m:t>
-                    </m:r>
-                    <m:r>
-                      <a:rPr lang="en-US" sz="2200" i="1">
-                        <a:latin typeface="Cambria Math"/>
-                      </a:rPr>
-                      <m:t>𝑡</m:t>
-                    </m:r>
-                    <m:r>
-                      <a:rPr lang="en-US" sz="2200" i="1">
-                        <a:latin typeface="Cambria Math"/>
-                      </a:rPr>
-                      <m:t>+</m:t>
-                    </m:r>
-                    <m:r>
-                      <a:rPr lang="en-US" sz="2200" i="1">
-                        <a:latin typeface="Cambria Math"/>
-                      </a:rPr>
-                      <m:t>𝑖</m:t>
-                    </m:r>
-                    <m:r>
-                      <a:rPr lang="en-US" sz="2200" i="1">
-                        <a:latin typeface="Cambria Math"/>
-                      </a:rPr>
-                      <m:t>+ </m:t>
-                    </m:r>
-                    <m:sSub>
-                      <m:sSubPr>
-                        <m:ctrlPr>
-                          <a:rPr lang="fr-BE" sz="2200" i="1">
-                            <a:latin typeface="Cambria Math" panose="02040503050406030204" pitchFamily="18" charset="0"/>
-                          </a:rPr>
-                        </m:ctrlPr>
-                      </m:sSubPr>
-                      <m:e>
-                        <m:r>
-                          <a:rPr lang="fr-BE" sz="2200" i="1">
-                            <a:latin typeface="Cambria Math" panose="02040503050406030204" pitchFamily="18" charset="0"/>
-                          </a:rPr>
-                          <m:t>𝑅</m:t>
-                        </m:r>
-                        <m:r>
-                          <a:rPr lang="en-US" sz="2200" i="1">
-                            <a:latin typeface="Cambria Math"/>
-                          </a:rPr>
-                          <m:t>𝑒𝑔</m:t>
-                        </m:r>
-                      </m:e>
-                      <m:sub>
-                        <m:r>
-                          <a:rPr lang="en-US" sz="2200" i="1">
-                            <a:latin typeface="Cambria Math"/>
-                          </a:rPr>
-                          <m:t>𝑦</m:t>
-                        </m:r>
-                      </m:sub>
-                    </m:sSub>
-                  </m:oMath>
-                </a14:m>
-                <a:endParaRPr lang="en-US" sz="2600" dirty="0"/>
-              </a:p>
-              <a:p>
                 <a:r>
                   <a:rPr lang="en-US" sz="3000" b="1" dirty="0"/>
                   <a:t>Multiplicative case:</a:t>
@@ -11040,19 +8766,51 @@
                 <a14:m>
                   <m:oMath xmlns:m="http://schemas.openxmlformats.org/officeDocument/2006/math">
                     <m:r>
-                      <a:rPr lang="en-US" sz="2200" i="1">
+                      <a:rPr lang="en-US" sz="2000" i="1">
                         <a:latin typeface="Cambria Math"/>
                       </a:rPr>
                       <m:t>𝑡</m:t>
                     </m:r>
                     <m:r>
-                      <a:rPr lang="en-US" sz="2200" i="1">
+                      <a:rPr lang="en-US" sz="2000" i="1">
                         <a:latin typeface="Cambria Math"/>
                       </a:rPr>
                       <m:t>=</m:t>
                     </m:r>
+                    <m:sSub>
+                      <m:sSubPr>
+                        <m:ctrlPr>
+                          <a:rPr lang="en-US" sz="2000" i="1">
+                            <a:latin typeface="Cambria Math"/>
+                          </a:rPr>
+                        </m:ctrlPr>
+                      </m:sSubPr>
+                      <m:e>
+                        <m:r>
+                          <a:rPr lang="en-US" sz="2000" i="1">
+                            <a:latin typeface="Cambria Math"/>
+                          </a:rPr>
+                          <m:t>𝑡</m:t>
+                        </m:r>
+                      </m:e>
+                      <m:sub>
+                        <m:r>
+                          <a:rPr lang="en-US" sz="2000" i="1">
+                            <a:latin typeface="Cambria Math"/>
+                          </a:rPr>
+                          <m:t>𝑐𝑚𝑝</m:t>
+                        </m:r>
+                      </m:sub>
+                    </m:sSub>
                     <m:r>
-                      <a:rPr lang="en-US" sz="2200" i="1">
+                      <a:rPr lang="en-US" sz="2000" i="1" smtClean="0">
+                        <a:latin typeface="Cambria Math" panose="02040503050406030204" pitchFamily="18" charset="0"/>
+                        <a:ea typeface="Cambria Math" panose="02040503050406030204" pitchFamily="18" charset="0"/>
+                      </a:rPr>
+                      <m:t>∙</m:t>
+                    </m:r>
+                    <m:r>
+                      <a:rPr lang="en-US" sz="2000" i="1">
                         <a:latin typeface="Cambria Math"/>
                       </a:rPr>
                       <m:t>𝑒𝑥𝑝</m:t>
@@ -11060,7 +8818,7 @@
                     <m:d>
                       <m:dPr>
                         <m:ctrlPr>
-                          <a:rPr lang="fr-BE" sz="2200" i="1">
+                          <a:rPr lang="fr-BE" sz="2000" i="1">
                             <a:latin typeface="Cambria Math" panose="02040503050406030204" pitchFamily="18" charset="0"/>
                           </a:rPr>
                         </m:ctrlPr>
@@ -11069,20 +8827,20 @@
                         <m:sSub>
                           <m:sSubPr>
                             <m:ctrlPr>
-                              <a:rPr lang="fr-BE" sz="2200" i="1">
+                              <a:rPr lang="fr-BE" sz="2000" i="1">
                                 <a:latin typeface="Cambria Math" panose="02040503050406030204" pitchFamily="18" charset="0"/>
                               </a:rPr>
                             </m:ctrlPr>
                           </m:sSubPr>
                           <m:e>
                             <m:r>
-                              <a:rPr lang="fr-BE" sz="2200" i="1">
+                              <a:rPr lang="fr-BE" sz="2000" i="1">
                                 <a:latin typeface="Cambria Math" panose="02040503050406030204" pitchFamily="18" charset="0"/>
                               </a:rPr>
                               <m:t>𝑂</m:t>
                             </m:r>
                             <m:r>
-                              <a:rPr lang="en-US" sz="2200" i="1">
+                              <a:rPr lang="en-US" sz="2000" i="1">
                                 <a:latin typeface="Cambria Math"/>
                               </a:rPr>
                               <m:t>𝑢𝑡</m:t>
@@ -11090,7 +8848,7 @@
                           </m:e>
                           <m:sub>
                             <m:r>
-                              <a:rPr lang="en-US" sz="2200" i="1">
+                              <a:rPr lang="en-US" sz="2000" i="1">
                                 <a:latin typeface="Cambria Math"/>
                               </a:rPr>
                               <m:t>𝑡</m:t>
@@ -11098,7 +8856,7 @@
                           </m:sub>
                         </m:sSub>
                         <m:r>
-                          <a:rPr lang="en-US" sz="2200" i="1">
+                          <a:rPr lang="en-US" sz="2000" i="1">
                             <a:latin typeface="Cambria Math"/>
                           </a:rPr>
                           <m:t>∙ </m:t>
@@ -11106,20 +8864,20 @@
                         <m:sSub>
                           <m:sSubPr>
                             <m:ctrlPr>
-                              <a:rPr lang="fr-BE" sz="2200" i="1">
+                              <a:rPr lang="fr-BE" sz="2000" i="1">
                                 <a:latin typeface="Cambria Math" panose="02040503050406030204" pitchFamily="18" charset="0"/>
                               </a:rPr>
                             </m:ctrlPr>
                           </m:sSubPr>
                           <m:e>
                             <m:r>
-                              <a:rPr lang="fr-BE" sz="2200" i="1">
+                              <a:rPr lang="fr-BE" sz="2000" i="1">
                                 <a:latin typeface="Cambria Math" panose="02040503050406030204" pitchFamily="18" charset="0"/>
                               </a:rPr>
                               <m:t>𝑅</m:t>
                             </m:r>
                             <m:r>
-                              <a:rPr lang="en-US" sz="2200" i="1">
+                              <a:rPr lang="en-US" sz="2000" i="1">
                                 <a:latin typeface="Cambria Math"/>
                               </a:rPr>
                               <m:t>𝑒𝑔</m:t>
@@ -11127,7 +8885,7 @@
                           </m:e>
                           <m:sub>
                             <m:r>
-                              <a:rPr lang="en-US" sz="2200" i="1">
+                              <a:rPr lang="en-US" sz="2000" i="1">
                                 <a:latin typeface="Cambria Math"/>
                               </a:rPr>
                               <m:t>𝑡</m:t>
@@ -11136,40 +8894,9 @@
                         </m:sSub>
                       </m:e>
                     </m:d>
-                    <m:r>
-                      <a:rPr lang="en-US" sz="2200" i="1">
-                        <a:latin typeface="Cambria Math"/>
-                      </a:rPr>
-                      <m:t>∙</m:t>
-                    </m:r>
-                    <m:sSub>
-                      <m:sSubPr>
-                        <m:ctrlPr>
-                          <a:rPr lang="en-US" sz="2200" i="1">
-                            <a:latin typeface="Cambria Math"/>
-                          </a:rPr>
-                        </m:ctrlPr>
-                      </m:sSubPr>
-                      <m:e>
-                        <m:r>
-                          <a:rPr lang="en-US" sz="2200" i="1">
-                            <a:latin typeface="Cambria Math"/>
-                          </a:rPr>
-                          <m:t>𝑡</m:t>
-                        </m:r>
-                      </m:e>
-                      <m:sub>
-                        <m:r>
-                          <a:rPr lang="en-US" sz="2200" i="1">
-                            <a:latin typeface="Cambria Math"/>
-                          </a:rPr>
-                          <m:t>𝑐𝑚𝑝</m:t>
-                        </m:r>
-                      </m:sub>
-                    </m:sSub>
                   </m:oMath>
                 </a14:m>
-                <a:endParaRPr lang="en-US" sz="2200" dirty="0"/>
+                <a:endParaRPr lang="en-US" sz="2000" dirty="0"/>
               </a:p>
               <a:p>
                 <a:pPr lvl="1">
@@ -11179,19 +8906,51 @@
                 <a14:m>
                   <m:oMath xmlns:m="http://schemas.openxmlformats.org/officeDocument/2006/math">
                     <m:r>
-                      <a:rPr lang="en-US" sz="2200" i="1">
+                      <a:rPr lang="en-US" sz="2000" i="1">
                         <a:latin typeface="Cambria Math"/>
                       </a:rPr>
                       <m:t>𝑠</m:t>
                     </m:r>
                     <m:r>
-                      <a:rPr lang="en-US" sz="2200" i="1">
+                      <a:rPr lang="en-US" sz="2000" i="1">
                         <a:latin typeface="Cambria Math"/>
                       </a:rPr>
                       <m:t>=</m:t>
                     </m:r>
+                    <m:sSub>
+                      <m:sSubPr>
+                        <m:ctrlPr>
+                          <a:rPr lang="en-US" sz="2000" i="1">
+                            <a:latin typeface="Cambria Math"/>
+                          </a:rPr>
+                        </m:ctrlPr>
+                      </m:sSubPr>
+                      <m:e>
+                        <m:r>
+                          <a:rPr lang="en-US" sz="2000" i="1">
+                            <a:latin typeface="Cambria Math"/>
+                          </a:rPr>
+                          <m:t>𝑠</m:t>
+                        </m:r>
+                      </m:e>
+                      <m:sub>
+                        <m:r>
+                          <a:rPr lang="en-US" sz="2000" i="1">
+                            <a:latin typeface="Cambria Math"/>
+                          </a:rPr>
+                          <m:t>𝑐𝑚𝑝</m:t>
+                        </m:r>
+                      </m:sub>
+                    </m:sSub>
                     <m:r>
-                      <a:rPr lang="en-US" sz="2200" i="1">
+                      <a:rPr lang="fr-BE" sz="2000" i="1">
+                        <a:latin typeface="Cambria Math" panose="02040503050406030204" pitchFamily="18" charset="0"/>
+                        <a:ea typeface="Cambria Math" panose="02040503050406030204" pitchFamily="18" charset="0"/>
+                      </a:rPr>
+                      <m:t>∙</m:t>
+                    </m:r>
+                    <m:r>
+                      <a:rPr lang="en-US" sz="2000" i="1">
                         <a:latin typeface="Cambria Math"/>
                       </a:rPr>
                       <m:t>𝑒𝑥𝑝</m:t>
@@ -11199,38 +8958,38 @@
                     <m:d>
                       <m:dPr>
                         <m:ctrlPr>
-                          <a:rPr lang="en-US" sz="2200" i="1">
+                          <a:rPr lang="en-US" sz="2000" i="1">
                             <a:latin typeface="Cambria Math"/>
                           </a:rPr>
                         </m:ctrlPr>
                       </m:dPr>
                       <m:e>
                         <m:r>
-                          <a:rPr lang="en-US" sz="2200" i="1">
+                          <a:rPr lang="en-US" sz="2000" i="1">
                             <a:latin typeface="Cambria Math"/>
                           </a:rPr>
                           <m:t>𝑙𝑝</m:t>
                         </m:r>
                         <m:r>
-                          <a:rPr lang="en-US" sz="2200" i="1">
+                          <a:rPr lang="en-US" sz="2000" i="1">
                             <a:latin typeface="Cambria Math"/>
                           </a:rPr>
                           <m:t>∙</m:t>
                         </m:r>
                         <m:r>
-                          <a:rPr lang="fr-BE" sz="2200" i="1">
+                          <a:rPr lang="fr-BE" sz="2000" i="1">
                             <a:latin typeface="Cambria Math" panose="02040503050406030204" pitchFamily="18" charset="0"/>
                           </a:rPr>
                           <m:t>𝐶</m:t>
                         </m:r>
                         <m:r>
-                          <a:rPr lang="en-US" sz="2200" i="1">
+                          <a:rPr lang="en-US" sz="2000" i="1">
                             <a:latin typeface="Cambria Math"/>
                           </a:rPr>
                           <m:t>𝑎𝑙</m:t>
                         </m:r>
                         <m:r>
-                          <a:rPr lang="en-US" sz="2200" i="1">
+                          <a:rPr lang="en-US" sz="2000" i="1">
                             <a:latin typeface="Cambria Math"/>
                           </a:rPr>
                           <m:t>∙</m:t>
@@ -11238,20 +8997,20 @@
                         <m:sSub>
                           <m:sSubPr>
                             <m:ctrlPr>
-                              <a:rPr lang="fr-BE" sz="2200" i="1">
+                              <a:rPr lang="fr-BE" sz="2000" i="1">
                                 <a:latin typeface="Cambria Math" panose="02040503050406030204" pitchFamily="18" charset="0"/>
                               </a:rPr>
                             </m:ctrlPr>
                           </m:sSubPr>
                           <m:e>
                             <m:r>
-                              <a:rPr lang="fr-BE" sz="2200" i="1">
+                              <a:rPr lang="fr-BE" sz="2000" i="1">
                                 <a:latin typeface="Cambria Math" panose="02040503050406030204" pitchFamily="18" charset="0"/>
                               </a:rPr>
                               <m:t>𝑂</m:t>
                             </m:r>
                             <m:r>
-                              <a:rPr lang="en-US" sz="2200" i="1">
+                              <a:rPr lang="en-US" sz="2000" i="1">
                                 <a:latin typeface="Cambria Math"/>
                               </a:rPr>
                               <m:t>𝑢𝑡</m:t>
@@ -11259,7 +9018,7 @@
                           </m:e>
                           <m:sub>
                             <m:r>
-                              <a:rPr lang="en-US" sz="2200" i="1">
+                              <a:rPr lang="en-US" sz="2000" i="1">
                                 <a:latin typeface="Cambria Math"/>
                               </a:rPr>
                               <m:t>𝑠</m:t>
@@ -11267,7 +9026,7 @@
                           </m:sub>
                         </m:sSub>
                         <m:r>
-                          <a:rPr lang="en-US" sz="2200" i="1">
+                          <a:rPr lang="en-US" sz="2000" i="1">
                             <a:latin typeface="Cambria Math"/>
                           </a:rPr>
                           <m:t>∙ </m:t>
@@ -11275,20 +9034,20 @@
                         <m:sSub>
                           <m:sSubPr>
                             <m:ctrlPr>
-                              <a:rPr lang="fr-BE" sz="2200" i="1">
+                              <a:rPr lang="fr-BE" sz="2000" i="1">
                                 <a:latin typeface="Cambria Math" panose="02040503050406030204" pitchFamily="18" charset="0"/>
                               </a:rPr>
                             </m:ctrlPr>
                           </m:sSubPr>
                           <m:e>
                             <m:r>
-                              <a:rPr lang="fr-BE" sz="2200" i="1">
+                              <a:rPr lang="fr-BE" sz="2000" i="1">
                                 <a:latin typeface="Cambria Math" panose="02040503050406030204" pitchFamily="18" charset="0"/>
                               </a:rPr>
                               <m:t>𝑅</m:t>
                             </m:r>
                             <m:r>
-                              <a:rPr lang="en-US" sz="2200" i="1">
+                              <a:rPr lang="en-US" sz="2000" i="1">
                                 <a:latin typeface="Cambria Math"/>
                               </a:rPr>
                               <m:t>𝑒𝑔</m:t>
@@ -11296,7 +9055,7 @@
                           </m:e>
                           <m:sub>
                             <m:r>
-                              <a:rPr lang="en-US" sz="2200" i="1">
+                              <a:rPr lang="en-US" sz="2000" i="1">
                                 <a:latin typeface="Cambria Math"/>
                               </a:rPr>
                               <m:t>𝑠</m:t>
@@ -11305,192 +9064,9 @@
                         </m:sSub>
                       </m:e>
                     </m:d>
-                    <m:r>
-                      <a:rPr lang="en-US" sz="2200" i="1">
-                        <a:latin typeface="Cambria Math"/>
-                      </a:rPr>
-                      <m:t>∙</m:t>
-                    </m:r>
-                    <m:sSub>
-                      <m:sSubPr>
-                        <m:ctrlPr>
-                          <a:rPr lang="en-US" sz="2200" i="1">
-                            <a:latin typeface="Cambria Math"/>
-                          </a:rPr>
-                        </m:ctrlPr>
-                      </m:sSubPr>
-                      <m:e>
-                        <m:r>
-                          <a:rPr lang="en-US" sz="2200" i="1">
-                            <a:latin typeface="Cambria Math"/>
-                          </a:rPr>
-                          <m:t>𝑠</m:t>
-                        </m:r>
-                      </m:e>
-                      <m:sub>
-                        <m:r>
-                          <a:rPr lang="en-US" sz="2200" i="1">
-                            <a:latin typeface="Cambria Math"/>
-                          </a:rPr>
-                          <m:t>𝑐𝑚𝑝</m:t>
-                        </m:r>
-                      </m:sub>
-                    </m:sSub>
-                    <m:r>
-                      <a:rPr lang="en-US" sz="2200" i="1">
-                        <a:latin typeface="Cambria Math"/>
-                      </a:rPr>
-                      <m:t>=</m:t>
-                    </m:r>
-                    <m:r>
-                      <a:rPr lang="en-US" sz="2200" i="1">
-                        <a:latin typeface="Cambria Math"/>
-                      </a:rPr>
-                      <m:t>𝑒𝑥𝑝</m:t>
-                    </m:r>
-                    <m:d>
-                      <m:dPr>
-                        <m:ctrlPr>
-                          <a:rPr lang="fr-BE" sz="2200" i="1">
-                            <a:latin typeface="Cambria Math" panose="02040503050406030204" pitchFamily="18" charset="0"/>
-                          </a:rPr>
-                        </m:ctrlPr>
-                      </m:dPr>
-                      <m:e>
-                        <m:acc>
-                          <m:accPr>
-                            <m:chr m:val="̃"/>
-                            <m:ctrlPr>
-                              <a:rPr lang="fr-BE" sz="2200" i="1">
-                                <a:latin typeface="Cambria Math" panose="02040503050406030204" pitchFamily="18" charset="0"/>
-                              </a:rPr>
-                            </m:ctrlPr>
-                          </m:accPr>
-                          <m:e>
-                            <m:r>
-                              <a:rPr lang="fr-BE" sz="2200" i="1">
-                                <a:latin typeface="Cambria Math" panose="02040503050406030204" pitchFamily="18" charset="0"/>
-                              </a:rPr>
-                              <m:t>𝐶</m:t>
-                            </m:r>
-                            <m:r>
-                              <a:rPr lang="en-US" sz="2200" i="1">
-                                <a:latin typeface="Cambria Math"/>
-                              </a:rPr>
-                              <m:t>𝑎𝑙</m:t>
-                            </m:r>
-                          </m:e>
-                        </m:acc>
-                        <m:r>
-                          <a:rPr lang="en-US" sz="2200" i="1">
-                            <a:latin typeface="Cambria Math"/>
-                          </a:rPr>
-                          <m:t>∙</m:t>
-                        </m:r>
-                        <m:sSub>
-                          <m:sSubPr>
-                            <m:ctrlPr>
-                              <a:rPr lang="fr-BE" sz="2200" i="1">
-                                <a:latin typeface="Cambria Math" panose="02040503050406030204" pitchFamily="18" charset="0"/>
-                              </a:rPr>
-                            </m:ctrlPr>
-                          </m:sSubPr>
-                          <m:e>
-                            <m:r>
-                              <a:rPr lang="fr-BE" sz="2200" i="1">
-                                <a:latin typeface="Cambria Math" panose="02040503050406030204" pitchFamily="18" charset="0"/>
-                              </a:rPr>
-                              <m:t>𝑂</m:t>
-                            </m:r>
-                            <m:r>
-                              <a:rPr lang="en-US" sz="2200" i="1">
-                                <a:latin typeface="Cambria Math"/>
-                              </a:rPr>
-                              <m:t>𝑢𝑡</m:t>
-                            </m:r>
-                          </m:e>
-                          <m:sub>
-                            <m:r>
-                              <a:rPr lang="en-US" sz="2200" i="1">
-                                <a:latin typeface="Cambria Math"/>
-                              </a:rPr>
-                              <m:t>𝑠</m:t>
-                            </m:r>
-                          </m:sub>
-                        </m:sSub>
-                        <m:r>
-                          <a:rPr lang="en-US" sz="2200" i="1">
-                            <a:latin typeface="Cambria Math"/>
-                          </a:rPr>
-                          <m:t>∙ </m:t>
-                        </m:r>
-                        <m:sSub>
-                          <m:sSubPr>
-                            <m:ctrlPr>
-                              <a:rPr lang="fr-BE" sz="2200" i="1">
-                                <a:latin typeface="Cambria Math" panose="02040503050406030204" pitchFamily="18" charset="0"/>
-                              </a:rPr>
-                            </m:ctrlPr>
-                          </m:sSubPr>
-                          <m:e>
-                            <m:r>
-                              <a:rPr lang="fr-BE" sz="2200" i="1">
-                                <a:latin typeface="Cambria Math" panose="02040503050406030204" pitchFamily="18" charset="0"/>
-                              </a:rPr>
-                              <m:t>𝑅</m:t>
-                            </m:r>
-                            <m:r>
-                              <a:rPr lang="en-US" sz="2200" i="1">
-                                <a:latin typeface="Cambria Math"/>
-                              </a:rPr>
-                              <m:t>𝑒𝑔</m:t>
-                            </m:r>
-                          </m:e>
-                          <m:sub>
-                            <m:r>
-                              <a:rPr lang="en-US" sz="2200" i="1">
-                                <a:latin typeface="Cambria Math"/>
-                              </a:rPr>
-                              <m:t>𝑠</m:t>
-                            </m:r>
-                          </m:sub>
-                        </m:sSub>
-                      </m:e>
-                    </m:d>
-                    <m:r>
-                      <a:rPr lang="en-US" sz="2200" i="1">
-                        <a:latin typeface="Cambria Math"/>
-                      </a:rPr>
-                      <m:t>∙</m:t>
-                    </m:r>
-                    <m:sSub>
-                      <m:sSubPr>
-                        <m:ctrlPr>
-                          <a:rPr lang="en-US" sz="2200" i="1">
-                            <a:latin typeface="Cambria Math"/>
-                          </a:rPr>
-                        </m:ctrlPr>
-                      </m:sSubPr>
-                      <m:e>
-                        <m:r>
-                          <a:rPr lang="en-US" sz="2200" i="1">
-                            <a:latin typeface="Cambria Math"/>
-                          </a:rPr>
-                          <m:t>𝑠</m:t>
-                        </m:r>
-                      </m:e>
-                      <m:sub>
-                        <m:r>
-                          <a:rPr lang="en-US" sz="2200" i="1">
-                            <a:latin typeface="Cambria Math"/>
-                          </a:rPr>
-                          <m:t>𝑐𝑚𝑝</m:t>
-                        </m:r>
-                      </m:sub>
-                    </m:sSub>
                   </m:oMath>
                 </a14:m>
-                <a:endParaRPr lang="en-US" sz="2200" dirty="0"/>
+                <a:endParaRPr lang="en-US" sz="2000" dirty="0"/>
               </a:p>
               <a:p>
                 <a:pPr lvl="1">
@@ -11500,19 +9076,51 @@
                 <a14:m>
                   <m:oMath xmlns:m="http://schemas.openxmlformats.org/officeDocument/2006/math">
                     <m:r>
-                      <a:rPr lang="en-US" sz="2200" i="1">
+                      <a:rPr lang="en-US" sz="2000" i="1">
                         <a:latin typeface="Cambria Math"/>
                       </a:rPr>
                       <m:t>𝑖</m:t>
                     </m:r>
                     <m:r>
-                      <a:rPr lang="en-US" sz="2200" i="1">
+                      <a:rPr lang="en-US" sz="2000" i="1">
                         <a:latin typeface="Cambria Math"/>
                       </a:rPr>
                       <m:t>=</m:t>
                     </m:r>
+                    <m:sSub>
+                      <m:sSubPr>
+                        <m:ctrlPr>
+                          <a:rPr lang="en-US" sz="2000" i="1">
+                            <a:latin typeface="Cambria Math"/>
+                          </a:rPr>
+                        </m:ctrlPr>
+                      </m:sSubPr>
+                      <m:e>
+                        <m:r>
+                          <a:rPr lang="en-US" sz="2000" i="1">
+                            <a:latin typeface="Cambria Math"/>
+                          </a:rPr>
+                          <m:t>𝑖</m:t>
+                        </m:r>
+                      </m:e>
+                      <m:sub>
+                        <m:r>
+                          <a:rPr lang="en-US" sz="2000" i="1">
+                            <a:latin typeface="Cambria Math"/>
+                          </a:rPr>
+                          <m:t>𝑐𝑚𝑝</m:t>
+                        </m:r>
+                      </m:sub>
+                    </m:sSub>
                     <m:r>
-                      <a:rPr lang="en-US" sz="2200" i="1">
+                      <a:rPr lang="en-US" sz="2000" i="1" smtClean="0">
+                        <a:latin typeface="Cambria Math" panose="02040503050406030204" pitchFamily="18" charset="0"/>
+                        <a:ea typeface="Cambria Math" panose="02040503050406030204" pitchFamily="18" charset="0"/>
+                      </a:rPr>
+                      <m:t>∙</m:t>
+                    </m:r>
+                    <m:r>
+                      <a:rPr lang="en-US" sz="2000" i="1">
                         <a:latin typeface="Cambria Math"/>
                       </a:rPr>
                       <m:t>𝑒𝑥𝑝</m:t>
@@ -11520,7 +9128,7 @@
                     <m:d>
                       <m:dPr>
                         <m:ctrlPr>
-                          <a:rPr lang="fr-BE" sz="2200" i="1">
+                          <a:rPr lang="fr-BE" sz="2000" i="1">
                             <a:latin typeface="Cambria Math" panose="02040503050406030204" pitchFamily="18" charset="0"/>
                           </a:rPr>
                         </m:ctrlPr>
@@ -11529,20 +9137,20 @@
                         <m:sSub>
                           <m:sSubPr>
                             <m:ctrlPr>
-                              <a:rPr lang="fr-BE" sz="2200" i="1">
+                              <a:rPr lang="fr-BE" sz="2000" i="1">
                                 <a:latin typeface="Cambria Math" panose="02040503050406030204" pitchFamily="18" charset="0"/>
                               </a:rPr>
                             </m:ctrlPr>
                           </m:sSubPr>
                           <m:e>
                             <m:r>
-                              <a:rPr lang="fr-BE" sz="2200" i="1">
+                              <a:rPr lang="fr-BE" sz="2000" i="1">
                                 <a:latin typeface="Cambria Math" panose="02040503050406030204" pitchFamily="18" charset="0"/>
                               </a:rPr>
                               <m:t>𝑂</m:t>
                             </m:r>
                             <m:r>
-                              <a:rPr lang="en-US" sz="2200" i="1">
+                              <a:rPr lang="en-US" sz="2000" i="1">
                                 <a:latin typeface="Cambria Math"/>
                               </a:rPr>
                               <m:t>𝑢𝑡</m:t>
@@ -11550,7 +9158,7 @@
                           </m:e>
                           <m:sub>
                             <m:r>
-                              <a:rPr lang="en-US" sz="2200" i="1">
+                              <a:rPr lang="en-US" sz="2000" i="1">
                                 <a:latin typeface="Cambria Math"/>
                               </a:rPr>
                               <m:t>𝑖</m:t>
@@ -11558,7 +9166,7 @@
                           </m:sub>
                         </m:sSub>
                         <m:r>
-                          <a:rPr lang="en-US" sz="2200" i="1">
+                          <a:rPr lang="en-US" sz="2000" i="1">
                             <a:latin typeface="Cambria Math"/>
                           </a:rPr>
                           <m:t>∙ </m:t>
@@ -11566,20 +9174,20 @@
                         <m:sSub>
                           <m:sSubPr>
                             <m:ctrlPr>
-                              <a:rPr lang="fr-BE" sz="2200" i="1">
+                              <a:rPr lang="fr-BE" sz="2000" i="1">
                                 <a:latin typeface="Cambria Math" panose="02040503050406030204" pitchFamily="18" charset="0"/>
                               </a:rPr>
                             </m:ctrlPr>
                           </m:sSubPr>
                           <m:e>
                             <m:r>
-                              <a:rPr lang="fr-BE" sz="2200" i="1">
+                              <a:rPr lang="fr-BE" sz="2000" i="1">
                                 <a:latin typeface="Cambria Math" panose="02040503050406030204" pitchFamily="18" charset="0"/>
                               </a:rPr>
                               <m:t>𝑅𝑒</m:t>
                             </m:r>
                             <m:r>
-                              <a:rPr lang="en-US" sz="2200" i="1">
+                              <a:rPr lang="en-US" sz="2000" i="1">
                                 <a:latin typeface="Cambria Math"/>
                               </a:rPr>
                               <m:t>𝑔</m:t>
@@ -11587,7 +9195,7 @@
                           </m:e>
                           <m:sub>
                             <m:r>
-                              <a:rPr lang="en-US" sz="2200" i="1">
+                              <a:rPr lang="en-US" sz="2000" i="1">
                                 <a:latin typeface="Cambria Math"/>
                               </a:rPr>
                               <m:t>𝑖</m:t>
@@ -11596,40 +9204,9 @@
                         </m:sSub>
                       </m:e>
                     </m:d>
-                    <m:r>
-                      <a:rPr lang="en-US" sz="2200" i="1">
-                        <a:latin typeface="Cambria Math"/>
-                      </a:rPr>
-                      <m:t>∙</m:t>
-                    </m:r>
-                    <m:sSub>
-                      <m:sSubPr>
-                        <m:ctrlPr>
-                          <a:rPr lang="en-US" sz="2200" i="1">
-                            <a:latin typeface="Cambria Math"/>
-                          </a:rPr>
-                        </m:ctrlPr>
-                      </m:sSubPr>
-                      <m:e>
-                        <m:r>
-                          <a:rPr lang="en-US" sz="2200" i="1">
-                            <a:latin typeface="Cambria Math"/>
-                          </a:rPr>
-                          <m:t>𝑖</m:t>
-                        </m:r>
-                      </m:e>
-                      <m:sub>
-                        <m:r>
-                          <a:rPr lang="en-US" sz="2200" i="1">
-                            <a:latin typeface="Cambria Math"/>
-                          </a:rPr>
-                          <m:t>𝑐𝑚𝑝</m:t>
-                        </m:r>
-                      </m:sub>
-                    </m:sSub>
                   </m:oMath>
                 </a14:m>
-                <a:endParaRPr lang="en-US" sz="2200" dirty="0"/>
+                <a:endParaRPr lang="en-US" sz="2000" dirty="0"/>
               </a:p>
               <a:p>
                 <a:pPr lvl="1">
@@ -11639,553 +9216,87 @@
                 <a14:m>
                   <m:oMath xmlns:m="http://schemas.openxmlformats.org/officeDocument/2006/math">
                     <m:r>
-                      <a:rPr lang="en-US" sz="2200" i="1">
+                      <a:rPr lang="en-US" sz="2000" i="1">
                         <a:latin typeface="Cambria Math"/>
                       </a:rPr>
                       <m:t>𝑠𝑎</m:t>
                     </m:r>
                     <m:r>
-                      <a:rPr lang="en-US" sz="2200" i="1">
+                      <a:rPr lang="en-US" sz="2000" i="1">
                         <a:latin typeface="Cambria Math"/>
                       </a:rPr>
                       <m:t>=</m:t>
                     </m:r>
                     <m:r>
-                      <a:rPr lang="en-US" sz="2200" i="1">
+                      <a:rPr lang="en-US" sz="2000" i="1">
                         <a:latin typeface="Cambria Math"/>
                       </a:rPr>
                       <m:t>𝑡</m:t>
                     </m:r>
                     <m:r>
-                      <a:rPr lang="en-US" sz="2200" i="1">
+                      <a:rPr lang="en-US" sz="2000" i="1">
                         <a:latin typeface="Cambria Math"/>
                       </a:rPr>
                       <m:t>∙</m:t>
                     </m:r>
                     <m:r>
-                      <a:rPr lang="en-US" sz="2200" i="1">
+                      <a:rPr lang="en-US" sz="2000" i="1">
                         <a:latin typeface="Cambria Math"/>
                       </a:rPr>
                       <m:t>𝑖</m:t>
                     </m:r>
                     <m:r>
-                      <a:rPr lang="en-US" sz="2200" i="1">
-                        <a:latin typeface="Cambria Math"/>
-                      </a:rPr>
-                      <m:t>∙</m:t>
-                    </m:r>
-                    <m:r>
-                      <a:rPr lang="en-US" sz="2200" i="1">
-                        <a:latin typeface="Cambria Math"/>
-                      </a:rPr>
-                      <m:t>𝑒𝑥𝑝</m:t>
-                    </m:r>
-                    <m:r>
-                      <a:rPr lang="en-US" sz="2200" i="1">
-                        <a:latin typeface="Cambria Math"/>
-                      </a:rPr>
-                      <m:t> </m:t>
-                    </m:r>
-                    <m:d>
-                      <m:dPr>
-                        <m:ctrlPr>
-                          <a:rPr lang="fr-BE" sz="2200" i="1">
-                            <a:latin typeface="Cambria Math" panose="02040503050406030204" pitchFamily="18" charset="0"/>
-                          </a:rPr>
-                        </m:ctrlPr>
-                      </m:dPr>
-                      <m:e>
-                        <m:sSub>
-                          <m:sSubPr>
-                            <m:ctrlPr>
-                              <a:rPr lang="fr-BE" sz="2200" i="1">
-                                <a:latin typeface="Cambria Math" panose="02040503050406030204" pitchFamily="18" charset="0"/>
-                              </a:rPr>
-                            </m:ctrlPr>
-                          </m:sSubPr>
-                          <m:e>
-                            <m:r>
-                              <a:rPr lang="fr-BE" sz="2200" i="1">
-                                <a:latin typeface="Cambria Math" panose="02040503050406030204" pitchFamily="18" charset="0"/>
-                              </a:rPr>
-                              <m:t>𝑅</m:t>
-                            </m:r>
-                            <m:r>
-                              <a:rPr lang="en-US" sz="2200" i="1">
-                                <a:latin typeface="Cambria Math"/>
-                              </a:rPr>
-                              <m:t>𝑒𝑔</m:t>
-                            </m:r>
-                          </m:e>
-                          <m:sub>
-                            <m:r>
-                              <a:rPr lang="en-US" sz="2200" i="1">
-                                <a:latin typeface="Cambria Math"/>
-                              </a:rPr>
-                              <m:t>𝑠𝑎</m:t>
-                            </m:r>
-                          </m:sub>
-                        </m:sSub>
-                      </m:e>
-                    </m:d>
-                    <m:r>
-                      <a:rPr lang="en-US" sz="2200" i="1">
+                      <a:rPr lang="en-US" sz="2000" i="1">
                         <a:latin typeface="Cambria Math"/>
                       </a:rPr>
                       <m:t>=</m:t>
                     </m:r>
-                    <m:d>
-                      <m:dPr>
+                    <m:sSub>
+                      <m:sSubPr>
                         <m:ctrlPr>
-                          <a:rPr lang="en-US" sz="2200" i="1">
-                            <a:latin typeface="Cambria Math" panose="02040503050406030204" pitchFamily="18" charset="0"/>
+                          <a:rPr lang="en-US" sz="2000" i="1">
+                            <a:latin typeface="Cambria Math"/>
                           </a:rPr>
                         </m:ctrlPr>
-                      </m:dPr>
+                      </m:sSubPr>
                       <m:e>
-                        <m:sSub>
-                          <m:sSubPr>
-                            <m:ctrlPr>
-                              <a:rPr lang="en-US" sz="2200" i="1">
-                                <a:latin typeface="Cambria Math"/>
-                              </a:rPr>
-                            </m:ctrlPr>
-                          </m:sSubPr>
-                          <m:e>
-                            <m:r>
-                              <a:rPr lang="en-US" sz="2200" i="1">
-                                <a:latin typeface="Cambria Math"/>
-                              </a:rPr>
-                              <m:t>𝑦</m:t>
-                            </m:r>
-                          </m:e>
-                          <m:sub>
-                            <m:r>
-                              <a:rPr lang="en-US" sz="2200" i="1">
-                                <a:latin typeface="Cambria Math"/>
-                              </a:rPr>
-                              <m:t>𝑐</m:t>
-                            </m:r>
-                          </m:sub>
-                        </m:sSub>
                         <m:r>
-                          <a:rPr lang="en-US" sz="2200" i="1">
+                          <a:rPr lang="en-US" sz="2000" i="1">
                             <a:latin typeface="Cambria Math"/>
                           </a:rPr>
-                          <m:t>/</m:t>
+                          <m:t>𝑦</m:t>
                         </m:r>
+                      </m:e>
+                      <m:sub>
                         <m:r>
-                          <a:rPr lang="en-US" sz="2200" i="1">
+                          <a:rPr lang="en-US" sz="2000" i="1">
                             <a:latin typeface="Cambria Math"/>
                           </a:rPr>
-                          <m:t>𝑒𝑥𝑝</m:t>
+                          <m:t>𝑐</m:t>
                         </m:r>
-                        <m:d>
-                          <m:dPr>
-                            <m:ctrlPr>
-                              <a:rPr lang="fr-BE" sz="2200" i="1">
-                                <a:latin typeface="Cambria Math" panose="02040503050406030204" pitchFamily="18" charset="0"/>
-                              </a:rPr>
-                            </m:ctrlPr>
-                          </m:dPr>
-                          <m:e>
-                            <m:sSub>
-                              <m:sSubPr>
-                                <m:ctrlPr>
-                                  <a:rPr lang="fr-BE" sz="2200" i="1">
-                                    <a:latin typeface="Cambria Math" panose="02040503050406030204" pitchFamily="18" charset="0"/>
-                                  </a:rPr>
-                                </m:ctrlPr>
-                              </m:sSubPr>
-                              <m:e>
-                                <m:r>
-                                  <a:rPr lang="fr-BE" sz="2200" i="1">
-                                    <a:latin typeface="Cambria Math" panose="02040503050406030204" pitchFamily="18" charset="0"/>
-                                  </a:rPr>
-                                  <m:t>𝑅</m:t>
-                                </m:r>
-                                <m:r>
-                                  <a:rPr lang="en-US" sz="2200" i="1">
-                                    <a:latin typeface="Cambria Math"/>
-                                  </a:rPr>
-                                  <m:t>𝑒𝑔</m:t>
-                                </m:r>
-                              </m:e>
-                              <m:sub>
-                                <m:r>
-                                  <a:rPr lang="en-US" sz="2200" i="1">
-                                    <a:latin typeface="Cambria Math"/>
-                                  </a:rPr>
-                                  <m:t>𝑦</m:t>
-                                </m:r>
-                              </m:sub>
-                            </m:sSub>
-                          </m:e>
-                        </m:d>
-                      </m:e>
-                    </m:d>
+                      </m:sub>
+                    </m:sSub>
                     <m:r>
-                      <a:rPr lang="en-US" sz="2200" i="1">
+                      <a:rPr lang="en-US" sz="2000" i="1">
                         <a:latin typeface="Cambria Math"/>
                       </a:rPr>
                       <m:t>/</m:t>
                     </m:r>
                     <m:r>
-                      <a:rPr lang="en-US" sz="2200" i="1">
+                      <a:rPr lang="en-US" sz="2000" i="1">
                         <a:latin typeface="Cambria Math"/>
                       </a:rPr>
                       <m:t>𝑠</m:t>
                     </m:r>
                   </m:oMath>
                 </a14:m>
-                <a:endParaRPr lang="en-US" sz="2200" dirty="0"/>
+                <a:endParaRPr lang="en-US" sz="2000" dirty="0"/>
               </a:p>
               <a:p>
                 <a:pPr lvl="1">
                   <a:buFont typeface="Wingdings" panose="05000000000000000000" pitchFamily="2" charset="2"/>
                   <a:buChar char="ü"/>
                 </a:pPr>
-                <a14:m>
-                  <m:oMath xmlns:m="http://schemas.openxmlformats.org/officeDocument/2006/math">
-                    <m:sSub>
-                      <m:sSubPr>
-                        <m:ctrlPr>
-                          <a:rPr lang="en-US" sz="2200" i="1">
-                            <a:latin typeface="Cambria Math"/>
-                          </a:rPr>
-                        </m:ctrlPr>
-                      </m:sSubPr>
-                      <m:e>
-                        <m:r>
-                          <a:rPr lang="en-US" sz="2200" i="1">
-                            <a:latin typeface="Cambria Math"/>
-                          </a:rPr>
-                          <m:t>𝑦</m:t>
-                        </m:r>
-                      </m:e>
-                      <m:sub>
-                        <m:r>
-                          <a:rPr lang="en-US" sz="2200" i="1">
-                            <a:latin typeface="Cambria Math"/>
-                          </a:rPr>
-                          <m:t>𝑐</m:t>
-                        </m:r>
-                      </m:sub>
-                    </m:sSub>
-                    <m:r>
-                      <a:rPr lang="en-US" sz="2200" i="1">
-                        <a:latin typeface="Cambria Math"/>
-                      </a:rPr>
-                      <m:t>/ </m:t>
-                    </m:r>
-                    <m:r>
-                      <a:rPr lang="en-US" sz="2200" i="1">
-                        <a:latin typeface="Cambria Math"/>
-                      </a:rPr>
-                      <m:t>𝑒𝑥𝑝</m:t>
-                    </m:r>
-                    <m:d>
-                      <m:dPr>
-                        <m:ctrlPr>
-                          <a:rPr lang="fr-BE" sz="2200" i="1">
-                            <a:latin typeface="Cambria Math" panose="02040503050406030204" pitchFamily="18" charset="0"/>
-                          </a:rPr>
-                        </m:ctrlPr>
-                      </m:dPr>
-                      <m:e>
-                        <m:sSub>
-                          <m:sSubPr>
-                            <m:ctrlPr>
-                              <a:rPr lang="fr-BE" sz="2200" i="1">
-                                <a:latin typeface="Cambria Math" panose="02040503050406030204" pitchFamily="18" charset="0"/>
-                              </a:rPr>
-                            </m:ctrlPr>
-                          </m:sSubPr>
-                          <m:e>
-                            <m:r>
-                              <a:rPr lang="fr-BE" sz="2200" i="1">
-                                <a:latin typeface="Cambria Math" panose="02040503050406030204" pitchFamily="18" charset="0"/>
-                              </a:rPr>
-                              <m:t>𝑅</m:t>
-                            </m:r>
-                            <m:r>
-                              <a:rPr lang="en-US" sz="2200" i="1">
-                                <a:latin typeface="Cambria Math"/>
-                              </a:rPr>
-                              <m:t>𝑒𝑔</m:t>
-                            </m:r>
-                          </m:e>
-                          <m:sub>
-                            <m:r>
-                              <a:rPr lang="en-US" sz="2200" i="1">
-                                <a:latin typeface="Cambria Math"/>
-                              </a:rPr>
-                              <m:t>𝑦</m:t>
-                            </m:r>
-                          </m:sub>
-                        </m:sSub>
-                      </m:e>
-                    </m:d>
-                    <m:r>
-                      <a:rPr lang="en-US" sz="2200" i="1">
-                        <a:latin typeface="Cambria Math"/>
-                      </a:rPr>
-                      <m:t>=</m:t>
-                    </m:r>
-                    <m:r>
-                      <a:rPr lang="en-US" sz="2200" i="1">
-                        <a:latin typeface="Cambria Math"/>
-                      </a:rPr>
-                      <m:t>𝑠</m:t>
-                    </m:r>
-                    <m:r>
-                      <a:rPr lang="en-US" sz="2200" i="1">
-                        <a:latin typeface="Cambria Math"/>
-                      </a:rPr>
-                      <m:t>∙</m:t>
-                    </m:r>
-                    <m:r>
-                      <a:rPr lang="en-US" sz="2200" i="1">
-                        <a:latin typeface="Cambria Math"/>
-                      </a:rPr>
-                      <m:t>𝑡</m:t>
-                    </m:r>
-                    <m:r>
-                      <a:rPr lang="en-US" sz="2200" i="1">
-                        <a:latin typeface="Cambria Math"/>
-                      </a:rPr>
-                      <m:t>∙</m:t>
-                    </m:r>
-                    <m:r>
-                      <a:rPr lang="en-US" sz="2200" i="1">
-                        <a:latin typeface="Cambria Math"/>
-                      </a:rPr>
-                      <m:t>𝑖</m:t>
-                    </m:r>
-                  </m:oMath>
-                </a14:m>
-                <a:endParaRPr lang="en-US" sz="2200" dirty="0"/>
-              </a:p>
-              <a:p>
-                <a:pPr lvl="1">
-                  <a:buFont typeface="Wingdings" panose="05000000000000000000" pitchFamily="2" charset="2"/>
-                  <a:buChar char="ü"/>
-                </a:pPr>
-                <a:endParaRPr lang="en-US" sz="2200" dirty="0"/>
-              </a:p>
-              <a:p>
-                <a:pPr marL="457200" lvl="1" indent="0">
-                  <a:buNone/>
-                </a:pPr>
-                <a14:m>
-                  <m:oMathPara xmlns:m="http://schemas.openxmlformats.org/officeDocument/2006/math">
-                    <m:oMath>
-                      <m:sSub>
-                        <m:sSubPr>
-                          <m:ctrlPr>
-                            <a:rPr lang="fr-BE" sz="2200" i="1">
-                              <a:latin typeface="Cambria Math" panose="02040503050406030204" pitchFamily="18" charset="0"/>
-                            </a:rPr>
-                          </m:ctrlPr>
-                        </m:sSubPr>
-                        <m:e>
-                          <m:r>
-                            <a:rPr lang="fr-BE" sz="2200" i="1">
-                              <a:latin typeface="Cambria Math" panose="02040503050406030204" pitchFamily="18" charset="0"/>
-                            </a:rPr>
-                            <m:t>𝑉𝑎𝑟</m:t>
-                          </m:r>
-                        </m:e>
-                        <m:sub>
-                          <m:r>
-                            <a:rPr lang="fr-BE" sz="2200" i="1">
-                              <a:latin typeface="Cambria Math" panose="02040503050406030204" pitchFamily="18" charset="0"/>
-                            </a:rPr>
-                            <m:t>𝑥</m:t>
-                          </m:r>
-                        </m:sub>
-                      </m:sSub>
-                      <m:r>
-                        <a:rPr lang="fr-BE" sz="2200" i="1">
-                          <a:latin typeface="Cambria Math" panose="02040503050406030204" pitchFamily="18" charset="0"/>
-                        </a:rPr>
-                        <m:t>=</m:t>
-                      </m:r>
-                      <m:sSub>
-                        <m:sSubPr>
-                          <m:ctrlPr>
-                            <a:rPr lang="fr-BE" sz="2200" i="1">
-                              <a:latin typeface="Cambria Math" panose="02040503050406030204" pitchFamily="18" charset="0"/>
-                              <a:ea typeface="Cambria Math" panose="02040503050406030204" pitchFamily="18" charset="0"/>
-                            </a:rPr>
-                          </m:ctrlPr>
-                        </m:sSubPr>
-                        <m:e>
-                          <m:r>
-                            <a:rPr lang="fr-BE" sz="2200" i="1">
-                              <a:latin typeface="Cambria Math" panose="02040503050406030204" pitchFamily="18" charset="0"/>
-                              <a:ea typeface="Cambria Math" panose="02040503050406030204" pitchFamily="18" charset="0"/>
-                            </a:rPr>
-                            <m:t>𝛾</m:t>
-                          </m:r>
-                        </m:e>
-                        <m:sub>
-                          <m:r>
-                            <a:rPr lang="fr-BE" sz="2200" i="1">
-                              <a:latin typeface="Cambria Math" panose="02040503050406030204" pitchFamily="18" charset="0"/>
-                            </a:rPr>
-                            <m:t>𝑥</m:t>
-                          </m:r>
-                        </m:sub>
-                      </m:sSub>
-                      <m:sSub>
-                        <m:sSubPr>
-                          <m:ctrlPr>
-                            <a:rPr lang="fr-BE" sz="2200" i="1">
-                              <a:latin typeface="Cambria Math" panose="02040503050406030204" pitchFamily="18" charset="0"/>
-                            </a:rPr>
-                          </m:ctrlPr>
-                        </m:sSubPr>
-                        <m:e>
-                          <m:r>
-                            <a:rPr lang="fr-BE" sz="2200" i="1">
-                              <a:latin typeface="Cambria Math" panose="02040503050406030204" pitchFamily="18" charset="0"/>
-                            </a:rPr>
-                            <m:t>𝑣𝑎𝑟</m:t>
-                          </m:r>
-                        </m:e>
-                        <m:sub>
-                          <m:r>
-                            <a:rPr lang="fr-BE" sz="2200" i="1">
-                              <a:latin typeface="Cambria Math" panose="02040503050406030204" pitchFamily="18" charset="0"/>
-                            </a:rPr>
-                            <m:t>𝑥</m:t>
-                          </m:r>
-                        </m:sub>
-                      </m:sSub>
-                      <m:r>
-                        <a:rPr lang="fr-BE" sz="2200">
-                          <a:latin typeface="Cambria Math" panose="02040503050406030204" pitchFamily="18" charset="0"/>
-                        </a:rPr>
-                        <m:t>+</m:t>
-                      </m:r>
-                      <m:sSub>
-                        <m:sSubPr>
-                          <m:ctrlPr>
-                            <a:rPr lang="en-US" sz="2200" i="1">
-                              <a:latin typeface="Cambria Math" panose="02040503050406030204" pitchFamily="18" charset="0"/>
-                              <a:ea typeface="Cambria Math" panose="02040503050406030204" pitchFamily="18" charset="0"/>
-                            </a:rPr>
-                          </m:ctrlPr>
-                        </m:sSubPr>
-                        <m:e>
-                          <m:acc>
-                            <m:accPr>
-                              <m:chr m:val="̅"/>
-                              <m:ctrlPr>
-                                <a:rPr lang="en-US" sz="2200" i="1">
-                                  <a:latin typeface="Cambria Math" panose="02040503050406030204" pitchFamily="18" charset="0"/>
-                                  <a:ea typeface="Cambria Math" panose="02040503050406030204" pitchFamily="18" charset="0"/>
-                                </a:rPr>
-                              </m:ctrlPr>
-                            </m:accPr>
-                            <m:e>
-                              <m:sSub>
-                                <m:sSubPr>
-                                  <m:ctrlPr>
-                                    <a:rPr lang="en-US" sz="2200" i="1">
-                                      <a:latin typeface="Cambria Math" panose="02040503050406030204" pitchFamily="18" charset="0"/>
-                                      <a:ea typeface="Cambria Math" panose="02040503050406030204" pitchFamily="18" charset="0"/>
-                                    </a:rPr>
-                                  </m:ctrlPr>
-                                </m:sSubPr>
-                                <m:e>
-                                  <m:r>
-                                    <a:rPr lang="en-US" sz="2200" i="1">
-                                      <a:latin typeface="Cambria Math" panose="02040503050406030204" pitchFamily="18" charset="0"/>
-                                      <a:ea typeface="Cambria Math" panose="02040503050406030204" pitchFamily="18" charset="0"/>
-                                    </a:rPr>
-                                    <m:t>𝛿</m:t>
-                                  </m:r>
-                                </m:e>
-                                <m:sub>
-                                  <m:r>
-                                    <a:rPr lang="fr-BE" sz="2200" i="1">
-                                      <a:latin typeface="Cambria Math" panose="02040503050406030204" pitchFamily="18" charset="0"/>
-                                    </a:rPr>
-                                    <m:t>𝑥</m:t>
-                                  </m:r>
-                                </m:sub>
-                              </m:sSub>
-                            </m:e>
-                          </m:acc>
-                          <m:r>
-                            <a:rPr lang="fr-BE" sz="2200" i="1">
-                              <a:latin typeface="Cambria Math" panose="02040503050406030204" pitchFamily="18" charset="0"/>
-                            </a:rPr>
-                            <m:t>𝑣𝑎𝑟</m:t>
-                          </m:r>
-                        </m:e>
-                        <m:sub>
-                          <m:r>
-                            <a:rPr lang="fr-BE" sz="2200" i="1">
-                              <a:latin typeface="Cambria Math" panose="02040503050406030204" pitchFamily="18" charset="0"/>
-                            </a:rPr>
-                            <m:t>𝑥𝑓𝑖𝑥𝑒𝑑</m:t>
-                          </m:r>
-                        </m:sub>
-                      </m:sSub>
-                      <m:r>
-                        <a:rPr lang="fr-BE" sz="2200" i="1">
-                          <a:latin typeface="Cambria Math" panose="02040503050406030204" pitchFamily="18" charset="0"/>
-                        </a:rPr>
-                        <m:t>,   </m:t>
-                      </m:r>
-                      <m:r>
-                        <a:rPr lang="fr-BE" sz="2200" i="1">
-                          <a:latin typeface="Cambria Math" panose="02040503050406030204" pitchFamily="18" charset="0"/>
-                        </a:rPr>
-                        <m:t>𝑣𝑎𝑟</m:t>
-                      </m:r>
-                      <m:r>
-                        <a:rPr lang="fr-BE" sz="2200" i="1">
-                          <a:latin typeface="Cambria Math" panose="02040503050406030204" pitchFamily="18" charset="0"/>
-                        </a:rPr>
-                        <m:t>=</m:t>
-                      </m:r>
-                      <m:r>
-                        <a:rPr lang="fr-BE" sz="2200" i="1">
-                          <a:latin typeface="Cambria Math" panose="02040503050406030204" pitchFamily="18" charset="0"/>
-                        </a:rPr>
-                        <m:t>𝑜𝑢𝑡</m:t>
-                      </m:r>
-                      <m:r>
-                        <a:rPr lang="fr-BE" sz="2200" i="1">
-                          <a:latin typeface="Cambria Math" panose="02040503050406030204" pitchFamily="18" charset="0"/>
-                        </a:rPr>
-                        <m:t>,</m:t>
-                      </m:r>
-                      <m:r>
-                        <a:rPr lang="fr-BE" sz="2200" i="1">
-                          <a:latin typeface="Cambria Math" panose="02040503050406030204" pitchFamily="18" charset="0"/>
-                        </a:rPr>
-                        <m:t>𝑟𝑒𝑔</m:t>
-                      </m:r>
-                      <m:r>
-                        <a:rPr lang="fr-BE" sz="2200" i="1">
-                          <a:latin typeface="Cambria Math" panose="02040503050406030204" pitchFamily="18" charset="0"/>
-                        </a:rPr>
-                        <m:t>, </m:t>
-                      </m:r>
-                      <m:r>
-                        <a:rPr lang="fr-BE" sz="2200" i="1">
-                          <a:latin typeface="Cambria Math" panose="02040503050406030204" pitchFamily="18" charset="0"/>
-                        </a:rPr>
-                        <m:t>𝑐𝑎𝑙</m:t>
-                      </m:r>
-                    </m:oMath>
-                  </m:oMathPara>
-                </a14:m>
                 <a:endParaRPr lang="en-US" sz="2200" dirty="0"/>
               </a:p>
               <a:p>
@@ -12252,7 +9363,7 @@
             </p:txBody>
           </p:sp>
         </mc:Choice>
-        <mc:Fallback xmlns="">
+        <mc:Fallback>
           <p:sp>
             <p:nvSpPr>
               <p:cNvPr id="3" name="Content Placeholder 2"/>
@@ -12267,7 +9378,7 @@
               <a:blipFill>
                 <a:blip r:embed="rId2"/>
                 <a:stretch>
-                  <a:fillRect l="-754" t="-3109"/>
+                  <a:fillRect l="-754" t="-2720"/>
                 </a:stretch>
               </a:blipFill>
             </p:spPr>
@@ -12327,7 +9438,7 @@
 </p:sld>
 </file>
 
-<file path=ppt/slides/slide6.xml><?xml version="1.0" encoding="utf-8"?>
+<file path=ppt/slides/slide5.xml><?xml version="1.0" encoding="utf-8"?>
 <p:sld xmlns:a="http://schemas.openxmlformats.org/drawingml/2006/main" xmlns:r="http://schemas.openxmlformats.org/officeDocument/2006/relationships" xmlns:p="http://schemas.openxmlformats.org/presentationml/2006/main">
   <p:cSld>
     <p:spTree>
@@ -13289,7 +10400,7 @@
           <a:p>
             <a:fld id="{627CDA0C-01AE-4E2F-8829-AAF8EAAF9DB3}" type="slidenum">
               <a:rPr lang="en-US" smtClean="0"/>
-              <a:t>6</a:t>
+              <a:t>5</a:t>
             </a:fld>
             <a:endParaRPr lang="en-US"/>
           </a:p>
@@ -13335,7 +10446,7 @@
 </p:sld>
 </file>
 
-<file path=ppt/slides/slide7.xml><?xml version="1.0" encoding="utf-8"?>
+<file path=ppt/slides/slide6.xml><?xml version="1.0" encoding="utf-8"?>
 <p:sld xmlns:a="http://schemas.openxmlformats.org/drawingml/2006/main" xmlns:r="http://schemas.openxmlformats.org/officeDocument/2006/relationships" xmlns:p="http://schemas.openxmlformats.org/presentationml/2006/main">
   <p:cSld>
     <p:spTree>
@@ -13426,7 +10537,7 @@
             <a:fld id="{00000000-1234-1234-1234-123412341234}" type="slidenum">
               <a:rPr lang="en-GB" smtClean="0"/>
               <a:pPr/>
-              <a:t>7</a:t>
+              <a:t>6</a:t>
             </a:fld>
             <a:endParaRPr lang="en-GB"/>
           </a:p>
